--- a/slides/computerScience_day4.pptx
+++ b/slides/computerScience_day4.pptx
@@ -5,17 +5,24 @@
     <p:sldMasterId id="2147483660" r:id="rId1"/>
   </p:sldMasterIdLst>
   <p:notesMasterIdLst>
-    <p:notesMasterId r:id="rId10"/>
+    <p:notesMasterId r:id="rId17"/>
   </p:notesMasterIdLst>
   <p:sldIdLst>
     <p:sldId id="256" r:id="rId2"/>
     <p:sldId id="257" r:id="rId3"/>
     <p:sldId id="269" r:id="rId4"/>
     <p:sldId id="313" r:id="rId5"/>
-    <p:sldId id="312" r:id="rId6"/>
-    <p:sldId id="311" r:id="rId7"/>
-    <p:sldId id="306" r:id="rId8"/>
-    <p:sldId id="307" r:id="rId9"/>
+    <p:sldId id="315" r:id="rId6"/>
+    <p:sldId id="314" r:id="rId7"/>
+    <p:sldId id="316" r:id="rId8"/>
+    <p:sldId id="318" r:id="rId9"/>
+    <p:sldId id="317" r:id="rId10"/>
+    <p:sldId id="319" r:id="rId11"/>
+    <p:sldId id="320" r:id="rId12"/>
+    <p:sldId id="312" r:id="rId13"/>
+    <p:sldId id="311" r:id="rId14"/>
+    <p:sldId id="306" r:id="rId15"/>
+    <p:sldId id="307" r:id="rId16"/>
   </p:sldIdLst>
   <p:sldSz cx="12192000" cy="6858000"/>
   <p:notesSz cx="6858000" cy="9144000"/>
@@ -676,7 +683,7 @@
           <a:p>
             <a:fld id="{64334262-27A8-490F-AA41-F61BA7DFEBA9}" type="slidenum">
               <a:rPr kumimoji="1" lang="ja-JP" altLang="en-US" smtClean="0"/>
-              <a:t>5</a:t>
+              <a:t>12</a:t>
             </a:fld>
             <a:endParaRPr kumimoji="1" lang="ja-JP" altLang="en-US" dirty="0"/>
           </a:p>
@@ -5707,6 +5714,1779 @@
 </p:sld>
 </file>
 
+<file path=ppt/slides/slide10.xml><?xml version="1.0" encoding="utf-8"?>
+<p:sld xmlns:a="http://schemas.openxmlformats.org/drawingml/2006/main" xmlns:r="http://schemas.openxmlformats.org/officeDocument/2006/relationships" xmlns:p="http://schemas.openxmlformats.org/presentationml/2006/main">
+  <p:cSld>
+    <p:spTree>
+      <p:nvGrpSpPr>
+        <p:cNvPr id="1" name=""/>
+        <p:cNvGrpSpPr/>
+        <p:nvPr/>
+      </p:nvGrpSpPr>
+      <p:grpSpPr>
+        <a:xfrm>
+          <a:off x="0" y="0"/>
+          <a:ext cx="0" cy="0"/>
+          <a:chOff x="0" y="0"/>
+          <a:chExt cx="0" cy="0"/>
+        </a:xfrm>
+      </p:grpSpPr>
+      <p:sp>
+        <p:nvSpPr>
+          <p:cNvPr id="2" name="フッター プレースホルダー 1">
+            <a:extLst>
+              <a:ext uri="{FF2B5EF4-FFF2-40B4-BE49-F238E27FC236}">
+                <a16:creationId xmlns:a16="http://schemas.microsoft.com/office/drawing/2014/main" id="{AB554243-0138-C049-6F13-A7122AF85526}"/>
+              </a:ext>
+            </a:extLst>
+          </p:cNvPr>
+          <p:cNvSpPr>
+            <a:spLocks noGrp="1"/>
+          </p:cNvSpPr>
+          <p:nvPr>
+            <p:ph type="ftr" sz="quarter" idx="11"/>
+          </p:nvPr>
+        </p:nvSpPr>
+        <p:spPr/>
+        <p:txBody>
+          <a:bodyPr/>
+          <a:lstStyle/>
+          <a:p>
+            <a:r>
+              <a:rPr kumimoji="1" lang="ja-JP" altLang="en-US"/>
+              <a:t>情報科学ｃ</a:t>
+            </a:r>
+            <a:endParaRPr kumimoji="1" lang="ja-JP" altLang="en-US" dirty="0"/>
+          </a:p>
+        </p:txBody>
+      </p:sp>
+      <p:sp>
+        <p:nvSpPr>
+          <p:cNvPr id="3" name="タイトル 2">
+            <a:extLst>
+              <a:ext uri="{FF2B5EF4-FFF2-40B4-BE49-F238E27FC236}">
+                <a16:creationId xmlns:a16="http://schemas.microsoft.com/office/drawing/2014/main" id="{330F2605-48E0-ECCB-7116-8262AAEA2412}"/>
+              </a:ext>
+            </a:extLst>
+          </p:cNvPr>
+          <p:cNvSpPr>
+            <a:spLocks noGrp="1"/>
+          </p:cNvSpPr>
+          <p:nvPr>
+            <p:ph type="title"/>
+          </p:nvPr>
+        </p:nvSpPr>
+        <p:spPr/>
+        <p:txBody>
+          <a:bodyPr/>
+          <a:lstStyle/>
+          <a:p>
+            <a:r>
+              <a:rPr kumimoji="1" lang="ja-JP" altLang="en-US" dirty="0"/>
+              <a:t>クラスの</a:t>
+            </a:r>
+            <a:r>
+              <a:rPr kumimoji="1" lang="en-US" altLang="ja-JP" dirty="0"/>
+              <a:t>Docstring</a:t>
+            </a:r>
+            <a:r>
+              <a:rPr kumimoji="1" lang="ja-JP" altLang="en-US" dirty="0"/>
+              <a:t>を読む</a:t>
+            </a:r>
+          </a:p>
+        </p:txBody>
+      </p:sp>
+      <p:sp>
+        <p:nvSpPr>
+          <p:cNvPr id="4" name="コンテンツ プレースホルダー 3">
+            <a:extLst>
+              <a:ext uri="{FF2B5EF4-FFF2-40B4-BE49-F238E27FC236}">
+                <a16:creationId xmlns:a16="http://schemas.microsoft.com/office/drawing/2014/main" id="{1CD79A7C-2718-2A21-B91B-222B1B6DAC7D}"/>
+              </a:ext>
+            </a:extLst>
+          </p:cNvPr>
+          <p:cNvSpPr>
+            <a:spLocks noGrp="1"/>
+          </p:cNvSpPr>
+          <p:nvPr>
+            <p:ph idx="1"/>
+          </p:nvPr>
+        </p:nvSpPr>
+        <p:spPr/>
+        <p:txBody>
+          <a:bodyPr/>
+          <a:lstStyle/>
+          <a:p>
+            <a:r>
+              <a:rPr kumimoji="1" lang="ja-JP" altLang="en-US" dirty="0"/>
+              <a:t>たいていのお作法の良いクラス・関数は以下のコードで仕様や使い方が表示されます。</a:t>
+            </a:r>
+            <a:endParaRPr kumimoji="1" lang="en-US" altLang="ja-JP" dirty="0"/>
+          </a:p>
+          <a:p>
+            <a:endParaRPr lang="en-US" altLang="ja-JP" dirty="0"/>
+          </a:p>
+          <a:p>
+            <a:r>
+              <a:rPr kumimoji="1" lang="en-US" altLang="ja-JP" dirty="0"/>
+              <a:t>Docstring</a:t>
+            </a:r>
+            <a:r>
+              <a:rPr kumimoji="1" lang="ja-JP" altLang="en-US" dirty="0"/>
+              <a:t>という機能を使って実現しています</a:t>
+            </a:r>
+          </a:p>
+          <a:p>
+            <a:pPr lvl="1"/>
+            <a:r>
+              <a:rPr lang="ja-JP" altLang="en-US" dirty="0"/>
+              <a:t>詳細はテキストブックに書いたので読んでください。</a:t>
+            </a:r>
+            <a:endParaRPr kumimoji="1" lang="ja-JP" altLang="en-US" dirty="0"/>
+          </a:p>
+        </p:txBody>
+      </p:sp>
+      <p:sp>
+        <p:nvSpPr>
+          <p:cNvPr id="5" name="日付プレースホルダー 4">
+            <a:extLst>
+              <a:ext uri="{FF2B5EF4-FFF2-40B4-BE49-F238E27FC236}">
+                <a16:creationId xmlns:a16="http://schemas.microsoft.com/office/drawing/2014/main" id="{9A235E60-AD61-96C1-72AB-5B4375676AEE}"/>
+              </a:ext>
+            </a:extLst>
+          </p:cNvPr>
+          <p:cNvSpPr>
+            <a:spLocks noGrp="1"/>
+          </p:cNvSpPr>
+          <p:nvPr>
+            <p:ph type="dt" sz="half" idx="10"/>
+          </p:nvPr>
+        </p:nvSpPr>
+        <p:spPr/>
+        <p:txBody>
+          <a:bodyPr/>
+          <a:lstStyle/>
+          <a:p>
+            <a:r>
+              <a:rPr kumimoji="1" lang="en-US" altLang="ja-JP"/>
+              <a:t>Day4</a:t>
+            </a:r>
+            <a:endParaRPr kumimoji="1" lang="ja-JP" altLang="en-US"/>
+          </a:p>
+        </p:txBody>
+      </p:sp>
+      <p:sp>
+        <p:nvSpPr>
+          <p:cNvPr id="6" name="スライド番号プレースホルダー 5">
+            <a:extLst>
+              <a:ext uri="{FF2B5EF4-FFF2-40B4-BE49-F238E27FC236}">
+                <a16:creationId xmlns:a16="http://schemas.microsoft.com/office/drawing/2014/main" id="{8F6CEFB9-EB4B-2EB8-D0EB-095D98E4A41A}"/>
+              </a:ext>
+            </a:extLst>
+          </p:cNvPr>
+          <p:cNvSpPr>
+            <a:spLocks noGrp="1"/>
+          </p:cNvSpPr>
+          <p:nvPr>
+            <p:ph type="sldNum" sz="quarter" idx="12"/>
+          </p:nvPr>
+        </p:nvSpPr>
+        <p:spPr/>
+        <p:txBody>
+          <a:bodyPr/>
+          <a:lstStyle/>
+          <a:p>
+            <a:fld id="{B4DA0251-0B3B-4C1C-96DC-5D2833458AB2}" type="slidenum">
+              <a:rPr kumimoji="1" lang="ja-JP" altLang="en-US" smtClean="0"/>
+              <a:t>10</a:t>
+            </a:fld>
+            <a:endParaRPr kumimoji="1" lang="ja-JP" altLang="en-US"/>
+          </a:p>
+        </p:txBody>
+      </p:sp>
+      <p:sp>
+        <p:nvSpPr>
+          <p:cNvPr id="7" name="テキスト ボックス 6">
+            <a:extLst>
+              <a:ext uri="{FF2B5EF4-FFF2-40B4-BE49-F238E27FC236}">
+                <a16:creationId xmlns:a16="http://schemas.microsoft.com/office/drawing/2014/main" id="{3FB528BA-B59C-3CF8-669F-9B8375A2C123}"/>
+              </a:ext>
+            </a:extLst>
+          </p:cNvPr>
+          <p:cNvSpPr txBox="1"/>
+          <p:nvPr/>
+        </p:nvSpPr>
+        <p:spPr>
+          <a:xfrm>
+            <a:off x="1483567" y="2781354"/>
+            <a:ext cx="9870232" cy="369332"/>
+          </a:xfrm>
+          <a:prstGeom prst="rect">
+            <a:avLst/>
+          </a:prstGeom>
+          <a:solidFill>
+            <a:schemeClr val="tx1">
+              <a:lumMod val="20000"/>
+              <a:lumOff val="80000"/>
+            </a:schemeClr>
+          </a:solidFill>
+        </p:spPr>
+        <p:txBody>
+          <a:bodyPr wrap="square" rtlCol="0">
+            <a:spAutoFit/>
+          </a:bodyPr>
+          <a:lstStyle/>
+          <a:p>
+            <a:r>
+              <a:rPr lang="en-US" altLang="ja-JP" b="0" dirty="0">
+                <a:solidFill>
+                  <a:srgbClr val="795E26"/>
+                </a:solidFill>
+                <a:effectLst/>
+                <a:latin typeface="Courier New" panose="02070309020205020404" pitchFamily="49" charset="0"/>
+              </a:rPr>
+              <a:t>help</a:t>
+            </a:r>
+            <a:r>
+              <a:rPr lang="en-US" altLang="ja-JP" b="0" dirty="0">
+                <a:solidFill>
+                  <a:srgbClr val="000000"/>
+                </a:solidFill>
+                <a:effectLst/>
+                <a:latin typeface="Courier New" panose="02070309020205020404" pitchFamily="49" charset="0"/>
+              </a:rPr>
+              <a:t>(</a:t>
+            </a:r>
+            <a:r>
+              <a:rPr lang="en-US" altLang="ja-JP" b="0" dirty="0" err="1">
+                <a:solidFill>
+                  <a:srgbClr val="000000"/>
+                </a:solidFill>
+                <a:effectLst/>
+                <a:latin typeface="Courier New" panose="02070309020205020404" pitchFamily="49" charset="0"/>
+              </a:rPr>
+              <a:t>SelfPortrait</a:t>
+            </a:r>
+            <a:r>
+              <a:rPr lang="en-US" altLang="ja-JP" b="0" dirty="0">
+                <a:solidFill>
+                  <a:srgbClr val="000000"/>
+                </a:solidFill>
+                <a:effectLst/>
+                <a:latin typeface="Courier New" panose="02070309020205020404" pitchFamily="49" charset="0"/>
+              </a:rPr>
+              <a:t>)</a:t>
+            </a:r>
+          </a:p>
+        </p:txBody>
+      </p:sp>
+    </p:spTree>
+    <p:extLst>
+      <p:ext uri="{BB962C8B-B14F-4D97-AF65-F5344CB8AC3E}">
+        <p14:creationId xmlns:p14="http://schemas.microsoft.com/office/powerpoint/2010/main" val="2606902410"/>
+      </p:ext>
+    </p:extLst>
+  </p:cSld>
+  <p:clrMapOvr>
+    <a:masterClrMapping/>
+  </p:clrMapOvr>
+  <mc:AlternateContent xmlns:mc="http://schemas.openxmlformats.org/markup-compatibility/2006" xmlns:p14="http://schemas.microsoft.com/office/powerpoint/2010/main">
+    <mc:Choice Requires="p14">
+      <p:transition spd="med" p14:dur="700">
+        <p:fade/>
+      </p:transition>
+    </mc:Choice>
+    <mc:Fallback xmlns="">
+      <p:transition spd="med">
+        <p:fade/>
+      </p:transition>
+    </mc:Fallback>
+  </mc:AlternateContent>
+</p:sld>
+</file>
+
+<file path=ppt/slides/slide11.xml><?xml version="1.0" encoding="utf-8"?>
+<p:sld xmlns:a="http://schemas.openxmlformats.org/drawingml/2006/main" xmlns:r="http://schemas.openxmlformats.org/officeDocument/2006/relationships" xmlns:p="http://schemas.openxmlformats.org/presentationml/2006/main">
+  <p:cSld>
+    <p:spTree>
+      <p:nvGrpSpPr>
+        <p:cNvPr id="1" name=""/>
+        <p:cNvGrpSpPr/>
+        <p:nvPr/>
+      </p:nvGrpSpPr>
+      <p:grpSpPr>
+        <a:xfrm>
+          <a:off x="0" y="0"/>
+          <a:ext cx="0" cy="0"/>
+          <a:chOff x="0" y="0"/>
+          <a:chExt cx="0" cy="0"/>
+        </a:xfrm>
+      </p:grpSpPr>
+      <p:sp>
+        <p:nvSpPr>
+          <p:cNvPr id="2" name="フッター プレースホルダー 1">
+            <a:extLst>
+              <a:ext uri="{FF2B5EF4-FFF2-40B4-BE49-F238E27FC236}">
+                <a16:creationId xmlns:a16="http://schemas.microsoft.com/office/drawing/2014/main" id="{CEAC3AA0-D8F9-73A3-985E-A64304F97735}"/>
+              </a:ext>
+            </a:extLst>
+          </p:cNvPr>
+          <p:cNvSpPr>
+            <a:spLocks noGrp="1"/>
+          </p:cNvSpPr>
+          <p:nvPr>
+            <p:ph type="ftr" sz="quarter" idx="11"/>
+          </p:nvPr>
+        </p:nvSpPr>
+        <p:spPr/>
+        <p:txBody>
+          <a:bodyPr/>
+          <a:lstStyle/>
+          <a:p>
+            <a:r>
+              <a:rPr kumimoji="1" lang="ja-JP" altLang="en-US"/>
+              <a:t>情報科学ｃ</a:t>
+            </a:r>
+            <a:endParaRPr kumimoji="1" lang="ja-JP" altLang="en-US" dirty="0"/>
+          </a:p>
+        </p:txBody>
+      </p:sp>
+      <p:sp>
+        <p:nvSpPr>
+          <p:cNvPr id="3" name="タイトル 2">
+            <a:extLst>
+              <a:ext uri="{FF2B5EF4-FFF2-40B4-BE49-F238E27FC236}">
+                <a16:creationId xmlns:a16="http://schemas.microsoft.com/office/drawing/2014/main" id="{C0031409-A47B-7123-9B0F-55DF66FE446B}"/>
+              </a:ext>
+            </a:extLst>
+          </p:cNvPr>
+          <p:cNvSpPr>
+            <a:spLocks noGrp="1"/>
+          </p:cNvSpPr>
+          <p:nvPr>
+            <p:ph type="title"/>
+          </p:nvPr>
+        </p:nvSpPr>
+        <p:spPr/>
+        <p:txBody>
+          <a:bodyPr/>
+          <a:lstStyle/>
+          <a:p>
+            <a:r>
+              <a:rPr kumimoji="1" lang="ja-JP" altLang="en-US" dirty="0"/>
+              <a:t>クラスの継承</a:t>
+            </a:r>
+          </a:p>
+        </p:txBody>
+      </p:sp>
+      <p:sp>
+        <p:nvSpPr>
+          <p:cNvPr id="4" name="コンテンツ プレースホルダー 3">
+            <a:extLst>
+              <a:ext uri="{FF2B5EF4-FFF2-40B4-BE49-F238E27FC236}">
+                <a16:creationId xmlns:a16="http://schemas.microsoft.com/office/drawing/2014/main" id="{0EF45CB2-D066-6510-E8C1-3C82699217FD}"/>
+              </a:ext>
+            </a:extLst>
+          </p:cNvPr>
+          <p:cNvSpPr>
+            <a:spLocks noGrp="1"/>
+          </p:cNvSpPr>
+          <p:nvPr>
+            <p:ph idx="1"/>
+          </p:nvPr>
+        </p:nvSpPr>
+        <p:spPr/>
+        <p:txBody>
+          <a:bodyPr/>
+          <a:lstStyle/>
+          <a:p>
+            <a:r>
+              <a:rPr lang="ja-JP" altLang="en-US" dirty="0"/>
+              <a:t>テキストで例示をしていますので読んでください。</a:t>
+            </a:r>
+          </a:p>
+        </p:txBody>
+      </p:sp>
+      <p:sp>
+        <p:nvSpPr>
+          <p:cNvPr id="5" name="日付プレースホルダー 4">
+            <a:extLst>
+              <a:ext uri="{FF2B5EF4-FFF2-40B4-BE49-F238E27FC236}">
+                <a16:creationId xmlns:a16="http://schemas.microsoft.com/office/drawing/2014/main" id="{57606D0D-E704-AB86-71D1-D425BE32787D}"/>
+              </a:ext>
+            </a:extLst>
+          </p:cNvPr>
+          <p:cNvSpPr>
+            <a:spLocks noGrp="1"/>
+          </p:cNvSpPr>
+          <p:nvPr>
+            <p:ph type="dt" sz="half" idx="10"/>
+          </p:nvPr>
+        </p:nvSpPr>
+        <p:spPr/>
+        <p:txBody>
+          <a:bodyPr/>
+          <a:lstStyle/>
+          <a:p>
+            <a:r>
+              <a:rPr kumimoji="1" lang="en-US" altLang="ja-JP"/>
+              <a:t>Day4</a:t>
+            </a:r>
+            <a:endParaRPr kumimoji="1" lang="ja-JP" altLang="en-US"/>
+          </a:p>
+        </p:txBody>
+      </p:sp>
+      <p:sp>
+        <p:nvSpPr>
+          <p:cNvPr id="6" name="スライド番号プレースホルダー 5">
+            <a:extLst>
+              <a:ext uri="{FF2B5EF4-FFF2-40B4-BE49-F238E27FC236}">
+                <a16:creationId xmlns:a16="http://schemas.microsoft.com/office/drawing/2014/main" id="{889CDD6C-FE4D-BC1F-3EAD-33EB76B1D939}"/>
+              </a:ext>
+            </a:extLst>
+          </p:cNvPr>
+          <p:cNvSpPr>
+            <a:spLocks noGrp="1"/>
+          </p:cNvSpPr>
+          <p:nvPr>
+            <p:ph type="sldNum" sz="quarter" idx="12"/>
+          </p:nvPr>
+        </p:nvSpPr>
+        <p:spPr/>
+        <p:txBody>
+          <a:bodyPr/>
+          <a:lstStyle/>
+          <a:p>
+            <a:fld id="{B4DA0251-0B3B-4C1C-96DC-5D2833458AB2}" type="slidenum">
+              <a:rPr kumimoji="1" lang="ja-JP" altLang="en-US" smtClean="0"/>
+              <a:t>11</a:t>
+            </a:fld>
+            <a:endParaRPr kumimoji="1" lang="ja-JP" altLang="en-US"/>
+          </a:p>
+        </p:txBody>
+      </p:sp>
+    </p:spTree>
+    <p:extLst>
+      <p:ext uri="{BB962C8B-B14F-4D97-AF65-F5344CB8AC3E}">
+        <p14:creationId xmlns:p14="http://schemas.microsoft.com/office/powerpoint/2010/main" val="2696902509"/>
+      </p:ext>
+    </p:extLst>
+  </p:cSld>
+  <p:clrMapOvr>
+    <a:masterClrMapping/>
+  </p:clrMapOvr>
+  <mc:AlternateContent xmlns:mc="http://schemas.openxmlformats.org/markup-compatibility/2006" xmlns:p14="http://schemas.microsoft.com/office/powerpoint/2010/main">
+    <mc:Choice Requires="p14">
+      <p:transition spd="med" p14:dur="700">
+        <p:fade/>
+      </p:transition>
+    </mc:Choice>
+    <mc:Fallback xmlns="">
+      <p:transition spd="med">
+        <p:fade/>
+      </p:transition>
+    </mc:Fallback>
+  </mc:AlternateContent>
+</p:sld>
+</file>
+
+<file path=ppt/slides/slide12.xml><?xml version="1.0" encoding="utf-8"?>
+<p:sld xmlns:a="http://schemas.openxmlformats.org/drawingml/2006/main" xmlns:r="http://schemas.openxmlformats.org/officeDocument/2006/relationships" xmlns:p="http://schemas.openxmlformats.org/presentationml/2006/main">
+  <p:cSld>
+    <p:spTree>
+      <p:nvGrpSpPr>
+        <p:cNvPr id="1" name="">
+          <a:extLst>
+            <a:ext uri="{FF2B5EF4-FFF2-40B4-BE49-F238E27FC236}">
+              <a16:creationId xmlns:a16="http://schemas.microsoft.com/office/drawing/2014/main" id="{D011B88A-756A-8C27-B32F-01E683510C3E}"/>
+            </a:ext>
+          </a:extLst>
+        </p:cNvPr>
+        <p:cNvGrpSpPr/>
+        <p:nvPr/>
+      </p:nvGrpSpPr>
+      <p:grpSpPr>
+        <a:xfrm>
+          <a:off x="0" y="0"/>
+          <a:ext cx="0" cy="0"/>
+          <a:chOff x="0" y="0"/>
+          <a:chExt cx="0" cy="0"/>
+        </a:xfrm>
+      </p:grpSpPr>
+      <p:sp>
+        <p:nvSpPr>
+          <p:cNvPr id="6" name="タイトル 5">
+            <a:extLst>
+              <a:ext uri="{FF2B5EF4-FFF2-40B4-BE49-F238E27FC236}">
+                <a16:creationId xmlns:a16="http://schemas.microsoft.com/office/drawing/2014/main" id="{9C18B763-0475-78FE-A8A2-84DB99AFE3FF}"/>
+              </a:ext>
+            </a:extLst>
+          </p:cNvPr>
+          <p:cNvSpPr>
+            <a:spLocks noGrp="1"/>
+          </p:cNvSpPr>
+          <p:nvPr>
+            <p:ph type="title"/>
+          </p:nvPr>
+        </p:nvSpPr>
+        <p:spPr/>
+        <p:txBody>
+          <a:bodyPr/>
+          <a:lstStyle/>
+          <a:p>
+            <a:r>
+              <a:rPr kumimoji="1" lang="ja-JP" altLang="en-US" dirty="0"/>
+              <a:t>情報科学Ｃ</a:t>
+            </a:r>
+          </a:p>
+        </p:txBody>
+      </p:sp>
+      <p:sp>
+        <p:nvSpPr>
+          <p:cNvPr id="7" name="テキスト プレースホルダー 6">
+            <a:extLst>
+              <a:ext uri="{FF2B5EF4-FFF2-40B4-BE49-F238E27FC236}">
+                <a16:creationId xmlns:a16="http://schemas.microsoft.com/office/drawing/2014/main" id="{71643E4A-F817-C4F4-6376-C1A7E11C6606}"/>
+              </a:ext>
+            </a:extLst>
+          </p:cNvPr>
+          <p:cNvSpPr>
+            <a:spLocks noGrp="1"/>
+          </p:cNvSpPr>
+          <p:nvPr>
+            <p:ph type="body" idx="1"/>
+          </p:nvPr>
+        </p:nvSpPr>
+        <p:spPr/>
+        <p:txBody>
+          <a:bodyPr/>
+          <a:lstStyle/>
+          <a:p>
+            <a:r>
+              <a:rPr lang="ja-JP" altLang="en-US" dirty="0"/>
+              <a:t>第３回　</a:t>
+            </a:r>
+            <a:r>
+              <a:rPr kumimoji="1" lang="ja-JP" altLang="en-US" sz="2400" dirty="0"/>
+              <a:t>演算子／制御構文</a:t>
+            </a:r>
+            <a:r>
+              <a:rPr kumimoji="1" lang="ja-JP" altLang="en-US" sz="2400" u="sng" dirty="0"/>
+              <a:t>演習</a:t>
+            </a:r>
+          </a:p>
+        </p:txBody>
+      </p:sp>
+      <p:sp>
+        <p:nvSpPr>
+          <p:cNvPr id="4" name="フッター プレースホルダー 3">
+            <a:extLst>
+              <a:ext uri="{FF2B5EF4-FFF2-40B4-BE49-F238E27FC236}">
+                <a16:creationId xmlns:a16="http://schemas.microsoft.com/office/drawing/2014/main" id="{2DF7172A-BF2F-971C-4C78-E6AF45192111}"/>
+              </a:ext>
+            </a:extLst>
+          </p:cNvPr>
+          <p:cNvSpPr>
+            <a:spLocks noGrp="1"/>
+          </p:cNvSpPr>
+          <p:nvPr>
+            <p:ph type="ftr" sz="quarter" idx="11"/>
+          </p:nvPr>
+        </p:nvSpPr>
+        <p:spPr/>
+        <p:txBody>
+          <a:bodyPr/>
+          <a:lstStyle/>
+          <a:p>
+            <a:r>
+              <a:rPr kumimoji="1" lang="ja-JP" altLang="en-US"/>
+              <a:t>情報科学ｃ</a:t>
+            </a:r>
+            <a:endParaRPr kumimoji="1" lang="ja-JP" altLang="en-US" dirty="0"/>
+          </a:p>
+        </p:txBody>
+      </p:sp>
+      <p:sp>
+        <p:nvSpPr>
+          <p:cNvPr id="5" name="スライド番号プレースホルダー 4">
+            <a:extLst>
+              <a:ext uri="{FF2B5EF4-FFF2-40B4-BE49-F238E27FC236}">
+                <a16:creationId xmlns:a16="http://schemas.microsoft.com/office/drawing/2014/main" id="{983C0C92-E4BC-74D9-F085-3343F45429F5}"/>
+              </a:ext>
+            </a:extLst>
+          </p:cNvPr>
+          <p:cNvSpPr>
+            <a:spLocks noGrp="1"/>
+          </p:cNvSpPr>
+          <p:nvPr>
+            <p:ph type="sldNum" sz="quarter" idx="12"/>
+          </p:nvPr>
+        </p:nvSpPr>
+        <p:spPr/>
+        <p:txBody>
+          <a:bodyPr/>
+          <a:lstStyle/>
+          <a:p>
+            <a:r>
+              <a:rPr lang="en-US" altLang="ja-JP"/>
+              <a:t>p.</a:t>
+            </a:r>
+            <a:fld id="{71584EDF-536B-41D0-946E-780F35A2C473}" type="slidenum">
+              <a:rPr lang="ja-JP" altLang="en-US" smtClean="0"/>
+              <a:pPr/>
+              <a:t>12</a:t>
+            </a:fld>
+            <a:endParaRPr lang="ja-JP" altLang="en-US" dirty="0"/>
+          </a:p>
+        </p:txBody>
+      </p:sp>
+      <p:sp>
+        <p:nvSpPr>
+          <p:cNvPr id="2" name="日付プレースホルダー 1">
+            <a:extLst>
+              <a:ext uri="{FF2B5EF4-FFF2-40B4-BE49-F238E27FC236}">
+                <a16:creationId xmlns:a16="http://schemas.microsoft.com/office/drawing/2014/main" id="{CA7D10DA-4F17-19BF-669E-FFACEE0CCB2F}"/>
+              </a:ext>
+            </a:extLst>
+          </p:cNvPr>
+          <p:cNvSpPr>
+            <a:spLocks noGrp="1"/>
+          </p:cNvSpPr>
+          <p:nvPr>
+            <p:ph type="dt" sz="half" idx="10"/>
+          </p:nvPr>
+        </p:nvSpPr>
+        <p:spPr/>
+        <p:txBody>
+          <a:bodyPr/>
+          <a:lstStyle/>
+          <a:p>
+            <a:r>
+              <a:rPr lang="en-US" altLang="ja-JP"/>
+              <a:t>Day4</a:t>
+            </a:r>
+            <a:endParaRPr lang="ja-JP" altLang="en-US" dirty="0"/>
+          </a:p>
+        </p:txBody>
+      </p:sp>
+    </p:spTree>
+    <p:extLst>
+      <p:ext uri="{BB962C8B-B14F-4D97-AF65-F5344CB8AC3E}">
+        <p14:creationId xmlns:p14="http://schemas.microsoft.com/office/powerpoint/2010/main" val="1030669595"/>
+      </p:ext>
+    </p:extLst>
+  </p:cSld>
+  <p:clrMapOvr>
+    <a:masterClrMapping/>
+  </p:clrMapOvr>
+  <mc:AlternateContent xmlns:mc="http://schemas.openxmlformats.org/markup-compatibility/2006" xmlns:p14="http://schemas.microsoft.com/office/powerpoint/2010/main">
+    <mc:Choice Requires="p14">
+      <p:transition spd="med" p14:dur="700">
+        <p:fade/>
+      </p:transition>
+    </mc:Choice>
+    <mc:Fallback xmlns="">
+      <p:transition spd="med">
+        <p:fade/>
+      </p:transition>
+    </mc:Fallback>
+  </mc:AlternateContent>
+</p:sld>
+</file>
+
+<file path=ppt/slides/slide13.xml><?xml version="1.0" encoding="utf-8"?>
+<p:sld xmlns:a="http://schemas.openxmlformats.org/drawingml/2006/main" xmlns:r="http://schemas.openxmlformats.org/officeDocument/2006/relationships" xmlns:p="http://schemas.openxmlformats.org/presentationml/2006/main">
+  <p:cSld>
+    <p:spTree>
+      <p:nvGrpSpPr>
+        <p:cNvPr id="1" name="">
+          <a:extLst>
+            <a:ext uri="{FF2B5EF4-FFF2-40B4-BE49-F238E27FC236}">
+              <a16:creationId xmlns:a16="http://schemas.microsoft.com/office/drawing/2014/main" id="{A3953DF0-2AD1-7696-259C-7B8580FC4846}"/>
+            </a:ext>
+          </a:extLst>
+        </p:cNvPr>
+        <p:cNvGrpSpPr/>
+        <p:nvPr/>
+      </p:nvGrpSpPr>
+      <p:grpSpPr>
+        <a:xfrm>
+          <a:off x="0" y="0"/>
+          <a:ext cx="0" cy="0"/>
+          <a:chOff x="0" y="0"/>
+          <a:chExt cx="0" cy="0"/>
+        </a:xfrm>
+      </p:grpSpPr>
+      <p:sp>
+        <p:nvSpPr>
+          <p:cNvPr id="2" name="フッター プレースホルダー 1">
+            <a:extLst>
+              <a:ext uri="{FF2B5EF4-FFF2-40B4-BE49-F238E27FC236}">
+                <a16:creationId xmlns:a16="http://schemas.microsoft.com/office/drawing/2014/main" id="{17FAFD9B-4C0B-9EF1-5FFA-1FF6B1892E46}"/>
+              </a:ext>
+            </a:extLst>
+          </p:cNvPr>
+          <p:cNvSpPr>
+            <a:spLocks noGrp="1"/>
+          </p:cNvSpPr>
+          <p:nvPr>
+            <p:ph type="ftr" sz="quarter" idx="11"/>
+          </p:nvPr>
+        </p:nvSpPr>
+        <p:spPr/>
+        <p:txBody>
+          <a:bodyPr/>
+          <a:lstStyle/>
+          <a:p>
+            <a:r>
+              <a:rPr kumimoji="1" lang="ja-JP" altLang="en-US"/>
+              <a:t>情報科学ｃ</a:t>
+            </a:r>
+            <a:endParaRPr kumimoji="1" lang="ja-JP" altLang="en-US" dirty="0"/>
+          </a:p>
+        </p:txBody>
+      </p:sp>
+      <p:sp>
+        <p:nvSpPr>
+          <p:cNvPr id="3" name="タイトル 2">
+            <a:extLst>
+              <a:ext uri="{FF2B5EF4-FFF2-40B4-BE49-F238E27FC236}">
+                <a16:creationId xmlns:a16="http://schemas.microsoft.com/office/drawing/2014/main" id="{61611AAF-3D0D-8B64-C9FF-CB319AFE7F47}"/>
+              </a:ext>
+            </a:extLst>
+          </p:cNvPr>
+          <p:cNvSpPr>
+            <a:spLocks noGrp="1"/>
+          </p:cNvSpPr>
+          <p:nvPr>
+            <p:ph type="title"/>
+          </p:nvPr>
+        </p:nvSpPr>
+        <p:spPr/>
+        <p:txBody>
+          <a:bodyPr/>
+          <a:lstStyle/>
+          <a:p>
+            <a:r>
+              <a:rPr kumimoji="1" lang="en-US" altLang="ja-JP" sz="2800" dirty="0"/>
+              <a:t>[</a:t>
+            </a:r>
+            <a:r>
+              <a:rPr kumimoji="1" lang="en-US" altLang="ja-JP" sz="2800" dirty="0">
+                <a:solidFill>
+                  <a:schemeClr val="accent1"/>
+                </a:solidFill>
+              </a:rPr>
+              <a:t>14</a:t>
+            </a:r>
+            <a:r>
+              <a:rPr kumimoji="1" lang="en-US" altLang="ja-JP" sz="2800" dirty="0"/>
+              <a:t>-day04kk] </a:t>
+            </a:r>
+            <a:br>
+              <a:rPr kumimoji="1" lang="ja-JP" altLang="en-US" dirty="0"/>
+            </a:br>
+            <a:r>
+              <a:rPr kumimoji="1" lang="ja-JP" altLang="en-US" dirty="0"/>
+              <a:t>オブジェクト指向の効能を知ろう</a:t>
+            </a:r>
+          </a:p>
+        </p:txBody>
+      </p:sp>
+      <p:sp>
+        <p:nvSpPr>
+          <p:cNvPr id="4" name="コンテンツ プレースホルダー 3">
+            <a:extLst>
+              <a:ext uri="{FF2B5EF4-FFF2-40B4-BE49-F238E27FC236}">
+                <a16:creationId xmlns:a16="http://schemas.microsoft.com/office/drawing/2014/main" id="{54A2E979-0E7F-5B1C-1282-C07F86B7ED28}"/>
+              </a:ext>
+            </a:extLst>
+          </p:cNvPr>
+          <p:cNvSpPr>
+            <a:spLocks noGrp="1"/>
+          </p:cNvSpPr>
+          <p:nvPr>
+            <p:ph idx="1"/>
+          </p:nvPr>
+        </p:nvSpPr>
+        <p:spPr/>
+        <p:txBody>
+          <a:bodyPr>
+            <a:normAutofit fontScale="92500" lnSpcReduction="10000"/>
+          </a:bodyPr>
+          <a:lstStyle/>
+          <a:p>
+            <a:r>
+              <a:rPr kumimoji="1" lang="ja-JP" altLang="en-US" dirty="0"/>
+              <a:t>お題</a:t>
+            </a:r>
+          </a:p>
+          <a:p>
+            <a:pPr lvl="1"/>
+            <a:r>
+              <a:rPr lang="ja-JP" altLang="en-US" dirty="0"/>
+              <a:t>以下の要件に基づいて皆さんの似顔絵を作ってください</a:t>
+            </a:r>
+          </a:p>
+          <a:p>
+            <a:pPr lvl="2"/>
+            <a:r>
+              <a:rPr lang="en-US" altLang="ja-JP" dirty="0" err="1"/>
+              <a:t>SelfPortrait</a:t>
+            </a:r>
+            <a:r>
+              <a:rPr lang="ja-JP" altLang="en-US" dirty="0"/>
+              <a:t>クラスを継承して</a:t>
+            </a:r>
+            <a:r>
+              <a:rPr lang="en-US" altLang="ja-JP" dirty="0" err="1"/>
+              <a:t>MyPortrait</a:t>
+            </a:r>
+            <a:r>
+              <a:rPr lang="ja-JP" altLang="en-US" dirty="0"/>
+              <a:t>クラスを作成</a:t>
+            </a:r>
+          </a:p>
+          <a:p>
+            <a:pPr lvl="2"/>
+            <a:r>
+              <a:rPr lang="ja-JP" altLang="en-US" dirty="0"/>
+              <a:t>顔のパーツを描くメソッドを一部</a:t>
+            </a:r>
+            <a:r>
+              <a:rPr lang="en-US" altLang="ja-JP" dirty="0"/>
+              <a:t>or</a:t>
+            </a:r>
+            <a:r>
+              <a:rPr lang="ja-JP" altLang="en-US" dirty="0"/>
+              <a:t>全部オーバーライドして自分に似せる</a:t>
+            </a:r>
+          </a:p>
+          <a:p>
+            <a:pPr lvl="3"/>
+            <a:r>
+              <a:rPr lang="ja-JP" altLang="en-US" dirty="0"/>
+              <a:t>出来る限りね</a:t>
+            </a:r>
+            <a:endParaRPr lang="en-US" altLang="ja-JP" dirty="0"/>
+          </a:p>
+          <a:p>
+            <a:pPr lvl="2"/>
+            <a:r>
+              <a:rPr lang="ja-JP" altLang="en-US" dirty="0"/>
+              <a:t>インスタンスを作成し描画を実行してきちんと顔が描ける事を確認</a:t>
+            </a:r>
+            <a:endParaRPr lang="en-US" altLang="ja-JP" dirty="0"/>
+          </a:p>
+          <a:p>
+            <a:pPr lvl="2"/>
+            <a:r>
+              <a:rPr lang="ja-JP" altLang="en-US" dirty="0"/>
+              <a:t>ノート最下部にある</a:t>
+            </a:r>
+            <a:r>
+              <a:rPr lang="ja-JP" altLang="en-US" b="1" dirty="0"/>
+              <a:t>似顔絵画像保存コード</a:t>
+            </a:r>
+            <a:r>
+              <a:rPr lang="ja-JP" altLang="en-US" dirty="0"/>
+              <a:t>を必ず実行してください。</a:t>
+            </a:r>
+          </a:p>
+          <a:p>
+            <a:pPr lvl="3"/>
+            <a:r>
+              <a:rPr lang="en-US" altLang="ja-JP" dirty="0"/>
+              <a:t>Google Drive</a:t>
+            </a:r>
+            <a:r>
+              <a:rPr lang="ja-JP" altLang="en-US" dirty="0"/>
+              <a:t>の使用許可がでるので「許可」してください</a:t>
+            </a:r>
+          </a:p>
+          <a:p>
+            <a:pPr lvl="2"/>
+            <a:r>
+              <a:rPr lang="en-US" altLang="ja-JP" dirty="0"/>
+              <a:t>Google Classroom</a:t>
+            </a:r>
+            <a:r>
+              <a:rPr lang="ja-JP" altLang="en-US" dirty="0"/>
+              <a:t>で提出</a:t>
+            </a:r>
+          </a:p>
+          <a:p>
+            <a:r>
+              <a:rPr lang="ja-JP" altLang="en-US" dirty="0"/>
+              <a:t>発表：希望者のみ先着順で講義終了時刻まで</a:t>
+            </a:r>
+            <a:endParaRPr lang="en-US" altLang="ja-JP" dirty="0"/>
+          </a:p>
+          <a:p>
+            <a:pPr lvl="1"/>
+            <a:r>
+              <a:rPr lang="ja-JP" altLang="en-US" dirty="0"/>
+              <a:t>（課題が重たいので発表は次回の講義にしようか考え中</a:t>
+            </a:r>
+            <a:r>
+              <a:rPr lang="en-US" altLang="ja-JP" dirty="0"/>
+              <a:t>…</a:t>
+            </a:r>
+            <a:r>
+              <a:rPr lang="ja-JP" altLang="en-US" dirty="0"/>
+              <a:t>）</a:t>
+            </a:r>
+          </a:p>
+          <a:p>
+            <a:pPr lvl="1"/>
+            <a:r>
+              <a:rPr lang="ja-JP" altLang="en-US" dirty="0"/>
+              <a:t>前でノートを表示しながら簡単に説明をしてもらいます</a:t>
+            </a:r>
+          </a:p>
+          <a:p>
+            <a:pPr lvl="1"/>
+            <a:r>
+              <a:rPr lang="ja-JP" altLang="en-US" dirty="0"/>
+              <a:t>発表した人は記録して、成績の加点対象にします</a:t>
+            </a:r>
+            <a:endParaRPr kumimoji="1" lang="ja-JP" altLang="en-US" dirty="0"/>
+          </a:p>
+        </p:txBody>
+      </p:sp>
+      <p:sp>
+        <p:nvSpPr>
+          <p:cNvPr id="5" name="日付プレースホルダー 4">
+            <a:extLst>
+              <a:ext uri="{FF2B5EF4-FFF2-40B4-BE49-F238E27FC236}">
+                <a16:creationId xmlns:a16="http://schemas.microsoft.com/office/drawing/2014/main" id="{1E6EC982-1A89-389F-C924-7ED8328AB307}"/>
+              </a:ext>
+            </a:extLst>
+          </p:cNvPr>
+          <p:cNvSpPr>
+            <a:spLocks noGrp="1"/>
+          </p:cNvSpPr>
+          <p:nvPr>
+            <p:ph type="dt" sz="half" idx="10"/>
+          </p:nvPr>
+        </p:nvSpPr>
+        <p:spPr/>
+        <p:txBody>
+          <a:bodyPr/>
+          <a:lstStyle/>
+          <a:p>
+            <a:r>
+              <a:rPr kumimoji="1" lang="en-US" altLang="ja-JP"/>
+              <a:t>Day4</a:t>
+            </a:r>
+            <a:endParaRPr kumimoji="1" lang="ja-JP" altLang="en-US"/>
+          </a:p>
+        </p:txBody>
+      </p:sp>
+      <p:sp>
+        <p:nvSpPr>
+          <p:cNvPr id="6" name="スライド番号プレースホルダー 5">
+            <a:extLst>
+              <a:ext uri="{FF2B5EF4-FFF2-40B4-BE49-F238E27FC236}">
+                <a16:creationId xmlns:a16="http://schemas.microsoft.com/office/drawing/2014/main" id="{3B1DE181-3A7C-2141-F754-2D466590CF3F}"/>
+              </a:ext>
+            </a:extLst>
+          </p:cNvPr>
+          <p:cNvSpPr>
+            <a:spLocks noGrp="1"/>
+          </p:cNvSpPr>
+          <p:nvPr>
+            <p:ph type="sldNum" sz="quarter" idx="12"/>
+          </p:nvPr>
+        </p:nvSpPr>
+        <p:spPr/>
+        <p:txBody>
+          <a:bodyPr/>
+          <a:lstStyle/>
+          <a:p>
+            <a:fld id="{B4DA0251-0B3B-4C1C-96DC-5D2833458AB2}" type="slidenum">
+              <a:rPr kumimoji="1" lang="ja-JP" altLang="en-US" smtClean="0"/>
+              <a:t>13</a:t>
+            </a:fld>
+            <a:endParaRPr kumimoji="1" lang="ja-JP" altLang="en-US"/>
+          </a:p>
+        </p:txBody>
+      </p:sp>
+    </p:spTree>
+    <p:extLst>
+      <p:ext uri="{BB962C8B-B14F-4D97-AF65-F5344CB8AC3E}">
+        <p14:creationId xmlns:p14="http://schemas.microsoft.com/office/powerpoint/2010/main" val="831695699"/>
+      </p:ext>
+    </p:extLst>
+  </p:cSld>
+  <p:clrMapOvr>
+    <a:masterClrMapping/>
+  </p:clrMapOvr>
+  <mc:AlternateContent xmlns:mc="http://schemas.openxmlformats.org/markup-compatibility/2006" xmlns:p14="http://schemas.microsoft.com/office/powerpoint/2010/main">
+    <mc:Choice Requires="p14">
+      <p:transition spd="med" p14:dur="700">
+        <p:fade/>
+      </p:transition>
+    </mc:Choice>
+    <mc:Fallback xmlns="">
+      <p:transition spd="med">
+        <p:fade/>
+      </p:transition>
+    </mc:Fallback>
+  </mc:AlternateContent>
+</p:sld>
+</file>
+
+<file path=ppt/slides/slide14.xml><?xml version="1.0" encoding="utf-8"?>
+<p:sld xmlns:a="http://schemas.openxmlformats.org/drawingml/2006/main" xmlns:r="http://schemas.openxmlformats.org/officeDocument/2006/relationships" xmlns:p="http://schemas.openxmlformats.org/presentationml/2006/main">
+  <p:cSld>
+    <p:spTree>
+      <p:nvGrpSpPr>
+        <p:cNvPr id="1" name=""/>
+        <p:cNvGrpSpPr/>
+        <p:nvPr/>
+      </p:nvGrpSpPr>
+      <p:grpSpPr>
+        <a:xfrm>
+          <a:off x="0" y="0"/>
+          <a:ext cx="0" cy="0"/>
+          <a:chOff x="0" y="0"/>
+          <a:chExt cx="0" cy="0"/>
+        </a:xfrm>
+      </p:grpSpPr>
+      <p:sp>
+        <p:nvSpPr>
+          <p:cNvPr id="7" name="タイトル 6">
+            <a:extLst>
+              <a:ext uri="{FF2B5EF4-FFF2-40B4-BE49-F238E27FC236}">
+                <a16:creationId xmlns:a16="http://schemas.microsoft.com/office/drawing/2014/main" id="{1ACACB11-2637-2EAD-6375-C6567BDD86E0}"/>
+              </a:ext>
+            </a:extLst>
+          </p:cNvPr>
+          <p:cNvSpPr>
+            <a:spLocks noGrp="1"/>
+          </p:cNvSpPr>
+          <p:nvPr>
+            <p:ph type="title"/>
+          </p:nvPr>
+        </p:nvSpPr>
+        <p:spPr/>
+        <p:txBody>
+          <a:bodyPr/>
+          <a:lstStyle/>
+          <a:p>
+            <a:r>
+              <a:rPr lang="en-US" altLang="ja-JP" dirty="0"/>
+              <a:t>Homework</a:t>
+            </a:r>
+            <a:endParaRPr lang="ja-JP" altLang="en-US" dirty="0"/>
+          </a:p>
+        </p:txBody>
+      </p:sp>
+      <p:sp>
+        <p:nvSpPr>
+          <p:cNvPr id="8" name="テキスト プレースホルダー 7">
+            <a:extLst>
+              <a:ext uri="{FF2B5EF4-FFF2-40B4-BE49-F238E27FC236}">
+                <a16:creationId xmlns:a16="http://schemas.microsoft.com/office/drawing/2014/main" id="{DB7A490D-E625-8DBF-66AE-B1B7095A6E12}"/>
+              </a:ext>
+            </a:extLst>
+          </p:cNvPr>
+          <p:cNvSpPr>
+            <a:spLocks noGrp="1"/>
+          </p:cNvSpPr>
+          <p:nvPr>
+            <p:ph type="body" idx="1"/>
+          </p:nvPr>
+        </p:nvSpPr>
+        <p:spPr/>
+        <p:txBody>
+          <a:bodyPr/>
+          <a:lstStyle/>
+          <a:p>
+            <a:r>
+              <a:rPr lang="en-US" altLang="ja-JP" dirty="0"/>
+              <a:t>Day04</a:t>
+            </a:r>
+            <a:r>
+              <a:rPr lang="ja-JP" altLang="en-US" dirty="0"/>
+              <a:t>→</a:t>
+            </a:r>
+            <a:r>
+              <a:rPr lang="en-US" altLang="ja-JP" dirty="0"/>
+              <a:t>Day05</a:t>
+            </a:r>
+            <a:endParaRPr lang="ja-JP" altLang="en-US" dirty="0"/>
+          </a:p>
+        </p:txBody>
+      </p:sp>
+      <p:sp>
+        <p:nvSpPr>
+          <p:cNvPr id="5" name="日付プレースホルダー 4">
+            <a:extLst>
+              <a:ext uri="{FF2B5EF4-FFF2-40B4-BE49-F238E27FC236}">
+                <a16:creationId xmlns:a16="http://schemas.microsoft.com/office/drawing/2014/main" id="{1958D229-46FC-433B-FA5B-4B8ACC13FBEC}"/>
+              </a:ext>
+            </a:extLst>
+          </p:cNvPr>
+          <p:cNvSpPr>
+            <a:spLocks noGrp="1"/>
+          </p:cNvSpPr>
+          <p:nvPr>
+            <p:ph type="dt" sz="half" idx="10"/>
+          </p:nvPr>
+        </p:nvSpPr>
+        <p:spPr/>
+        <p:txBody>
+          <a:bodyPr/>
+          <a:lstStyle/>
+          <a:p>
+            <a:r>
+              <a:rPr kumimoji="1" lang="en-US" altLang="ja-JP"/>
+              <a:t>Day4</a:t>
+            </a:r>
+            <a:endParaRPr kumimoji="1" lang="ja-JP" altLang="en-US"/>
+          </a:p>
+        </p:txBody>
+      </p:sp>
+      <p:sp>
+        <p:nvSpPr>
+          <p:cNvPr id="2" name="フッター プレースホルダー 1">
+            <a:extLst>
+              <a:ext uri="{FF2B5EF4-FFF2-40B4-BE49-F238E27FC236}">
+                <a16:creationId xmlns:a16="http://schemas.microsoft.com/office/drawing/2014/main" id="{60993854-A861-7ED5-26C4-60455F5A6DDC}"/>
+              </a:ext>
+            </a:extLst>
+          </p:cNvPr>
+          <p:cNvSpPr>
+            <a:spLocks noGrp="1"/>
+          </p:cNvSpPr>
+          <p:nvPr>
+            <p:ph type="ftr" sz="quarter" idx="11"/>
+          </p:nvPr>
+        </p:nvSpPr>
+        <p:spPr/>
+        <p:txBody>
+          <a:bodyPr/>
+          <a:lstStyle/>
+          <a:p>
+            <a:r>
+              <a:rPr kumimoji="1" lang="ja-JP" altLang="en-US"/>
+              <a:t>情報科学ｃ</a:t>
+            </a:r>
+            <a:endParaRPr kumimoji="1" lang="ja-JP" altLang="en-US" dirty="0"/>
+          </a:p>
+        </p:txBody>
+      </p:sp>
+      <p:sp>
+        <p:nvSpPr>
+          <p:cNvPr id="6" name="スライド番号プレースホルダー 5">
+            <a:extLst>
+              <a:ext uri="{FF2B5EF4-FFF2-40B4-BE49-F238E27FC236}">
+                <a16:creationId xmlns:a16="http://schemas.microsoft.com/office/drawing/2014/main" id="{9B968422-74D5-EB25-AB13-5C87B4FE4F4A}"/>
+              </a:ext>
+            </a:extLst>
+          </p:cNvPr>
+          <p:cNvSpPr>
+            <a:spLocks noGrp="1"/>
+          </p:cNvSpPr>
+          <p:nvPr>
+            <p:ph type="sldNum" sz="quarter" idx="12"/>
+          </p:nvPr>
+        </p:nvSpPr>
+        <p:spPr/>
+        <p:txBody>
+          <a:bodyPr/>
+          <a:lstStyle/>
+          <a:p>
+            <a:fld id="{B4DA0251-0B3B-4C1C-96DC-5D2833458AB2}" type="slidenum">
+              <a:rPr kumimoji="1" lang="ja-JP" altLang="en-US" smtClean="0"/>
+              <a:t>14</a:t>
+            </a:fld>
+            <a:endParaRPr kumimoji="1" lang="ja-JP" altLang="en-US"/>
+          </a:p>
+        </p:txBody>
+      </p:sp>
+    </p:spTree>
+    <p:extLst>
+      <p:ext uri="{BB962C8B-B14F-4D97-AF65-F5344CB8AC3E}">
+        <p14:creationId xmlns:p14="http://schemas.microsoft.com/office/powerpoint/2010/main" val="902635202"/>
+      </p:ext>
+    </p:extLst>
+  </p:cSld>
+  <p:clrMapOvr>
+    <a:masterClrMapping/>
+  </p:clrMapOvr>
+  <mc:AlternateContent xmlns:mc="http://schemas.openxmlformats.org/markup-compatibility/2006" xmlns:p14="http://schemas.microsoft.com/office/powerpoint/2010/main">
+    <mc:Choice Requires="p14">
+      <p:transition spd="med" p14:dur="700">
+        <p:fade/>
+      </p:transition>
+    </mc:Choice>
+    <mc:Fallback xmlns="">
+      <p:transition spd="med">
+        <p:fade/>
+      </p:transition>
+    </mc:Fallback>
+  </mc:AlternateContent>
+</p:sld>
+</file>
+
+<file path=ppt/slides/slide15.xml><?xml version="1.0" encoding="utf-8"?>
+<p:sld xmlns:a="http://schemas.openxmlformats.org/drawingml/2006/main" xmlns:r="http://schemas.openxmlformats.org/officeDocument/2006/relationships" xmlns:p="http://schemas.openxmlformats.org/presentationml/2006/main">
+  <p:cSld>
+    <p:spTree>
+      <p:nvGrpSpPr>
+        <p:cNvPr id="1" name="">
+          <a:extLst>
+            <a:ext uri="{FF2B5EF4-FFF2-40B4-BE49-F238E27FC236}">
+              <a16:creationId xmlns:a16="http://schemas.microsoft.com/office/drawing/2014/main" id="{736C46B3-4843-95D6-3739-FBC6433CC24C}"/>
+            </a:ext>
+          </a:extLst>
+        </p:cNvPr>
+        <p:cNvGrpSpPr/>
+        <p:nvPr/>
+      </p:nvGrpSpPr>
+      <p:grpSpPr>
+        <a:xfrm>
+          <a:off x="0" y="0"/>
+          <a:ext cx="0" cy="0"/>
+          <a:chOff x="0" y="0"/>
+          <a:chExt cx="0" cy="0"/>
+        </a:xfrm>
+      </p:grpSpPr>
+      <p:sp>
+        <p:nvSpPr>
+          <p:cNvPr id="2" name="フッター プレースホルダー 1">
+            <a:extLst>
+              <a:ext uri="{FF2B5EF4-FFF2-40B4-BE49-F238E27FC236}">
+                <a16:creationId xmlns:a16="http://schemas.microsoft.com/office/drawing/2014/main" id="{95C872CB-5799-28ED-4479-AAA9792CECE7}"/>
+              </a:ext>
+            </a:extLst>
+          </p:cNvPr>
+          <p:cNvSpPr>
+            <a:spLocks noGrp="1"/>
+          </p:cNvSpPr>
+          <p:nvPr>
+            <p:ph type="ftr" sz="quarter" idx="11"/>
+          </p:nvPr>
+        </p:nvSpPr>
+        <p:spPr/>
+        <p:txBody>
+          <a:bodyPr/>
+          <a:lstStyle/>
+          <a:p>
+            <a:r>
+              <a:rPr kumimoji="1" lang="ja-JP" altLang="en-US"/>
+              <a:t>情報科学ｃ</a:t>
+            </a:r>
+            <a:endParaRPr kumimoji="1" lang="ja-JP" altLang="en-US" dirty="0"/>
+          </a:p>
+        </p:txBody>
+      </p:sp>
+      <p:sp>
+        <p:nvSpPr>
+          <p:cNvPr id="3" name="タイトル 2">
+            <a:extLst>
+              <a:ext uri="{FF2B5EF4-FFF2-40B4-BE49-F238E27FC236}">
+                <a16:creationId xmlns:a16="http://schemas.microsoft.com/office/drawing/2014/main" id="{2132B40C-9159-C623-F1C1-505FB39691A2}"/>
+              </a:ext>
+            </a:extLst>
+          </p:cNvPr>
+          <p:cNvSpPr>
+            <a:spLocks noGrp="1"/>
+          </p:cNvSpPr>
+          <p:nvPr>
+            <p:ph type="title"/>
+          </p:nvPr>
+        </p:nvSpPr>
+        <p:spPr/>
+        <p:txBody>
+          <a:bodyPr/>
+          <a:lstStyle/>
+          <a:p>
+            <a:r>
+              <a:rPr kumimoji="1" lang="en-US" altLang="ja-JP" dirty="0"/>
+              <a:t>Day04</a:t>
+            </a:r>
+            <a:r>
+              <a:rPr kumimoji="1" lang="ja-JP" altLang="en-US" dirty="0"/>
+              <a:t>の宿題</a:t>
+            </a:r>
+          </a:p>
+        </p:txBody>
+      </p:sp>
+      <p:sp>
+        <p:nvSpPr>
+          <p:cNvPr id="4" name="コンテンツ プレースホルダー 3">
+            <a:extLst>
+              <a:ext uri="{FF2B5EF4-FFF2-40B4-BE49-F238E27FC236}">
+                <a16:creationId xmlns:a16="http://schemas.microsoft.com/office/drawing/2014/main" id="{CA2824EF-C7BB-4EF4-A76E-6702C6F97D5F}"/>
+              </a:ext>
+            </a:extLst>
+          </p:cNvPr>
+          <p:cNvSpPr>
+            <a:spLocks noGrp="1"/>
+          </p:cNvSpPr>
+          <p:nvPr>
+            <p:ph idx="1"/>
+          </p:nvPr>
+        </p:nvSpPr>
+        <p:spPr>
+          <a:xfrm>
+            <a:off x="1355269" y="1825625"/>
+            <a:ext cx="9998530" cy="4351338"/>
+          </a:xfrm>
+        </p:spPr>
+        <p:txBody>
+          <a:bodyPr>
+            <a:normAutofit/>
+          </a:bodyPr>
+          <a:lstStyle/>
+          <a:p>
+            <a:r>
+              <a:rPr kumimoji="1" lang="ja-JP" altLang="en-US" sz="2800" dirty="0"/>
+              <a:t>予習テキスト</a:t>
+            </a:r>
+            <a:r>
+              <a:rPr lang="ja-JP" altLang="en-US" dirty="0"/>
+              <a:t>兼</a:t>
+            </a:r>
+            <a:r>
+              <a:rPr lang="en-US" altLang="ja-JP" dirty="0"/>
+              <a:t>16</a:t>
+            </a:r>
+            <a:r>
+              <a:rPr lang="ja-JP" altLang="en-US" dirty="0"/>
+              <a:t>本ノック</a:t>
+            </a:r>
+            <a:r>
+              <a:rPr kumimoji="1" lang="ja-JP" altLang="en-US" sz="2800" dirty="0"/>
+              <a:t>をやる</a:t>
+            </a:r>
+            <a:endParaRPr kumimoji="1" lang="en-US" altLang="ja-JP" sz="2800" dirty="0"/>
+          </a:p>
+          <a:p>
+            <a:pPr lvl="1"/>
+            <a:r>
+              <a:rPr kumimoji="1" lang="en-US" altLang="ja-JP" dirty="0"/>
+              <a:t>[</a:t>
+            </a:r>
+            <a:r>
+              <a:rPr kumimoji="1" lang="en-US" altLang="ja-JP" dirty="0">
+                <a:solidFill>
+                  <a:schemeClr val="accent1"/>
+                </a:solidFill>
+                <a:latin typeface="+mj-lt"/>
+              </a:rPr>
+              <a:t>15</a:t>
+            </a:r>
+            <a:r>
+              <a:rPr kumimoji="1" lang="en-US" altLang="ja-JP" dirty="0">
+                <a:latin typeface="+mj-lt"/>
+              </a:rPr>
+              <a:t>-day04</a:t>
+            </a:r>
+            <a:r>
+              <a:rPr lang="en-US" altLang="ja-JP" dirty="0">
+                <a:latin typeface="+mj-lt"/>
+              </a:rPr>
+              <a:t>hw</a:t>
+            </a:r>
+            <a:r>
+              <a:rPr kumimoji="1" lang="en-US" altLang="ja-JP" dirty="0"/>
+              <a:t>]</a:t>
+            </a:r>
+            <a:r>
+              <a:rPr kumimoji="1" lang="ja-JP" altLang="en-US" dirty="0"/>
+              <a:t>　</a:t>
+            </a:r>
+            <a:r>
+              <a:rPr kumimoji="1" lang="en-US" altLang="ja-JP" dirty="0"/>
+              <a:t>NumPy</a:t>
+            </a:r>
+            <a:r>
+              <a:rPr lang="en-US" altLang="ja-JP" dirty="0"/>
+              <a:t>16</a:t>
+            </a:r>
+            <a:r>
+              <a:rPr lang="ja-JP" altLang="en-US" dirty="0"/>
+              <a:t>本ノック</a:t>
+            </a:r>
+            <a:endParaRPr kumimoji="1" lang="en-US" altLang="ja-JP" dirty="0"/>
+          </a:p>
+          <a:p>
+            <a:pPr lvl="1"/>
+            <a:r>
+              <a:rPr kumimoji="1" lang="en-US" altLang="ja-JP" dirty="0"/>
+              <a:t>[</a:t>
+            </a:r>
+            <a:r>
+              <a:rPr kumimoji="1" lang="en-US" altLang="ja-JP" dirty="0">
+                <a:solidFill>
+                  <a:schemeClr val="accent1"/>
+                </a:solidFill>
+                <a:latin typeface="+mj-lt"/>
+              </a:rPr>
+              <a:t>1</a:t>
+            </a:r>
+            <a:r>
+              <a:rPr lang="en-US" altLang="ja-JP" dirty="0">
+                <a:solidFill>
+                  <a:schemeClr val="accent1"/>
+                </a:solidFill>
+                <a:latin typeface="+mj-lt"/>
+              </a:rPr>
+              <a:t>6</a:t>
+            </a:r>
+            <a:r>
+              <a:rPr kumimoji="1" lang="en-US" altLang="ja-JP" dirty="0">
+                <a:latin typeface="+mj-lt"/>
+              </a:rPr>
+              <a:t>-day04</a:t>
+            </a:r>
+            <a:r>
+              <a:rPr lang="en-US" altLang="ja-JP" dirty="0">
+                <a:latin typeface="+mj-lt"/>
+              </a:rPr>
+              <a:t>hw</a:t>
+            </a:r>
+            <a:r>
+              <a:rPr kumimoji="1" lang="en-US" altLang="ja-JP" dirty="0"/>
+              <a:t>]</a:t>
+            </a:r>
+            <a:r>
+              <a:rPr kumimoji="1" lang="ja-JP" altLang="en-US" dirty="0"/>
+              <a:t>　</a:t>
+            </a:r>
+            <a:r>
+              <a:rPr kumimoji="1" lang="en-US" altLang="ja-JP" dirty="0">
+                <a:latin typeface="system-ui"/>
+              </a:rPr>
+              <a:t>Pandas16</a:t>
+            </a:r>
+            <a:r>
+              <a:rPr kumimoji="1" lang="ja-JP" altLang="en-US" dirty="0">
+                <a:latin typeface="system-ui"/>
+              </a:rPr>
+              <a:t>本ノック</a:t>
+            </a:r>
+          </a:p>
+          <a:p>
+            <a:pPr lvl="1"/>
+            <a:r>
+              <a:rPr kumimoji="1" lang="ja-JP" altLang="en-US" dirty="0"/>
+              <a:t>今回はテキストと知識確認問題を兼ねています</a:t>
+            </a:r>
+            <a:endParaRPr kumimoji="1" lang="en-US" altLang="ja-JP" dirty="0"/>
+          </a:p>
+          <a:p>
+            <a:pPr lvl="2"/>
+            <a:r>
+              <a:rPr kumimoji="1" lang="ja-JP" altLang="en-US" dirty="0"/>
+              <a:t>なので解答例付きです！</a:t>
+            </a:r>
+            <a:r>
+              <a:rPr kumimoji="1" lang="en-US" altLang="ja-JP" dirty="0"/>
+              <a:t>(</a:t>
+            </a:r>
+            <a:r>
+              <a:rPr kumimoji="1" lang="ja-JP" altLang="en-US" dirty="0"/>
+              <a:t>が一応提出してください</a:t>
+            </a:r>
+            <a:r>
+              <a:rPr kumimoji="1" lang="en-US" altLang="ja-JP" dirty="0"/>
+              <a:t>)</a:t>
+            </a:r>
+            <a:endParaRPr kumimoji="1" lang="ja-JP" altLang="en-US" dirty="0"/>
+          </a:p>
+          <a:p>
+            <a:pPr lvl="1"/>
+            <a:r>
+              <a:rPr lang="ja-JP" altLang="en-US" dirty="0"/>
+              <a:t>期限：火曜日</a:t>
+            </a:r>
+            <a:r>
+              <a:rPr lang="en-US" altLang="ja-JP" dirty="0"/>
+              <a:t>23:59</a:t>
+            </a:r>
+            <a:endParaRPr lang="ja-JP" altLang="en-US" dirty="0"/>
+          </a:p>
+          <a:p>
+            <a:pPr lvl="1"/>
+            <a:endParaRPr kumimoji="1" lang="ja-JP" altLang="en-US" dirty="0"/>
+          </a:p>
+          <a:p>
+            <a:r>
+              <a:rPr lang="en-US" altLang="ja-JP" dirty="0"/>
+              <a:t>Google</a:t>
+            </a:r>
+            <a:r>
+              <a:rPr lang="ja-JP" altLang="en-US" dirty="0"/>
+              <a:t> </a:t>
+            </a:r>
+            <a:r>
+              <a:rPr lang="en-US" altLang="ja-JP" dirty="0"/>
+              <a:t>Classroom</a:t>
+            </a:r>
+            <a:r>
+              <a:rPr lang="ja-JP" altLang="en-US" dirty="0"/>
+              <a:t>を通じて配布します。</a:t>
+            </a:r>
+          </a:p>
+          <a:p>
+            <a:r>
+              <a:rPr kumimoji="1" lang="ja-JP" altLang="en-US" dirty="0"/>
+              <a:t>宿題の提出も</a:t>
+            </a:r>
+            <a:r>
+              <a:rPr kumimoji="1" lang="en-US" altLang="ja-JP" dirty="0"/>
+              <a:t>Google Classroom</a:t>
+            </a:r>
+            <a:r>
+              <a:rPr kumimoji="1" lang="ja-JP" altLang="en-US" dirty="0"/>
+              <a:t>に行ってください。</a:t>
+            </a:r>
+          </a:p>
+          <a:p>
+            <a:pPr lvl="1"/>
+            <a:endParaRPr kumimoji="1" lang="ja-JP" altLang="en-US" dirty="0"/>
+          </a:p>
+        </p:txBody>
+      </p:sp>
+      <p:sp>
+        <p:nvSpPr>
+          <p:cNvPr id="5" name="日付プレースホルダー 4">
+            <a:extLst>
+              <a:ext uri="{FF2B5EF4-FFF2-40B4-BE49-F238E27FC236}">
+                <a16:creationId xmlns:a16="http://schemas.microsoft.com/office/drawing/2014/main" id="{EC1D3F51-F7C8-B336-586B-E580A5CE0563}"/>
+              </a:ext>
+            </a:extLst>
+          </p:cNvPr>
+          <p:cNvSpPr>
+            <a:spLocks noGrp="1"/>
+          </p:cNvSpPr>
+          <p:nvPr>
+            <p:ph type="dt" sz="half" idx="10"/>
+          </p:nvPr>
+        </p:nvSpPr>
+        <p:spPr/>
+        <p:txBody>
+          <a:bodyPr/>
+          <a:lstStyle/>
+          <a:p>
+            <a:r>
+              <a:rPr kumimoji="1" lang="en-US" altLang="ja-JP"/>
+              <a:t>Day4</a:t>
+            </a:r>
+            <a:endParaRPr kumimoji="1" lang="ja-JP" altLang="en-US"/>
+          </a:p>
+        </p:txBody>
+      </p:sp>
+      <p:sp>
+        <p:nvSpPr>
+          <p:cNvPr id="6" name="スライド番号プレースホルダー 5">
+            <a:extLst>
+              <a:ext uri="{FF2B5EF4-FFF2-40B4-BE49-F238E27FC236}">
+                <a16:creationId xmlns:a16="http://schemas.microsoft.com/office/drawing/2014/main" id="{BCC6A303-9629-7CD3-45E0-A5790AB39360}"/>
+              </a:ext>
+            </a:extLst>
+          </p:cNvPr>
+          <p:cNvSpPr>
+            <a:spLocks noGrp="1"/>
+          </p:cNvSpPr>
+          <p:nvPr>
+            <p:ph type="sldNum" sz="quarter" idx="12"/>
+          </p:nvPr>
+        </p:nvSpPr>
+        <p:spPr/>
+        <p:txBody>
+          <a:bodyPr/>
+          <a:lstStyle/>
+          <a:p>
+            <a:fld id="{B4DA0251-0B3B-4C1C-96DC-5D2833458AB2}" type="slidenum">
+              <a:rPr kumimoji="1" lang="ja-JP" altLang="en-US" smtClean="0"/>
+              <a:t>15</a:t>
+            </a:fld>
+            <a:endParaRPr kumimoji="1" lang="ja-JP" altLang="en-US"/>
+          </a:p>
+        </p:txBody>
+      </p:sp>
+      <p:sp>
+        <p:nvSpPr>
+          <p:cNvPr id="7" name="テキスト ボックス 6">
+            <a:extLst>
+              <a:ext uri="{FF2B5EF4-FFF2-40B4-BE49-F238E27FC236}">
+                <a16:creationId xmlns:a16="http://schemas.microsoft.com/office/drawing/2014/main" id="{11B94267-10FE-D83D-D798-18C1DFE479A1}"/>
+              </a:ext>
+            </a:extLst>
+          </p:cNvPr>
+          <p:cNvSpPr txBox="1"/>
+          <p:nvPr/>
+        </p:nvSpPr>
+        <p:spPr>
+          <a:xfrm>
+            <a:off x="8629650" y="152400"/>
+            <a:ext cx="3429000" cy="2031325"/>
+          </a:xfrm>
+          <a:prstGeom prst="rect">
+            <a:avLst/>
+          </a:prstGeom>
+        </p:spPr>
+        <p:style>
+          <a:lnRef idx="2">
+            <a:schemeClr val="accent5"/>
+          </a:lnRef>
+          <a:fillRef idx="1">
+            <a:schemeClr val="lt1"/>
+          </a:fillRef>
+          <a:effectRef idx="0">
+            <a:schemeClr val="accent5"/>
+          </a:effectRef>
+          <a:fontRef idx="minor">
+            <a:schemeClr val="dk1"/>
+          </a:fontRef>
+        </p:style>
+        <p:txBody>
+          <a:bodyPr wrap="square" rtlCol="0">
+            <a:spAutoFit/>
+          </a:bodyPr>
+          <a:lstStyle/>
+          <a:p>
+            <a:r>
+              <a:rPr kumimoji="1" lang="ja-JP" altLang="en-US" dirty="0"/>
+              <a:t>課題等の命名規則</a:t>
+            </a:r>
+          </a:p>
+          <a:p>
+            <a:pPr marL="285750" indent="-285750">
+              <a:buFont typeface="Arial" panose="020B0604020202020204" pitchFamily="34" charset="0"/>
+              <a:buChar char="•"/>
+            </a:pPr>
+            <a:r>
+              <a:rPr lang="en-US" altLang="ja-JP" b="1" dirty="0"/>
+              <a:t>[</a:t>
+            </a:r>
+            <a:r>
+              <a:rPr lang="ja-JP" altLang="en-US" b="1" dirty="0"/>
+              <a:t>連番</a:t>
+            </a:r>
+            <a:r>
+              <a:rPr lang="en-US" altLang="ja-JP" b="1" dirty="0"/>
+              <a:t>-</a:t>
+            </a:r>
+            <a:r>
+              <a:rPr lang="ja-JP" altLang="en-US" b="1" dirty="0"/>
+              <a:t>講義日ノートタイプ</a:t>
+            </a:r>
+            <a:r>
+              <a:rPr lang="en-US" altLang="ja-JP" b="1" dirty="0"/>
+              <a:t>]</a:t>
+            </a:r>
+            <a:endParaRPr lang="ja-JP" altLang="en-US" b="1" dirty="0"/>
+          </a:p>
+          <a:p>
+            <a:pPr marL="285750" indent="-285750">
+              <a:buFont typeface="Arial" panose="020B0604020202020204" pitchFamily="34" charset="0"/>
+              <a:buChar char="•"/>
+            </a:pPr>
+            <a:r>
+              <a:rPr lang="ja-JP" altLang="en-US" dirty="0"/>
+              <a:t>講義日：</a:t>
+            </a:r>
+            <a:r>
+              <a:rPr lang="en-US" altLang="ja-JP" dirty="0"/>
+              <a:t>day01</a:t>
+            </a:r>
+            <a:r>
+              <a:rPr lang="ja-JP" altLang="en-US" dirty="0"/>
+              <a:t>～</a:t>
+            </a:r>
+            <a:r>
+              <a:rPr lang="en-US" altLang="ja-JP" dirty="0"/>
+              <a:t>day09</a:t>
+            </a:r>
+          </a:p>
+          <a:p>
+            <a:pPr marL="285750" indent="-285750">
+              <a:buFont typeface="Arial" panose="020B0604020202020204" pitchFamily="34" charset="0"/>
+              <a:buChar char="•"/>
+            </a:pPr>
+            <a:r>
+              <a:rPr lang="ja-JP" altLang="en-US" dirty="0"/>
+              <a:t>ノートタイプ：</a:t>
+            </a:r>
+          </a:p>
+          <a:p>
+            <a:pPr marL="742950" lvl="1" indent="-285750">
+              <a:buFont typeface="Arial" panose="020B0604020202020204" pitchFamily="34" charset="0"/>
+              <a:buChar char="•"/>
+            </a:pPr>
+            <a:r>
+              <a:rPr lang="en-US" altLang="ja-JP" dirty="0"/>
+              <a:t>Kk</a:t>
+            </a:r>
+            <a:r>
+              <a:rPr lang="ja-JP" altLang="en-US" dirty="0"/>
+              <a:t>：講義内課題</a:t>
+            </a:r>
+          </a:p>
+          <a:p>
+            <a:pPr marL="742950" lvl="1" indent="-285750">
+              <a:buFont typeface="Arial" panose="020B0604020202020204" pitchFamily="34" charset="0"/>
+              <a:buChar char="•"/>
+            </a:pPr>
+            <a:r>
+              <a:rPr lang="en-US" altLang="ja-JP" dirty="0"/>
+              <a:t>tb</a:t>
+            </a:r>
+            <a:r>
+              <a:rPr lang="ja-JP" altLang="en-US" dirty="0"/>
+              <a:t>：テキストブック</a:t>
+            </a:r>
+            <a:endParaRPr lang="en-US" altLang="ja-JP" dirty="0"/>
+          </a:p>
+          <a:p>
+            <a:pPr marL="742950" lvl="1" indent="-285750">
+              <a:buFont typeface="Arial" panose="020B0604020202020204" pitchFamily="34" charset="0"/>
+              <a:buChar char="•"/>
+            </a:pPr>
+            <a:r>
+              <a:rPr lang="en-US" altLang="ja-JP" dirty="0" err="1"/>
+              <a:t>hw</a:t>
+            </a:r>
+            <a:r>
+              <a:rPr lang="ja-JP" altLang="en-US" dirty="0"/>
+              <a:t>：宿題</a:t>
+            </a:r>
+          </a:p>
+        </p:txBody>
+      </p:sp>
+    </p:spTree>
+    <p:extLst>
+      <p:ext uri="{BB962C8B-B14F-4D97-AF65-F5344CB8AC3E}">
+        <p14:creationId xmlns:p14="http://schemas.microsoft.com/office/powerpoint/2010/main" val="815270114"/>
+      </p:ext>
+    </p:extLst>
+  </p:cSld>
+  <p:clrMapOvr>
+    <a:masterClrMapping/>
+  </p:clrMapOvr>
+  <mc:AlternateContent xmlns:mc="http://schemas.openxmlformats.org/markup-compatibility/2006" xmlns:p14="http://schemas.microsoft.com/office/powerpoint/2010/main">
+    <mc:Choice Requires="p14">
+      <p:transition spd="med" p14:dur="700">
+        <p:fade/>
+      </p:transition>
+    </mc:Choice>
+    <mc:Fallback xmlns="">
+      <p:transition spd="med">
+        <p:fade/>
+      </p:transition>
+    </mc:Fallback>
+  </mc:AlternateContent>
+</p:sld>
+</file>
+
 <file path=ppt/slides/slide2.xml><?xml version="1.0" encoding="utf-8"?>
 <p:sld xmlns:a="http://schemas.openxmlformats.org/drawingml/2006/main" xmlns:r="http://schemas.openxmlformats.org/officeDocument/2006/relationships" xmlns:p="http://schemas.openxmlformats.org/presentationml/2006/main">
   <p:cSld>
@@ -5802,7 +7582,7 @@
             <p:ph idx="1"/>
             <p:extLst>
               <p:ext uri="{D42A27DB-BD31-4B8C-83A1-F6EECF244321}">
-                <p14:modId xmlns:p14="http://schemas.microsoft.com/office/powerpoint/2010/main" val="297807079"/>
+                <p14:modId xmlns:p14="http://schemas.microsoft.com/office/powerpoint/2010/main" val="2646351245"/>
               </p:ext>
             </p:extLst>
           </p:nvPr>
@@ -6059,7 +7839,7 @@
                       </a:pPr>
                       <a:r>
                         <a:rPr kumimoji="1" lang="ja-JP" altLang="en-US" sz="1600" dirty="0"/>
-                        <a:t>リテラル／データ構造</a:t>
+                        <a:t>複雑なデータ構造作成</a:t>
                       </a:r>
                       <a:r>
                         <a:rPr kumimoji="1" lang="ja-JP" altLang="en-US" sz="1600" dirty="0">
@@ -6145,7 +7925,7 @@
                       </a:pPr>
                       <a:r>
                         <a:rPr kumimoji="1" lang="ja-JP" altLang="en-US" sz="1600" dirty="0"/>
-                        <a:t>演算子／制御構文</a:t>
+                        <a:t>辞書型データの検索・ソート</a:t>
                       </a:r>
                       <a:r>
                         <a:rPr kumimoji="1" lang="ja-JP" altLang="en-US" sz="1600" dirty="0">
@@ -6248,8 +8028,8 @@
                         <a:defRPr/>
                       </a:pPr>
                       <a:r>
-                        <a:rPr kumimoji="1" lang="ja-JP" altLang="en-US" sz="1600" dirty="0"/>
-                        <a:t>関数／ラムダ式／オブジェクト指向</a:t>
+                        <a:rPr lang="ja-JP" altLang="en-US" sz="1600" dirty="0"/>
+                        <a:t>継承と差分プログラミング</a:t>
                       </a:r>
                       <a:r>
                         <a:rPr kumimoji="1" lang="ja-JP" altLang="en-US" sz="1600" dirty="0">
@@ -7047,12 +8827,9 @@
           <a:p>
             <a:r>
               <a:rPr lang="ja-JP" altLang="en-US" dirty="0"/>
-              <a:t>第３回　</a:t>
-            </a:r>
-            <a:r>
-              <a:rPr kumimoji="1" lang="ja-JP" altLang="en-US" sz="2400" dirty="0"/>
-              <a:t>演算子／制御構文</a:t>
-            </a:r>
+              <a:t>第４回　継承と差分プログラミング</a:t>
+            </a:r>
+            <a:endParaRPr kumimoji="1" lang="ja-JP" altLang="en-US" sz="2400" dirty="0"/>
           </a:p>
         </p:txBody>
       </p:sp>
@@ -7528,13 +9305,7 @@
   <p:cSld>
     <p:spTree>
       <p:nvGrpSpPr>
-        <p:cNvPr id="1" name="">
-          <a:extLst>
-            <a:ext uri="{FF2B5EF4-FFF2-40B4-BE49-F238E27FC236}">
-              <a16:creationId xmlns:a16="http://schemas.microsoft.com/office/drawing/2014/main" id="{D011B88A-756A-8C27-B32F-01E683510C3E}"/>
-            </a:ext>
-          </a:extLst>
-        </p:cNvPr>
+        <p:cNvPr id="1" name=""/>
         <p:cNvGrpSpPr/>
         <p:nvPr/>
       </p:nvGrpSpPr>
@@ -7548,74 +9319,10 @@
       </p:grpSpPr>
       <p:sp>
         <p:nvSpPr>
-          <p:cNvPr id="6" name="タイトル 5">
-            <a:extLst>
-              <a:ext uri="{FF2B5EF4-FFF2-40B4-BE49-F238E27FC236}">
-                <a16:creationId xmlns:a16="http://schemas.microsoft.com/office/drawing/2014/main" id="{9C18B763-0475-78FE-A8A2-84DB99AFE3FF}"/>
-              </a:ext>
-            </a:extLst>
-          </p:cNvPr>
-          <p:cNvSpPr>
-            <a:spLocks noGrp="1"/>
-          </p:cNvSpPr>
-          <p:nvPr>
-            <p:ph type="title"/>
-          </p:nvPr>
-        </p:nvSpPr>
-        <p:spPr/>
-        <p:txBody>
-          <a:bodyPr/>
-          <a:lstStyle/>
-          <a:p>
-            <a:r>
-              <a:rPr kumimoji="1" lang="ja-JP" altLang="en-US" dirty="0"/>
-              <a:t>情報科学Ｃ</a:t>
-            </a:r>
-          </a:p>
-        </p:txBody>
-      </p:sp>
-      <p:sp>
-        <p:nvSpPr>
-          <p:cNvPr id="7" name="テキスト プレースホルダー 6">
-            <a:extLst>
-              <a:ext uri="{FF2B5EF4-FFF2-40B4-BE49-F238E27FC236}">
-                <a16:creationId xmlns:a16="http://schemas.microsoft.com/office/drawing/2014/main" id="{71643E4A-F817-C4F4-6376-C1A7E11C6606}"/>
-              </a:ext>
-            </a:extLst>
-          </p:cNvPr>
-          <p:cNvSpPr>
-            <a:spLocks noGrp="1"/>
-          </p:cNvSpPr>
-          <p:nvPr>
-            <p:ph type="body" idx="1"/>
-          </p:nvPr>
-        </p:nvSpPr>
-        <p:spPr/>
-        <p:txBody>
-          <a:bodyPr/>
-          <a:lstStyle/>
-          <a:p>
-            <a:r>
-              <a:rPr lang="ja-JP" altLang="en-US" dirty="0"/>
-              <a:t>第３回　</a:t>
-            </a:r>
-            <a:r>
-              <a:rPr kumimoji="1" lang="ja-JP" altLang="en-US" sz="2400" dirty="0"/>
-              <a:t>演算子／制御構文</a:t>
-            </a:r>
-            <a:r>
-              <a:rPr kumimoji="1" lang="ja-JP" altLang="en-US" sz="2400" u="sng" dirty="0"/>
-              <a:t>演習</a:t>
-            </a:r>
-          </a:p>
-        </p:txBody>
-      </p:sp>
-      <p:sp>
-        <p:nvSpPr>
-          <p:cNvPr id="4" name="フッター プレースホルダー 3">
-            <a:extLst>
-              <a:ext uri="{FF2B5EF4-FFF2-40B4-BE49-F238E27FC236}">
-                <a16:creationId xmlns:a16="http://schemas.microsoft.com/office/drawing/2014/main" id="{2DF7172A-BF2F-971C-4C78-E6AF45192111}"/>
+          <p:cNvPr id="2" name="フッター プレースホルダー 1">
+            <a:extLst>
+              <a:ext uri="{FF2B5EF4-FFF2-40B4-BE49-F238E27FC236}">
+                <a16:creationId xmlns:a16="http://schemas.microsoft.com/office/drawing/2014/main" id="{3E984DDC-3CB8-6AB7-AC13-77A3CA9E3A74}"/>
               </a:ext>
             </a:extLst>
           </p:cNvPr>
@@ -7641,10 +9348,210 @@
       </p:sp>
       <p:sp>
         <p:nvSpPr>
-          <p:cNvPr id="5" name="スライド番号プレースホルダー 4">
-            <a:extLst>
-              <a:ext uri="{FF2B5EF4-FFF2-40B4-BE49-F238E27FC236}">
-                <a16:creationId xmlns:a16="http://schemas.microsoft.com/office/drawing/2014/main" id="{983C0C92-E4BC-74D9-F085-3343F45429F5}"/>
+          <p:cNvPr id="3" name="タイトル 2">
+            <a:extLst>
+              <a:ext uri="{FF2B5EF4-FFF2-40B4-BE49-F238E27FC236}">
+                <a16:creationId xmlns:a16="http://schemas.microsoft.com/office/drawing/2014/main" id="{353105A9-A420-AD24-97F5-1C3225DE69F1}"/>
+              </a:ext>
+            </a:extLst>
+          </p:cNvPr>
+          <p:cNvSpPr>
+            <a:spLocks noGrp="1"/>
+          </p:cNvSpPr>
+          <p:nvPr>
+            <p:ph type="title"/>
+          </p:nvPr>
+        </p:nvSpPr>
+        <p:spPr/>
+        <p:txBody>
+          <a:bodyPr/>
+          <a:lstStyle/>
+          <a:p>
+            <a:r>
+              <a:rPr lang="ja-JP" altLang="en-US" dirty="0"/>
+              <a:t>本日の講義部分について</a:t>
+            </a:r>
+            <a:endParaRPr kumimoji="1" lang="ja-JP" altLang="en-US" dirty="0"/>
+          </a:p>
+        </p:txBody>
+      </p:sp>
+      <p:sp>
+        <p:nvSpPr>
+          <p:cNvPr id="4" name="コンテンツ プレースホルダー 3">
+            <a:extLst>
+              <a:ext uri="{FF2B5EF4-FFF2-40B4-BE49-F238E27FC236}">
+                <a16:creationId xmlns:a16="http://schemas.microsoft.com/office/drawing/2014/main" id="{4B5C3261-BDE3-26D1-4622-C754BA43E8A0}"/>
+              </a:ext>
+            </a:extLst>
+          </p:cNvPr>
+          <p:cNvSpPr>
+            <a:spLocks noGrp="1"/>
+          </p:cNvSpPr>
+          <p:nvPr>
+            <p:ph idx="1"/>
+          </p:nvPr>
+        </p:nvSpPr>
+        <p:spPr/>
+        <p:txBody>
+          <a:bodyPr/>
+          <a:lstStyle/>
+          <a:p>
+            <a:r>
+              <a:rPr kumimoji="1" lang="ja-JP" altLang="en-US" dirty="0"/>
+              <a:t>最重要概念である</a:t>
+            </a:r>
+            <a:r>
+              <a:rPr kumimoji="1" lang="ja-JP" altLang="en-US" u="sng" dirty="0"/>
+              <a:t>継承</a:t>
+            </a:r>
+            <a:r>
+              <a:rPr kumimoji="1" lang="ja-JP" altLang="en-US" dirty="0"/>
+              <a:t>と</a:t>
+            </a:r>
+            <a:r>
+              <a:rPr kumimoji="1" lang="ja-JP" altLang="en-US" u="sng" dirty="0"/>
+              <a:t>差分プログラミング</a:t>
+            </a:r>
+            <a:r>
+              <a:rPr kumimoji="1" lang="ja-JP" altLang="en-US" dirty="0"/>
+              <a:t>を学びます</a:t>
+            </a:r>
+            <a:endParaRPr kumimoji="1" lang="en-US" altLang="ja-JP" dirty="0"/>
+          </a:p>
+          <a:p>
+            <a:pPr lvl="1"/>
+            <a:r>
+              <a:rPr lang="ja-JP" altLang="en-US" dirty="0"/>
+              <a:t>配布した下記のテキストブックを見ながら説明を聞いてください</a:t>
+            </a:r>
+            <a:endParaRPr lang="en-US" altLang="ja-JP" dirty="0"/>
+          </a:p>
+          <a:p>
+            <a:pPr lvl="2"/>
+            <a:r>
+              <a:rPr kumimoji="1" lang="en-US" altLang="ja-JP" dirty="0"/>
+              <a:t>[</a:t>
+            </a:r>
+            <a:r>
+              <a:rPr kumimoji="1" lang="en-US" altLang="ja-JP" dirty="0">
+                <a:solidFill>
+                  <a:schemeClr val="accent1"/>
+                </a:solidFill>
+                <a:latin typeface="+mj-lt"/>
+              </a:rPr>
+              <a:t>13</a:t>
+            </a:r>
+            <a:r>
+              <a:rPr kumimoji="1" lang="en-US" altLang="ja-JP" dirty="0">
+                <a:latin typeface="+mj-lt"/>
+              </a:rPr>
+              <a:t>-day04tb</a:t>
+            </a:r>
+            <a:r>
+              <a:rPr kumimoji="1" lang="en-US" altLang="ja-JP" dirty="0"/>
+              <a:t>]</a:t>
+            </a:r>
+            <a:r>
+              <a:rPr kumimoji="1" lang="ja-JP" altLang="en-US" dirty="0"/>
+              <a:t>　継承と差分プログラミング</a:t>
+            </a:r>
+          </a:p>
+          <a:p>
+            <a:pPr lvl="1"/>
+            <a:r>
+              <a:rPr kumimoji="1" lang="ja-JP" altLang="en-US" dirty="0"/>
+              <a:t>もう一つのテキストは本日の講義内課題用のリファレンスです</a:t>
+            </a:r>
+          </a:p>
+          <a:p>
+            <a:pPr lvl="2"/>
+            <a:r>
+              <a:rPr lang="en-US" altLang="ja-JP" dirty="0"/>
+              <a:t>[</a:t>
+            </a:r>
+            <a:r>
+              <a:rPr kumimoji="1" lang="en-US" altLang="ja-JP" dirty="0">
+                <a:solidFill>
+                  <a:schemeClr val="accent1"/>
+                </a:solidFill>
+                <a:latin typeface="+mj-lt"/>
+              </a:rPr>
+              <a:t>14</a:t>
+            </a:r>
+            <a:r>
+              <a:rPr kumimoji="1" lang="en-US" altLang="ja-JP" dirty="0">
+                <a:latin typeface="+mj-lt"/>
+              </a:rPr>
+              <a:t>-day04tb</a:t>
+            </a:r>
+            <a:r>
+              <a:rPr lang="en-US" altLang="ja-JP" dirty="0"/>
+              <a:t>]</a:t>
+            </a:r>
+            <a:r>
+              <a:rPr lang="ja-JP" altLang="en-US" dirty="0"/>
+              <a:t>　</a:t>
+            </a:r>
+            <a:r>
+              <a:rPr lang="en-US" altLang="ja-JP" b="0" i="0" dirty="0">
+                <a:effectLst/>
+                <a:latin typeface="system-ui"/>
+              </a:rPr>
+              <a:t>PIL(Pillow)</a:t>
+            </a:r>
+            <a:r>
+              <a:rPr lang="ja-JP" altLang="en-US" b="0" i="0" dirty="0">
+                <a:effectLst/>
+                <a:latin typeface="system-ui"/>
+              </a:rPr>
+              <a:t>のリファレンス</a:t>
+            </a:r>
+            <a:endParaRPr lang="ja-JP" altLang="en-US" dirty="0"/>
+          </a:p>
+          <a:p>
+            <a:endParaRPr kumimoji="1" lang="en-US" altLang="ja-JP" dirty="0"/>
+          </a:p>
+          <a:p>
+            <a:pPr lvl="1"/>
+            <a:endParaRPr kumimoji="1" lang="ja-JP" altLang="en-US" dirty="0"/>
+          </a:p>
+        </p:txBody>
+      </p:sp>
+      <p:sp>
+        <p:nvSpPr>
+          <p:cNvPr id="5" name="日付プレースホルダー 4">
+            <a:extLst>
+              <a:ext uri="{FF2B5EF4-FFF2-40B4-BE49-F238E27FC236}">
+                <a16:creationId xmlns:a16="http://schemas.microsoft.com/office/drawing/2014/main" id="{1F462E2C-E47C-96AB-07B1-70EA36B6C39E}"/>
+              </a:ext>
+            </a:extLst>
+          </p:cNvPr>
+          <p:cNvSpPr>
+            <a:spLocks noGrp="1"/>
+          </p:cNvSpPr>
+          <p:nvPr>
+            <p:ph type="dt" sz="half" idx="10"/>
+          </p:nvPr>
+        </p:nvSpPr>
+        <p:spPr/>
+        <p:txBody>
+          <a:bodyPr/>
+          <a:lstStyle/>
+          <a:p>
+            <a:r>
+              <a:rPr kumimoji="1" lang="en-US" altLang="ja-JP"/>
+              <a:t>Day4</a:t>
+            </a:r>
+            <a:endParaRPr kumimoji="1" lang="ja-JP" altLang="en-US"/>
+          </a:p>
+        </p:txBody>
+      </p:sp>
+      <p:sp>
+        <p:nvSpPr>
+          <p:cNvPr id="6" name="スライド番号プレースホルダー 5">
+            <a:extLst>
+              <a:ext uri="{FF2B5EF4-FFF2-40B4-BE49-F238E27FC236}">
+                <a16:creationId xmlns:a16="http://schemas.microsoft.com/office/drawing/2014/main" id="{51A05C07-C63D-023B-9051-7A941A7E61FF}"/>
               </a:ext>
             </a:extLst>
           </p:cNvPr>
@@ -7660,52 +9567,18 @@
           <a:bodyPr/>
           <a:lstStyle/>
           <a:p>
-            <a:r>
-              <a:rPr lang="en-US" altLang="ja-JP"/>
-              <a:t>p.</a:t>
-            </a:r>
-            <a:fld id="{71584EDF-536B-41D0-946E-780F35A2C473}" type="slidenum">
-              <a:rPr lang="ja-JP" altLang="en-US" smtClean="0"/>
-              <a:pPr/>
+            <a:fld id="{B4DA0251-0B3B-4C1C-96DC-5D2833458AB2}" type="slidenum">
+              <a:rPr kumimoji="1" lang="ja-JP" altLang="en-US" smtClean="0"/>
               <a:t>5</a:t>
             </a:fld>
-            <a:endParaRPr lang="ja-JP" altLang="en-US" dirty="0"/>
-          </a:p>
-        </p:txBody>
-      </p:sp>
-      <p:sp>
-        <p:nvSpPr>
-          <p:cNvPr id="2" name="日付プレースホルダー 1">
-            <a:extLst>
-              <a:ext uri="{FF2B5EF4-FFF2-40B4-BE49-F238E27FC236}">
-                <a16:creationId xmlns:a16="http://schemas.microsoft.com/office/drawing/2014/main" id="{CA7D10DA-4F17-19BF-669E-FFACEE0CCB2F}"/>
-              </a:ext>
-            </a:extLst>
-          </p:cNvPr>
-          <p:cNvSpPr>
-            <a:spLocks noGrp="1"/>
-          </p:cNvSpPr>
-          <p:nvPr>
-            <p:ph type="dt" sz="half" idx="10"/>
-          </p:nvPr>
-        </p:nvSpPr>
-        <p:spPr/>
-        <p:txBody>
-          <a:bodyPr/>
-          <a:lstStyle/>
-          <a:p>
-            <a:r>
-              <a:rPr lang="en-US" altLang="ja-JP"/>
-              <a:t>Day4</a:t>
-            </a:r>
-            <a:endParaRPr lang="ja-JP" altLang="en-US" dirty="0"/>
+            <a:endParaRPr kumimoji="1" lang="ja-JP" altLang="en-US"/>
           </a:p>
         </p:txBody>
       </p:sp>
     </p:spTree>
     <p:extLst>
       <p:ext uri="{BB962C8B-B14F-4D97-AF65-F5344CB8AC3E}">
-        <p14:creationId xmlns:p14="http://schemas.microsoft.com/office/powerpoint/2010/main" val="1030669595"/>
+        <p14:creationId xmlns:p14="http://schemas.microsoft.com/office/powerpoint/2010/main" val="2926146060"/>
       </p:ext>
     </p:extLst>
   </p:cSld>
@@ -7732,13 +9605,7 @@
   <p:cSld>
     <p:spTree>
       <p:nvGrpSpPr>
-        <p:cNvPr id="1" name="">
-          <a:extLst>
-            <a:ext uri="{FF2B5EF4-FFF2-40B4-BE49-F238E27FC236}">
-              <a16:creationId xmlns:a16="http://schemas.microsoft.com/office/drawing/2014/main" id="{A3953DF0-2AD1-7696-259C-7B8580FC4846}"/>
-            </a:ext>
-          </a:extLst>
-        </p:cNvPr>
+        <p:cNvPr id="1" name=""/>
         <p:cNvGrpSpPr/>
         <p:nvPr/>
       </p:nvGrpSpPr>
@@ -7755,7 +9622,7 @@
           <p:cNvPr id="2" name="フッター プレースホルダー 1">
             <a:extLst>
               <a:ext uri="{FF2B5EF4-FFF2-40B4-BE49-F238E27FC236}">
-                <a16:creationId xmlns:a16="http://schemas.microsoft.com/office/drawing/2014/main" id="{17FAFD9B-4C0B-9EF1-5FFA-1FF6B1892E46}"/>
+                <a16:creationId xmlns:a16="http://schemas.microsoft.com/office/drawing/2014/main" id="{204B7D76-8589-8C01-850D-38274028C9CE}"/>
               </a:ext>
             </a:extLst>
           </p:cNvPr>
@@ -7775,16 +9642,15 @@
               <a:rPr kumimoji="1" lang="ja-JP" altLang="en-US"/>
               <a:t>情報科学ｃ</a:t>
             </a:r>
-            <a:endParaRPr kumimoji="1" lang="ja-JP" altLang="en-US" dirty="0"/>
-          </a:p>
-        </p:txBody>
-      </p:sp>
-      <p:sp>
-        <p:nvSpPr>
-          <p:cNvPr id="3" name="タイトル 2">
-            <a:extLst>
-              <a:ext uri="{FF2B5EF4-FFF2-40B4-BE49-F238E27FC236}">
-                <a16:creationId xmlns:a16="http://schemas.microsoft.com/office/drawing/2014/main" id="{61611AAF-3D0D-8B64-C9FF-CB319AFE7F47}"/>
+          </a:p>
+        </p:txBody>
+      </p:sp>
+      <p:sp>
+        <p:nvSpPr>
+          <p:cNvPr id="8" name="タイトル 7">
+            <a:extLst>
+              <a:ext uri="{FF2B5EF4-FFF2-40B4-BE49-F238E27FC236}">
+                <a16:creationId xmlns:a16="http://schemas.microsoft.com/office/drawing/2014/main" id="{FB3F611B-80D3-AAA0-E6BB-C5F925F715A8}"/>
               </a:ext>
             </a:extLst>
           </p:cNvPr>
@@ -7801,45 +9667,18 @@
           <a:lstStyle/>
           <a:p>
             <a:r>
-              <a:rPr kumimoji="1" lang="en-US" altLang="ja-JP" sz="2800" dirty="0"/>
-              <a:t>[</a:t>
-            </a:r>
-            <a:r>
-              <a:rPr kumimoji="1" lang="en-US" altLang="ja-JP" sz="2800" dirty="0">
-                <a:solidFill>
-                  <a:schemeClr val="accent1"/>
-                </a:solidFill>
-              </a:rPr>
-              <a:t>1</a:t>
-            </a:r>
-            <a:r>
-              <a:rPr lang="en-US" altLang="ja-JP" sz="2800" dirty="0">
-                <a:solidFill>
-                  <a:schemeClr val="accent1"/>
-                </a:solidFill>
-              </a:rPr>
-              <a:t>3</a:t>
-            </a:r>
-            <a:r>
-              <a:rPr kumimoji="1" lang="en-US" altLang="ja-JP" sz="2800" dirty="0"/>
-              <a:t>-day04kk] </a:t>
-            </a:r>
-            <a:br>
-              <a:rPr kumimoji="1" lang="ja-JP" altLang="en-US" dirty="0"/>
-            </a:br>
-            <a:r>
-              <a:rPr kumimoji="1" lang="ja-JP" altLang="en-US" dirty="0"/>
-              <a:t>オブジェクト指向の効能を知ろう</a:t>
-            </a:r>
-          </a:p>
-        </p:txBody>
-      </p:sp>
-      <p:sp>
-        <p:nvSpPr>
-          <p:cNvPr id="4" name="コンテンツ プレースホルダー 3">
-            <a:extLst>
-              <a:ext uri="{FF2B5EF4-FFF2-40B4-BE49-F238E27FC236}">
-                <a16:creationId xmlns:a16="http://schemas.microsoft.com/office/drawing/2014/main" id="{54A2E979-0E7F-5B1C-1282-C07F86B7ED28}"/>
+              <a:rPr lang="ja-JP" altLang="en-US" dirty="0"/>
+              <a:t>オブジェクト指向とは</a:t>
+            </a:r>
+          </a:p>
+        </p:txBody>
+      </p:sp>
+      <p:sp>
+        <p:nvSpPr>
+          <p:cNvPr id="9" name="コンテンツ プレースホルダー 8">
+            <a:extLst>
+              <a:ext uri="{FF2B5EF4-FFF2-40B4-BE49-F238E27FC236}">
+                <a16:creationId xmlns:a16="http://schemas.microsoft.com/office/drawing/2014/main" id="{9DD055A7-A6C5-0192-3608-5D616FF36EB8}"/>
               </a:ext>
             </a:extLst>
           </p:cNvPr>
@@ -7853,128 +9692,134 @@
         <p:spPr/>
         <p:txBody>
           <a:bodyPr>
-            <a:normAutofit fontScale="92500"/>
+            <a:normAutofit/>
           </a:bodyPr>
           <a:lstStyle/>
           <a:p>
             <a:r>
-              <a:rPr kumimoji="1" lang="ja-JP" altLang="en-US" dirty="0"/>
-              <a:t>お題</a:t>
-            </a:r>
+              <a:rPr lang="ja-JP" altLang="en-US" dirty="0"/>
+              <a:t>プログラミング言語仕様ではない</a:t>
+            </a:r>
+            <a:endParaRPr lang="en-US" altLang="ja-JP" dirty="0"/>
           </a:p>
           <a:p>
             <a:pPr lvl="1"/>
             <a:r>
+              <a:rPr lang="en-US" altLang="ja-JP" dirty="0"/>
+              <a:t>Java</a:t>
+            </a:r>
+            <a:r>
               <a:rPr lang="ja-JP" altLang="en-US" dirty="0"/>
-              <a:t>前回作った辞書型のリストを使います。</a:t>
+              <a:t>はオブジェクト指向言語であり</a:t>
             </a:r>
           </a:p>
           <a:p>
             <a:pPr lvl="1"/>
             <a:r>
+              <a:rPr lang="en-US" altLang="ja-JP" dirty="0"/>
+              <a:t>Python</a:t>
+            </a:r>
+            <a:r>
               <a:rPr lang="ja-JP" altLang="en-US" dirty="0"/>
-              <a:t>これを</a:t>
+              <a:t>はオブジェクト指向言語とはみなされない</a:t>
+            </a:r>
+          </a:p>
+          <a:p>
+            <a:pPr lvl="2"/>
+            <a:r>
+              <a:rPr lang="ja-JP" altLang="en-US" dirty="0"/>
+              <a:t>ただしオブジェクト指向プログラミングをサポートしている</a:t>
+            </a:r>
+            <a:endParaRPr lang="en-US" altLang="ja-JP" dirty="0"/>
+          </a:p>
+          <a:p>
+            <a:r>
+              <a:rPr lang="ja-JP" altLang="en-US" dirty="0"/>
+              <a:t>予習ノートで言いたかった事は</a:t>
+            </a:r>
+          </a:p>
+          <a:p>
+            <a:pPr lvl="1"/>
+            <a:r>
+              <a:rPr lang="ja-JP" altLang="en-US" dirty="0"/>
+              <a:t>変数：一つの値の保持</a:t>
+            </a:r>
+          </a:p>
+          <a:p>
+            <a:pPr lvl="1"/>
+            <a:r>
+              <a:rPr lang="ja-JP" altLang="en-US" dirty="0"/>
+              <a:t>辞書型：キーを用いて複数の</a:t>
             </a:r>
             <a:r>
               <a:rPr lang="en-US" altLang="ja-JP" dirty="0"/>
-              <a:t>for</a:t>
+              <a:t>『</a:t>
             </a:r>
             <a:r>
               <a:rPr lang="ja-JP" altLang="en-US" dirty="0"/>
-              <a:t>文や</a:t>
+              <a:t>キー→値</a:t>
             </a:r>
             <a:r>
               <a:rPr lang="en-US" altLang="ja-JP" dirty="0"/>
-              <a:t>while</a:t>
+              <a:t>』</a:t>
             </a:r>
             <a:r>
               <a:rPr lang="ja-JP" altLang="en-US" dirty="0"/>
-              <a:t>文で各要素を見て、検索やソートをする</a:t>
+              <a:t>の組をサポート</a:t>
             </a:r>
           </a:p>
           <a:p>
             <a:pPr lvl="1"/>
             <a:r>
               <a:rPr lang="ja-JP" altLang="en-US" dirty="0"/>
-              <a:t>与えられキーワードを持つ要素のみ出力する</a:t>
+              <a:t>クラス：キーを用いて複数の</a:t>
+            </a:r>
+            <a:r>
+              <a:rPr lang="en-US" altLang="ja-JP" dirty="0"/>
+              <a:t>『</a:t>
+            </a:r>
+            <a:r>
+              <a:rPr lang="ja-JP" altLang="en-US" dirty="0"/>
+              <a:t>キー→値</a:t>
+            </a:r>
+            <a:r>
+              <a:rPr lang="en-US" altLang="ja-JP" dirty="0"/>
+              <a:t>or</a:t>
+            </a:r>
+            <a:r>
+              <a:rPr lang="ja-JP" altLang="en-US" dirty="0"/>
+              <a:t>関数</a:t>
+            </a:r>
+            <a:r>
+              <a:rPr lang="en-US" altLang="ja-JP" dirty="0"/>
+              <a:t>』</a:t>
+            </a:r>
+            <a:r>
+              <a:rPr lang="ja-JP" altLang="en-US" dirty="0"/>
+              <a:t>の組をサポート</a:t>
+            </a:r>
+          </a:p>
+          <a:p>
+            <a:r>
+              <a:rPr lang="ja-JP" altLang="en-US" dirty="0"/>
+              <a:t>クラスの使い方</a:t>
             </a:r>
           </a:p>
           <a:p>
             <a:pPr lvl="1"/>
             <a:r>
               <a:rPr lang="ja-JP" altLang="en-US" dirty="0"/>
-              <a:t>与えられた数値以上</a:t>
-            </a:r>
-            <a:r>
-              <a:rPr lang="en-US" altLang="ja-JP" dirty="0"/>
-              <a:t>/</a:t>
-            </a:r>
-            <a:r>
-              <a:rPr lang="ja-JP" altLang="en-US" dirty="0"/>
-              <a:t>以下の要素のみ出力する</a:t>
-            </a:r>
-          </a:p>
-          <a:p>
-            <a:pPr lvl="1"/>
-            <a:r>
-              <a:rPr lang="ja-JP" altLang="en-US" dirty="0"/>
-              <a:t>各要素が持つ数値でソートする</a:t>
-            </a:r>
-          </a:p>
-          <a:p>
-            <a:pPr lvl="1"/>
-            <a:r>
-              <a:rPr lang="ja-JP" altLang="en-US" dirty="0"/>
-              <a:t>各要素が持つ文字列でソートする</a:t>
-            </a:r>
-          </a:p>
-          <a:p>
-            <a:pPr lvl="1"/>
-            <a:r>
-              <a:rPr lang="ja-JP" altLang="en-US" dirty="0"/>
-              <a:t>などなど・・・・（他、演算子や制御構文を使って何を作っても</a:t>
-            </a:r>
-            <a:r>
-              <a:rPr lang="en-US" altLang="ja-JP" dirty="0"/>
-              <a:t>OK</a:t>
-            </a:r>
-            <a:r>
-              <a:rPr lang="ja-JP" altLang="en-US" dirty="0"/>
-              <a:t>）</a:t>
-            </a:r>
-          </a:p>
-          <a:p>
-            <a:r>
-              <a:rPr lang="ja-JP" altLang="en-US" dirty="0"/>
-              <a:t>発表：希望者のみ先着順で講義終了時刻まで</a:t>
-            </a:r>
-          </a:p>
-          <a:p>
-            <a:pPr lvl="1"/>
-            <a:r>
-              <a:rPr lang="ja-JP" altLang="en-US" dirty="0"/>
-              <a:t>前でノートを表示しながら簡単に説明をしてもらいます</a:t>
-            </a:r>
-          </a:p>
-          <a:p>
-            <a:pPr lvl="1"/>
-            <a:r>
-              <a:rPr lang="ja-JP" altLang="en-US" dirty="0"/>
-              <a:t>発表した人は記録して、成績の加点対象にします</a:t>
-            </a:r>
-          </a:p>
-          <a:p>
-            <a:pPr lvl="1"/>
-            <a:endParaRPr kumimoji="1" lang="ja-JP" altLang="en-US" dirty="0"/>
-          </a:p>
-        </p:txBody>
-      </p:sp>
-      <p:sp>
-        <p:nvSpPr>
-          <p:cNvPr id="5" name="日付プレースホルダー 4">
-            <a:extLst>
-              <a:ext uri="{FF2B5EF4-FFF2-40B4-BE49-F238E27FC236}">
-                <a16:creationId xmlns:a16="http://schemas.microsoft.com/office/drawing/2014/main" id="{1E6EC982-1A89-389F-C924-7ED8328AB307}"/>
+              <a:t>インスタンスを作成しそれを使う</a:t>
+            </a:r>
+          </a:p>
+        </p:txBody>
+      </p:sp>
+      <p:sp>
+        <p:nvSpPr>
+          <p:cNvPr id="6" name="日付プレースホルダー 5">
+            <a:extLst>
+              <a:ext uri="{FF2B5EF4-FFF2-40B4-BE49-F238E27FC236}">
+                <a16:creationId xmlns:a16="http://schemas.microsoft.com/office/drawing/2014/main" id="{D753F3E2-224C-0170-C339-7FD385285C40}"/>
               </a:ext>
             </a:extLst>
           </p:cNvPr>
@@ -8000,10 +9845,10 @@
       </p:sp>
       <p:sp>
         <p:nvSpPr>
-          <p:cNvPr id="6" name="スライド番号プレースホルダー 5">
-            <a:extLst>
-              <a:ext uri="{FF2B5EF4-FFF2-40B4-BE49-F238E27FC236}">
-                <a16:creationId xmlns:a16="http://schemas.microsoft.com/office/drawing/2014/main" id="{3B1DE181-3A7C-2141-F754-2D466590CF3F}"/>
+          <p:cNvPr id="7" name="スライド番号プレースホルダー 6">
+            <a:extLst>
+              <a:ext uri="{FF2B5EF4-FFF2-40B4-BE49-F238E27FC236}">
+                <a16:creationId xmlns:a16="http://schemas.microsoft.com/office/drawing/2014/main" id="{DA59B28B-61C3-BF38-9E01-ADC4CD2E90C8}"/>
               </a:ext>
             </a:extLst>
           </p:cNvPr>
@@ -8030,7 +9875,7 @@
     </p:spTree>
     <p:extLst>
       <p:ext uri="{BB962C8B-B14F-4D97-AF65-F5344CB8AC3E}">
-        <p14:creationId xmlns:p14="http://schemas.microsoft.com/office/powerpoint/2010/main" val="831695699"/>
+        <p14:creationId xmlns:p14="http://schemas.microsoft.com/office/powerpoint/2010/main" val="1224020653"/>
       </p:ext>
     </p:extLst>
   </p:cSld>
@@ -8071,10 +9916,39 @@
       </p:grpSpPr>
       <p:sp>
         <p:nvSpPr>
-          <p:cNvPr id="7" name="タイトル 6">
-            <a:extLst>
-              <a:ext uri="{FF2B5EF4-FFF2-40B4-BE49-F238E27FC236}">
-                <a16:creationId xmlns:a16="http://schemas.microsoft.com/office/drawing/2014/main" id="{1ACACB11-2637-2EAD-6375-C6567BDD86E0}"/>
+          <p:cNvPr id="2" name="フッター プレースホルダー 1">
+            <a:extLst>
+              <a:ext uri="{FF2B5EF4-FFF2-40B4-BE49-F238E27FC236}">
+                <a16:creationId xmlns:a16="http://schemas.microsoft.com/office/drawing/2014/main" id="{2134099B-815F-EFBA-0544-150DADA1E9C1}"/>
+              </a:ext>
+            </a:extLst>
+          </p:cNvPr>
+          <p:cNvSpPr>
+            <a:spLocks noGrp="1"/>
+          </p:cNvSpPr>
+          <p:nvPr>
+            <p:ph type="ftr" sz="quarter" idx="11"/>
+          </p:nvPr>
+        </p:nvSpPr>
+        <p:spPr/>
+        <p:txBody>
+          <a:bodyPr/>
+          <a:lstStyle/>
+          <a:p>
+            <a:r>
+              <a:rPr kumimoji="1" lang="ja-JP" altLang="en-US"/>
+              <a:t>情報科学ｃ</a:t>
+            </a:r>
+            <a:endParaRPr kumimoji="1" lang="ja-JP" altLang="en-US" dirty="0"/>
+          </a:p>
+        </p:txBody>
+      </p:sp>
+      <p:sp>
+        <p:nvSpPr>
+          <p:cNvPr id="3" name="タイトル 2">
+            <a:extLst>
+              <a:ext uri="{FF2B5EF4-FFF2-40B4-BE49-F238E27FC236}">
+                <a16:creationId xmlns:a16="http://schemas.microsoft.com/office/drawing/2014/main" id="{865BF5FD-DC5E-C503-099A-0685A73CF7E9}"/>
               </a:ext>
             </a:extLst>
           </p:cNvPr>
@@ -8091,27 +9965,26 @@
           <a:lstStyle/>
           <a:p>
             <a:r>
-              <a:rPr lang="en-US" altLang="ja-JP" dirty="0"/>
-              <a:t>Homework</a:t>
-            </a:r>
-            <a:endParaRPr lang="ja-JP" altLang="en-US" dirty="0"/>
-          </a:p>
-        </p:txBody>
-      </p:sp>
-      <p:sp>
-        <p:nvSpPr>
-          <p:cNvPr id="8" name="テキスト プレースホルダー 7">
-            <a:extLst>
-              <a:ext uri="{FF2B5EF4-FFF2-40B4-BE49-F238E27FC236}">
-                <a16:creationId xmlns:a16="http://schemas.microsoft.com/office/drawing/2014/main" id="{DB7A490D-E625-8DBF-66AE-B1B7095A6E12}"/>
-              </a:ext>
-            </a:extLst>
-          </p:cNvPr>
-          <p:cNvSpPr>
-            <a:spLocks noGrp="1"/>
-          </p:cNvSpPr>
-          <p:nvPr>
-            <p:ph type="body" idx="1"/>
+              <a:rPr kumimoji="1" lang="ja-JP" altLang="en-US" dirty="0"/>
+              <a:t>講義前テキストのおさらい</a:t>
+            </a:r>
+          </a:p>
+        </p:txBody>
+      </p:sp>
+      <p:sp>
+        <p:nvSpPr>
+          <p:cNvPr id="4" name="コンテンツ プレースホルダー 3">
+            <a:extLst>
+              <a:ext uri="{FF2B5EF4-FFF2-40B4-BE49-F238E27FC236}">
+                <a16:creationId xmlns:a16="http://schemas.microsoft.com/office/drawing/2014/main" id="{883F1739-1DC7-D7B5-D714-1B20FEF7D1FC}"/>
+              </a:ext>
+            </a:extLst>
+          </p:cNvPr>
+          <p:cNvSpPr>
+            <a:spLocks noGrp="1"/>
+          </p:cNvSpPr>
+          <p:nvPr>
+            <p:ph idx="1"/>
           </p:nvPr>
         </p:nvSpPr>
         <p:spPr/>
@@ -8120,18 +9993,9 @@
           <a:lstStyle/>
           <a:p>
             <a:r>
-              <a:rPr lang="en-US" altLang="ja-JP" dirty="0"/>
-              <a:t>Day03</a:t>
-            </a:r>
-            <a:r>
-              <a:rPr lang="ja-JP" altLang="en-US" dirty="0"/>
-              <a:t>→</a:t>
-            </a:r>
-            <a:r>
-              <a:rPr lang="en-US" altLang="ja-JP" dirty="0"/>
-              <a:t>Day04</a:t>
-            </a:r>
-            <a:endParaRPr lang="ja-JP" altLang="en-US" dirty="0"/>
+              <a:rPr kumimoji="1" lang="ja-JP" altLang="en-US" dirty="0"/>
+              <a:t>クラスの基本的な構成</a:t>
+            </a:r>
           </a:p>
         </p:txBody>
       </p:sp>
@@ -8140,7 +10004,7 @@
           <p:cNvPr id="5" name="日付プレースホルダー 4">
             <a:extLst>
               <a:ext uri="{FF2B5EF4-FFF2-40B4-BE49-F238E27FC236}">
-                <a16:creationId xmlns:a16="http://schemas.microsoft.com/office/drawing/2014/main" id="{1958D229-46FC-433B-FA5B-4B8ACC13FBEC}"/>
+                <a16:creationId xmlns:a16="http://schemas.microsoft.com/office/drawing/2014/main" id="{74C2C802-F746-81CB-1767-4724B2DAFC31}"/>
               </a:ext>
             </a:extLst>
           </p:cNvPr>
@@ -8166,39 +10030,10 @@
       </p:sp>
       <p:sp>
         <p:nvSpPr>
-          <p:cNvPr id="2" name="フッター プレースホルダー 1">
-            <a:extLst>
-              <a:ext uri="{FF2B5EF4-FFF2-40B4-BE49-F238E27FC236}">
-                <a16:creationId xmlns:a16="http://schemas.microsoft.com/office/drawing/2014/main" id="{60993854-A861-7ED5-26C4-60455F5A6DDC}"/>
-              </a:ext>
-            </a:extLst>
-          </p:cNvPr>
-          <p:cNvSpPr>
-            <a:spLocks noGrp="1"/>
-          </p:cNvSpPr>
-          <p:nvPr>
-            <p:ph type="ftr" sz="quarter" idx="11"/>
-          </p:nvPr>
-        </p:nvSpPr>
-        <p:spPr/>
-        <p:txBody>
-          <a:bodyPr/>
-          <a:lstStyle/>
-          <a:p>
-            <a:r>
-              <a:rPr kumimoji="1" lang="ja-JP" altLang="en-US"/>
-              <a:t>情報科学ｃ</a:t>
-            </a:r>
-            <a:endParaRPr kumimoji="1" lang="ja-JP" altLang="en-US" dirty="0"/>
-          </a:p>
-        </p:txBody>
-      </p:sp>
-      <p:sp>
-        <p:nvSpPr>
           <p:cNvPr id="6" name="スライド番号プレースホルダー 5">
             <a:extLst>
               <a:ext uri="{FF2B5EF4-FFF2-40B4-BE49-F238E27FC236}">
-                <a16:creationId xmlns:a16="http://schemas.microsoft.com/office/drawing/2014/main" id="{9B968422-74D5-EB25-AB13-5C87B4FE4F4A}"/>
+                <a16:creationId xmlns:a16="http://schemas.microsoft.com/office/drawing/2014/main" id="{528A180B-E545-5B29-5375-FD07D9864CF7}"/>
               </a:ext>
             </a:extLst>
           </p:cNvPr>
@@ -8222,10 +10057,728 @@
           </a:p>
         </p:txBody>
       </p:sp>
+      <p:sp>
+        <p:nvSpPr>
+          <p:cNvPr id="7" name="テキスト ボックス 6">
+            <a:extLst>
+              <a:ext uri="{FF2B5EF4-FFF2-40B4-BE49-F238E27FC236}">
+                <a16:creationId xmlns:a16="http://schemas.microsoft.com/office/drawing/2014/main" id="{2D7DD441-CBE9-B05D-528A-EEF7BAC5CC16}"/>
+              </a:ext>
+            </a:extLst>
+          </p:cNvPr>
+          <p:cNvSpPr txBox="1"/>
+          <p:nvPr/>
+        </p:nvSpPr>
+        <p:spPr>
+          <a:xfrm>
+            <a:off x="1231639" y="2344304"/>
+            <a:ext cx="10387303" cy="3046988"/>
+          </a:xfrm>
+          <a:prstGeom prst="rect">
+            <a:avLst/>
+          </a:prstGeom>
+          <a:solidFill>
+            <a:schemeClr val="tx1">
+              <a:lumMod val="20000"/>
+              <a:lumOff val="80000"/>
+            </a:schemeClr>
+          </a:solidFill>
+        </p:spPr>
+        <p:txBody>
+          <a:bodyPr wrap="square" rtlCol="0">
+            <a:spAutoFit/>
+          </a:bodyPr>
+          <a:lstStyle/>
+          <a:p>
+            <a:pPr>
+              <a:buNone/>
+            </a:pPr>
+            <a:r>
+              <a:rPr lang="en-US" altLang="ja-JP" sz="1600" b="0" dirty="0">
+                <a:solidFill>
+                  <a:srgbClr val="353535"/>
+                </a:solidFill>
+                <a:effectLst/>
+                <a:latin typeface="Consolas" panose="020B0609020204030204" pitchFamily="49" charset="0"/>
+              </a:rPr>
+              <a:t>class User:</a:t>
+            </a:r>
+          </a:p>
+          <a:p>
+            <a:pPr>
+              <a:buNone/>
+            </a:pPr>
+            <a:r>
+              <a:rPr lang="en-US" altLang="ja-JP" sz="1600" b="0" dirty="0">
+                <a:solidFill>
+                  <a:srgbClr val="353535"/>
+                </a:solidFill>
+                <a:effectLst/>
+                <a:latin typeface="Consolas" panose="020B0609020204030204" pitchFamily="49" charset="0"/>
+              </a:rPr>
+              <a:t>  def __</a:t>
+            </a:r>
+            <a:r>
+              <a:rPr lang="en-US" altLang="ja-JP" sz="1600" b="0" dirty="0" err="1">
+                <a:solidFill>
+                  <a:srgbClr val="353535"/>
+                </a:solidFill>
+                <a:effectLst/>
+                <a:latin typeface="Consolas" panose="020B0609020204030204" pitchFamily="49" charset="0"/>
+              </a:rPr>
+              <a:t>init</a:t>
+            </a:r>
+            <a:r>
+              <a:rPr lang="en-US" altLang="ja-JP" sz="1600" b="0" dirty="0">
+                <a:solidFill>
+                  <a:srgbClr val="353535"/>
+                </a:solidFill>
+                <a:effectLst/>
+                <a:latin typeface="Consolas" panose="020B0609020204030204" pitchFamily="49" charset="0"/>
+              </a:rPr>
+              <a:t>__(</a:t>
+            </a:r>
+            <a:r>
+              <a:rPr lang="en-US" altLang="ja-JP" sz="1600" b="0" dirty="0" err="1">
+                <a:solidFill>
+                  <a:srgbClr val="353535"/>
+                </a:solidFill>
+                <a:effectLst/>
+                <a:latin typeface="Consolas" panose="020B0609020204030204" pitchFamily="49" charset="0"/>
+              </a:rPr>
+              <a:t>self,name,gender,birthday</a:t>
+            </a:r>
+            <a:r>
+              <a:rPr lang="en-US" altLang="ja-JP" sz="1600" b="0" dirty="0">
+                <a:solidFill>
+                  <a:srgbClr val="353535"/>
+                </a:solidFill>
+                <a:effectLst/>
+                <a:latin typeface="Consolas" panose="020B0609020204030204" pitchFamily="49" charset="0"/>
+              </a:rPr>
+              <a:t>):</a:t>
+            </a:r>
+          </a:p>
+          <a:p>
+            <a:pPr>
+              <a:buNone/>
+            </a:pPr>
+            <a:r>
+              <a:rPr lang="en-US" altLang="ja-JP" sz="1600" b="0" dirty="0">
+                <a:solidFill>
+                  <a:srgbClr val="353535"/>
+                </a:solidFill>
+                <a:effectLst/>
+                <a:latin typeface="Consolas" panose="020B0609020204030204" pitchFamily="49" charset="0"/>
+              </a:rPr>
+              <a:t>    </a:t>
+            </a:r>
+            <a:r>
+              <a:rPr lang="en-US" altLang="ja-JP" sz="1600" b="0" dirty="0">
+                <a:solidFill>
+                  <a:srgbClr val="386AC3"/>
+                </a:solidFill>
+                <a:effectLst/>
+                <a:latin typeface="Consolas" panose="020B0609020204030204" pitchFamily="49" charset="0"/>
+              </a:rPr>
+              <a:t>self.name</a:t>
+            </a:r>
+            <a:r>
+              <a:rPr lang="en-US" altLang="ja-JP" sz="1600" b="0" dirty="0">
+                <a:solidFill>
+                  <a:srgbClr val="353535"/>
+                </a:solidFill>
+                <a:effectLst/>
+                <a:latin typeface="Consolas" panose="020B0609020204030204" pitchFamily="49" charset="0"/>
+              </a:rPr>
+              <a:t>   = name</a:t>
+            </a:r>
+          </a:p>
+          <a:p>
+            <a:pPr>
+              <a:buNone/>
+            </a:pPr>
+            <a:r>
+              <a:rPr lang="en-US" altLang="ja-JP" sz="1600" b="0" dirty="0">
+                <a:solidFill>
+                  <a:srgbClr val="353535"/>
+                </a:solidFill>
+                <a:effectLst/>
+                <a:latin typeface="Consolas" panose="020B0609020204030204" pitchFamily="49" charset="0"/>
+              </a:rPr>
+              <a:t>    </a:t>
+            </a:r>
+            <a:r>
+              <a:rPr lang="en-US" altLang="ja-JP" sz="1600" b="0" dirty="0" err="1">
+                <a:solidFill>
+                  <a:srgbClr val="386AC3"/>
+                </a:solidFill>
+                <a:effectLst/>
+                <a:latin typeface="Consolas" panose="020B0609020204030204" pitchFamily="49" charset="0"/>
+              </a:rPr>
+              <a:t>self.gender</a:t>
+            </a:r>
+            <a:r>
+              <a:rPr lang="en-US" altLang="ja-JP" sz="1600" b="0" dirty="0">
+                <a:solidFill>
+                  <a:srgbClr val="353535"/>
+                </a:solidFill>
+                <a:effectLst/>
+                <a:latin typeface="Consolas" panose="020B0609020204030204" pitchFamily="49" charset="0"/>
+              </a:rPr>
+              <a:t> = gender</a:t>
+            </a:r>
+          </a:p>
+          <a:p>
+            <a:pPr>
+              <a:buNone/>
+            </a:pPr>
+            <a:r>
+              <a:rPr lang="en-US" altLang="ja-JP" sz="1600" b="0" dirty="0">
+                <a:solidFill>
+                  <a:srgbClr val="353535"/>
+                </a:solidFill>
+                <a:effectLst/>
+                <a:latin typeface="Consolas" panose="020B0609020204030204" pitchFamily="49" charset="0"/>
+              </a:rPr>
+              <a:t>    </a:t>
+            </a:r>
+            <a:r>
+              <a:rPr lang="en-US" altLang="ja-JP" sz="1600" b="0" dirty="0" err="1">
+                <a:solidFill>
+                  <a:srgbClr val="386AC3"/>
+                </a:solidFill>
+                <a:effectLst/>
+                <a:latin typeface="Consolas" panose="020B0609020204030204" pitchFamily="49" charset="0"/>
+              </a:rPr>
+              <a:t>self.birthday</a:t>
+            </a:r>
+            <a:r>
+              <a:rPr lang="en-US" altLang="ja-JP" sz="1600" b="0" dirty="0">
+                <a:solidFill>
+                  <a:srgbClr val="353535"/>
+                </a:solidFill>
+                <a:effectLst/>
+                <a:latin typeface="Consolas" panose="020B0609020204030204" pitchFamily="49" charset="0"/>
+              </a:rPr>
+              <a:t> = birthday</a:t>
+            </a:r>
+          </a:p>
+          <a:p>
+            <a:pPr>
+              <a:buNone/>
+            </a:pPr>
+            <a:br>
+              <a:rPr lang="en-US" altLang="ja-JP" sz="1600" b="0" dirty="0">
+                <a:solidFill>
+                  <a:srgbClr val="353535"/>
+                </a:solidFill>
+                <a:effectLst/>
+                <a:latin typeface="Consolas" panose="020B0609020204030204" pitchFamily="49" charset="0"/>
+              </a:rPr>
+            </a:br>
+            <a:r>
+              <a:rPr lang="en-US" altLang="ja-JP" sz="1600" b="0" dirty="0">
+                <a:solidFill>
+                  <a:srgbClr val="353535"/>
+                </a:solidFill>
+                <a:effectLst/>
+                <a:latin typeface="Consolas" panose="020B0609020204030204" pitchFamily="49" charset="0"/>
+              </a:rPr>
+              <a:t>  @property</a:t>
+            </a:r>
+          </a:p>
+          <a:p>
+            <a:pPr>
+              <a:buNone/>
+            </a:pPr>
+            <a:r>
+              <a:rPr lang="en-US" altLang="ja-JP" sz="1600" b="0" dirty="0">
+                <a:solidFill>
+                  <a:srgbClr val="353535"/>
+                </a:solidFill>
+                <a:effectLst/>
+                <a:latin typeface="Consolas" panose="020B0609020204030204" pitchFamily="49" charset="0"/>
+              </a:rPr>
+              <a:t>  def age(self):</a:t>
+            </a:r>
+          </a:p>
+          <a:p>
+            <a:pPr>
+              <a:buNone/>
+            </a:pPr>
+            <a:r>
+              <a:rPr lang="en-US" altLang="ja-JP" sz="1600" b="0" dirty="0">
+                <a:solidFill>
+                  <a:srgbClr val="353535"/>
+                </a:solidFill>
+                <a:effectLst/>
+                <a:latin typeface="Consolas" panose="020B0609020204030204" pitchFamily="49" charset="0"/>
+              </a:rPr>
+              <a:t>    </a:t>
+            </a:r>
+            <a:r>
+              <a:rPr lang="en-US" altLang="ja-JP" sz="1600" b="0" dirty="0">
+                <a:solidFill>
+                  <a:srgbClr val="386AC3"/>
+                </a:solidFill>
+                <a:effectLst/>
+                <a:latin typeface="Consolas" panose="020B0609020204030204" pitchFamily="49" charset="0"/>
+              </a:rPr>
+              <a:t>today</a:t>
+            </a:r>
+            <a:r>
+              <a:rPr lang="en-US" altLang="ja-JP" sz="1600" b="0" dirty="0">
+                <a:solidFill>
+                  <a:srgbClr val="353535"/>
+                </a:solidFill>
+                <a:effectLst/>
+                <a:latin typeface="Consolas" panose="020B0609020204030204" pitchFamily="49" charset="0"/>
+              </a:rPr>
+              <a:t> = </a:t>
+            </a:r>
+            <a:r>
+              <a:rPr lang="en-US" altLang="ja-JP" sz="1600" b="0" dirty="0" err="1">
+                <a:solidFill>
+                  <a:srgbClr val="353535"/>
+                </a:solidFill>
+                <a:effectLst/>
+                <a:latin typeface="Consolas" panose="020B0609020204030204" pitchFamily="49" charset="0"/>
+              </a:rPr>
+              <a:t>datetime.datetime.now</a:t>
+            </a:r>
+            <a:r>
+              <a:rPr lang="en-US" altLang="ja-JP" sz="1600" b="0" dirty="0">
+                <a:solidFill>
+                  <a:srgbClr val="353535"/>
+                </a:solidFill>
+                <a:effectLst/>
+                <a:latin typeface="Consolas" panose="020B0609020204030204" pitchFamily="49" charset="0"/>
+              </a:rPr>
+              <a:t>()</a:t>
+            </a:r>
+          </a:p>
+          <a:p>
+            <a:pPr>
+              <a:buNone/>
+            </a:pPr>
+            <a:r>
+              <a:rPr lang="en-US" altLang="ja-JP" sz="1600" b="0" dirty="0">
+                <a:solidFill>
+                  <a:srgbClr val="353535"/>
+                </a:solidFill>
+                <a:effectLst/>
+                <a:latin typeface="Consolas" panose="020B0609020204030204" pitchFamily="49" charset="0"/>
+              </a:rPr>
+              <a:t>    </a:t>
+            </a:r>
+            <a:r>
+              <a:rPr lang="en-US" altLang="ja-JP" sz="1600" b="0" dirty="0" err="1">
+                <a:solidFill>
+                  <a:srgbClr val="386AC3"/>
+                </a:solidFill>
+                <a:effectLst/>
+                <a:latin typeface="Consolas" panose="020B0609020204030204" pitchFamily="49" charset="0"/>
+              </a:rPr>
+              <a:t>umeko_birthday</a:t>
+            </a:r>
+            <a:r>
+              <a:rPr lang="en-US" altLang="ja-JP" sz="1600" b="0" dirty="0">
+                <a:solidFill>
+                  <a:srgbClr val="353535"/>
+                </a:solidFill>
+                <a:effectLst/>
+                <a:latin typeface="Consolas" panose="020B0609020204030204" pitchFamily="49" charset="0"/>
+              </a:rPr>
+              <a:t> = </a:t>
+            </a:r>
+            <a:r>
+              <a:rPr lang="en-US" altLang="ja-JP" sz="1600" b="0" dirty="0" err="1">
+                <a:solidFill>
+                  <a:srgbClr val="353535"/>
+                </a:solidFill>
+                <a:effectLst/>
+                <a:latin typeface="Consolas" panose="020B0609020204030204" pitchFamily="49" charset="0"/>
+              </a:rPr>
+              <a:t>self.birthday</a:t>
+            </a:r>
+            <a:endParaRPr lang="en-US" altLang="ja-JP" sz="1600" b="0" dirty="0">
+              <a:solidFill>
+                <a:srgbClr val="353535"/>
+              </a:solidFill>
+              <a:effectLst/>
+              <a:latin typeface="Consolas" panose="020B0609020204030204" pitchFamily="49" charset="0"/>
+            </a:endParaRPr>
+          </a:p>
+          <a:p>
+            <a:pPr>
+              <a:buNone/>
+            </a:pPr>
+            <a:r>
+              <a:rPr lang="en-US" altLang="ja-JP" sz="1600" b="0" dirty="0">
+                <a:solidFill>
+                  <a:srgbClr val="353535"/>
+                </a:solidFill>
+                <a:effectLst/>
+                <a:latin typeface="Consolas" panose="020B0609020204030204" pitchFamily="49" charset="0"/>
+              </a:rPr>
+              <a:t>    </a:t>
+            </a:r>
+            <a:r>
+              <a:rPr lang="en-US" altLang="ja-JP" sz="1600" b="0" dirty="0">
+                <a:solidFill>
+                  <a:srgbClr val="386AC3"/>
+                </a:solidFill>
+                <a:effectLst/>
+                <a:latin typeface="Consolas" panose="020B0609020204030204" pitchFamily="49" charset="0"/>
+              </a:rPr>
+              <a:t>age</a:t>
+            </a:r>
+            <a:r>
+              <a:rPr lang="en-US" altLang="ja-JP" sz="1600" b="0" dirty="0">
+                <a:solidFill>
+                  <a:srgbClr val="353535"/>
+                </a:solidFill>
+                <a:effectLst/>
+                <a:latin typeface="Consolas" panose="020B0609020204030204" pitchFamily="49" charset="0"/>
+              </a:rPr>
+              <a:t> = (int(</a:t>
+            </a:r>
+            <a:r>
+              <a:rPr lang="en-US" altLang="ja-JP" sz="1600" b="0" dirty="0" err="1">
+                <a:solidFill>
+                  <a:srgbClr val="353535"/>
+                </a:solidFill>
+                <a:effectLst/>
+                <a:latin typeface="Consolas" panose="020B0609020204030204" pitchFamily="49" charset="0"/>
+              </a:rPr>
+              <a:t>today.strftime</a:t>
+            </a:r>
+            <a:r>
+              <a:rPr lang="en-US" altLang="ja-JP" sz="1600" b="0" dirty="0">
+                <a:solidFill>
+                  <a:srgbClr val="353535"/>
+                </a:solidFill>
+                <a:effectLst/>
+                <a:latin typeface="Consolas" panose="020B0609020204030204" pitchFamily="49" charset="0"/>
+              </a:rPr>
+              <a:t>(</a:t>
+            </a:r>
+            <a:r>
+              <a:rPr lang="en-US" altLang="ja-JP" sz="1600" b="0" dirty="0">
+                <a:solidFill>
+                  <a:srgbClr val="E88501"/>
+                </a:solidFill>
+                <a:effectLst/>
+                <a:latin typeface="Consolas" panose="020B0609020204030204" pitchFamily="49" charset="0"/>
+              </a:rPr>
+              <a:t>"%</a:t>
+            </a:r>
+            <a:r>
+              <a:rPr lang="en-US" altLang="ja-JP" sz="1600" b="0" dirty="0" err="1">
+                <a:solidFill>
+                  <a:srgbClr val="E88501"/>
+                </a:solidFill>
+                <a:effectLst/>
+                <a:latin typeface="Consolas" panose="020B0609020204030204" pitchFamily="49" charset="0"/>
+              </a:rPr>
+              <a:t>Y%m%d</a:t>
+            </a:r>
+            <a:r>
+              <a:rPr lang="en-US" altLang="ja-JP" sz="1600" b="0" dirty="0">
+                <a:solidFill>
+                  <a:srgbClr val="E88501"/>
+                </a:solidFill>
+                <a:effectLst/>
+                <a:latin typeface="Consolas" panose="020B0609020204030204" pitchFamily="49" charset="0"/>
+              </a:rPr>
+              <a:t>"</a:t>
+            </a:r>
+            <a:r>
+              <a:rPr lang="en-US" altLang="ja-JP" sz="1600" b="0" dirty="0">
+                <a:solidFill>
+                  <a:srgbClr val="353535"/>
+                </a:solidFill>
+                <a:effectLst/>
+                <a:latin typeface="Consolas" panose="020B0609020204030204" pitchFamily="49" charset="0"/>
+              </a:rPr>
+              <a:t>)) - int(</a:t>
+            </a:r>
+            <a:r>
+              <a:rPr lang="en-US" altLang="ja-JP" sz="1600" b="0" dirty="0" err="1">
+                <a:solidFill>
+                  <a:srgbClr val="353535"/>
+                </a:solidFill>
+                <a:effectLst/>
+                <a:latin typeface="Consolas" panose="020B0609020204030204" pitchFamily="49" charset="0"/>
+              </a:rPr>
+              <a:t>umeko_birthday.strftime</a:t>
+            </a:r>
+            <a:r>
+              <a:rPr lang="en-US" altLang="ja-JP" sz="1600" b="0" dirty="0">
+                <a:solidFill>
+                  <a:srgbClr val="353535"/>
+                </a:solidFill>
+                <a:effectLst/>
+                <a:latin typeface="Consolas" panose="020B0609020204030204" pitchFamily="49" charset="0"/>
+              </a:rPr>
+              <a:t>(</a:t>
+            </a:r>
+            <a:r>
+              <a:rPr lang="en-US" altLang="ja-JP" sz="1600" b="0" dirty="0">
+                <a:solidFill>
+                  <a:srgbClr val="E88501"/>
+                </a:solidFill>
+                <a:effectLst/>
+                <a:latin typeface="Consolas" panose="020B0609020204030204" pitchFamily="49" charset="0"/>
+              </a:rPr>
+              <a:t>"%</a:t>
+            </a:r>
+            <a:r>
+              <a:rPr lang="en-US" altLang="ja-JP" sz="1600" b="0" dirty="0" err="1">
+                <a:solidFill>
+                  <a:srgbClr val="E88501"/>
+                </a:solidFill>
+                <a:effectLst/>
+                <a:latin typeface="Consolas" panose="020B0609020204030204" pitchFamily="49" charset="0"/>
+              </a:rPr>
+              <a:t>Y%m%d</a:t>
+            </a:r>
+            <a:r>
+              <a:rPr lang="en-US" altLang="ja-JP" sz="1600" b="0" dirty="0">
+                <a:solidFill>
+                  <a:srgbClr val="E88501"/>
+                </a:solidFill>
+                <a:effectLst/>
+                <a:latin typeface="Consolas" panose="020B0609020204030204" pitchFamily="49" charset="0"/>
+              </a:rPr>
+              <a:t>"</a:t>
+            </a:r>
+            <a:r>
+              <a:rPr lang="en-US" altLang="ja-JP" sz="1600" b="0" dirty="0">
+                <a:solidFill>
+                  <a:srgbClr val="353535"/>
+                </a:solidFill>
+                <a:effectLst/>
+                <a:latin typeface="Consolas" panose="020B0609020204030204" pitchFamily="49" charset="0"/>
+              </a:rPr>
+              <a:t>))) // 10000</a:t>
+            </a:r>
+          </a:p>
+          <a:p>
+            <a:r>
+              <a:rPr lang="en-US" altLang="ja-JP" sz="1600" b="0" dirty="0">
+                <a:solidFill>
+                  <a:srgbClr val="353535"/>
+                </a:solidFill>
+                <a:effectLst/>
+                <a:latin typeface="Consolas" panose="020B0609020204030204" pitchFamily="49" charset="0"/>
+              </a:rPr>
+              <a:t>    return age</a:t>
+            </a:r>
+          </a:p>
+        </p:txBody>
+      </p:sp>
+      <p:sp>
+        <p:nvSpPr>
+          <p:cNvPr id="8" name="正方形/長方形 7">
+            <a:extLst>
+              <a:ext uri="{FF2B5EF4-FFF2-40B4-BE49-F238E27FC236}">
+                <a16:creationId xmlns:a16="http://schemas.microsoft.com/office/drawing/2014/main" id="{BDE8E689-1FF0-A437-8E35-1C254552A690}"/>
+              </a:ext>
+            </a:extLst>
+          </p:cNvPr>
+          <p:cNvSpPr/>
+          <p:nvPr/>
+        </p:nvSpPr>
+        <p:spPr>
+          <a:xfrm>
+            <a:off x="3359020" y="2344304"/>
+            <a:ext cx="1380931" cy="278380"/>
+          </a:xfrm>
+          <a:prstGeom prst="rect">
+            <a:avLst/>
+          </a:prstGeom>
+        </p:spPr>
+        <p:style>
+          <a:lnRef idx="2">
+            <a:schemeClr val="accent1">
+              <a:shade val="15000"/>
+            </a:schemeClr>
+          </a:lnRef>
+          <a:fillRef idx="1">
+            <a:schemeClr val="accent1"/>
+          </a:fillRef>
+          <a:effectRef idx="0">
+            <a:schemeClr val="accent1"/>
+          </a:effectRef>
+          <a:fontRef idx="minor">
+            <a:schemeClr val="lt1"/>
+          </a:fontRef>
+        </p:style>
+        <p:txBody>
+          <a:bodyPr rtlCol="0" anchor="ctr"/>
+          <a:lstStyle/>
+          <a:p>
+            <a:pPr algn="ctr"/>
+            <a:r>
+              <a:rPr kumimoji="1" lang="ja-JP" altLang="en-US" dirty="0"/>
+              <a:t>クラス</a:t>
+            </a:r>
+          </a:p>
+        </p:txBody>
+      </p:sp>
+      <p:sp>
+        <p:nvSpPr>
+          <p:cNvPr id="9" name="正方形/長方形 8">
+            <a:extLst>
+              <a:ext uri="{FF2B5EF4-FFF2-40B4-BE49-F238E27FC236}">
+                <a16:creationId xmlns:a16="http://schemas.microsoft.com/office/drawing/2014/main" id="{1DE7C5A6-6D30-4EB4-8847-AFCB02034D8E}"/>
+              </a:ext>
+            </a:extLst>
+          </p:cNvPr>
+          <p:cNvSpPr/>
+          <p:nvPr/>
+        </p:nvSpPr>
+        <p:spPr>
+          <a:xfrm>
+            <a:off x="4478694" y="2859323"/>
+            <a:ext cx="2015412" cy="765110"/>
+          </a:xfrm>
+          <a:prstGeom prst="rect">
+            <a:avLst/>
+          </a:prstGeom>
+        </p:spPr>
+        <p:style>
+          <a:lnRef idx="2">
+            <a:schemeClr val="accent1">
+              <a:shade val="15000"/>
+            </a:schemeClr>
+          </a:lnRef>
+          <a:fillRef idx="1">
+            <a:schemeClr val="accent1"/>
+          </a:fillRef>
+          <a:effectRef idx="0">
+            <a:schemeClr val="accent1"/>
+          </a:effectRef>
+          <a:fontRef idx="minor">
+            <a:schemeClr val="lt1"/>
+          </a:fontRef>
+        </p:style>
+        <p:txBody>
+          <a:bodyPr rtlCol="0" anchor="ctr"/>
+          <a:lstStyle/>
+          <a:p>
+            <a:pPr algn="ctr"/>
+            <a:r>
+              <a:rPr kumimoji="1" lang="ja-JP" altLang="en-US" dirty="0"/>
+              <a:t>インスタンス変数</a:t>
+            </a:r>
+          </a:p>
+        </p:txBody>
+      </p:sp>
+      <p:sp>
+        <p:nvSpPr>
+          <p:cNvPr id="10" name="正方形/長方形 9">
+            <a:extLst>
+              <a:ext uri="{FF2B5EF4-FFF2-40B4-BE49-F238E27FC236}">
+                <a16:creationId xmlns:a16="http://schemas.microsoft.com/office/drawing/2014/main" id="{18824A28-A643-3572-EDD8-9A59531E3F9D}"/>
+              </a:ext>
+            </a:extLst>
+          </p:cNvPr>
+          <p:cNvSpPr/>
+          <p:nvPr/>
+        </p:nvSpPr>
+        <p:spPr>
+          <a:xfrm>
+            <a:off x="3181739" y="4096127"/>
+            <a:ext cx="1380931" cy="278380"/>
+          </a:xfrm>
+          <a:prstGeom prst="rect">
+            <a:avLst/>
+          </a:prstGeom>
+        </p:spPr>
+        <p:style>
+          <a:lnRef idx="2">
+            <a:schemeClr val="accent1">
+              <a:shade val="15000"/>
+            </a:schemeClr>
+          </a:lnRef>
+          <a:fillRef idx="1">
+            <a:schemeClr val="accent1"/>
+          </a:fillRef>
+          <a:effectRef idx="0">
+            <a:schemeClr val="accent1"/>
+          </a:effectRef>
+          <a:fontRef idx="minor">
+            <a:schemeClr val="lt1"/>
+          </a:fontRef>
+        </p:style>
+        <p:txBody>
+          <a:bodyPr rtlCol="0" anchor="ctr"/>
+          <a:lstStyle/>
+          <a:p>
+            <a:pPr algn="ctr"/>
+            <a:r>
+              <a:rPr kumimoji="1" lang="ja-JP" altLang="en-US" dirty="0"/>
+              <a:t>メソッド</a:t>
+            </a:r>
+          </a:p>
+        </p:txBody>
+      </p:sp>
+      <p:sp>
+        <p:nvSpPr>
+          <p:cNvPr id="11" name="正方形/長方形 10">
+            <a:extLst>
+              <a:ext uri="{FF2B5EF4-FFF2-40B4-BE49-F238E27FC236}">
+                <a16:creationId xmlns:a16="http://schemas.microsoft.com/office/drawing/2014/main" id="{E4963F19-4A48-A842-9EE6-9DF34B525C91}"/>
+              </a:ext>
+            </a:extLst>
+          </p:cNvPr>
+          <p:cNvSpPr/>
+          <p:nvPr/>
+        </p:nvSpPr>
+        <p:spPr>
+          <a:xfrm>
+            <a:off x="6046237" y="2577569"/>
+            <a:ext cx="2127379" cy="278380"/>
+          </a:xfrm>
+          <a:prstGeom prst="rect">
+            <a:avLst/>
+          </a:prstGeom>
+        </p:spPr>
+        <p:style>
+          <a:lnRef idx="2">
+            <a:schemeClr val="accent1">
+              <a:shade val="15000"/>
+            </a:schemeClr>
+          </a:lnRef>
+          <a:fillRef idx="1">
+            <a:schemeClr val="accent1"/>
+          </a:fillRef>
+          <a:effectRef idx="0">
+            <a:schemeClr val="accent1"/>
+          </a:effectRef>
+          <a:fontRef idx="minor">
+            <a:schemeClr val="lt1"/>
+          </a:fontRef>
+        </p:style>
+        <p:txBody>
+          <a:bodyPr rtlCol="0" anchor="ctr"/>
+          <a:lstStyle/>
+          <a:p>
+            <a:pPr algn="ctr"/>
+            <a:r>
+              <a:rPr kumimoji="1" lang="ja-JP" altLang="en-US" dirty="0"/>
+              <a:t>コンストラクタ</a:t>
+            </a:r>
+          </a:p>
+        </p:txBody>
+      </p:sp>
     </p:spTree>
     <p:extLst>
       <p:ext uri="{BB962C8B-B14F-4D97-AF65-F5344CB8AC3E}">
-        <p14:creationId xmlns:p14="http://schemas.microsoft.com/office/powerpoint/2010/main" val="902635202"/>
+        <p14:creationId xmlns:p14="http://schemas.microsoft.com/office/powerpoint/2010/main" val="4029985760"/>
       </p:ext>
     </p:extLst>
   </p:cSld>
@@ -8252,13 +10805,7 @@
   <p:cSld>
     <p:spTree>
       <p:nvGrpSpPr>
-        <p:cNvPr id="1" name="">
-          <a:extLst>
-            <a:ext uri="{FF2B5EF4-FFF2-40B4-BE49-F238E27FC236}">
-              <a16:creationId xmlns:a16="http://schemas.microsoft.com/office/drawing/2014/main" id="{736C46B3-4843-95D6-3739-FBC6433CC24C}"/>
-            </a:ext>
-          </a:extLst>
-        </p:cNvPr>
+        <p:cNvPr id="1" name=""/>
         <p:cNvGrpSpPr/>
         <p:nvPr/>
       </p:nvGrpSpPr>
@@ -8272,10 +10819,54 @@
       </p:grpSpPr>
       <p:sp>
         <p:nvSpPr>
+          <p:cNvPr id="26" name="四角形: 角を丸くする 25">
+            <a:extLst>
+              <a:ext uri="{FF2B5EF4-FFF2-40B4-BE49-F238E27FC236}">
+                <a16:creationId xmlns:a16="http://schemas.microsoft.com/office/drawing/2014/main" id="{6D888CEC-C7CE-9B74-412A-FF9AB2CCDAF2}"/>
+              </a:ext>
+            </a:extLst>
+          </p:cNvPr>
+          <p:cNvSpPr/>
+          <p:nvPr/>
+        </p:nvSpPr>
+        <p:spPr>
+          <a:xfrm>
+            <a:off x="4853474" y="4019328"/>
+            <a:ext cx="2600131" cy="2054899"/>
+          </a:xfrm>
+          <a:prstGeom prst="roundRect">
+            <a:avLst/>
+          </a:prstGeom>
+        </p:spPr>
+        <p:style>
+          <a:lnRef idx="2">
+            <a:schemeClr val="accent2"/>
+          </a:lnRef>
+          <a:fillRef idx="1">
+            <a:schemeClr val="lt1"/>
+          </a:fillRef>
+          <a:effectRef idx="0">
+            <a:schemeClr val="accent2"/>
+          </a:effectRef>
+          <a:fontRef idx="minor">
+            <a:schemeClr val="dk1"/>
+          </a:fontRef>
+        </p:style>
+        <p:txBody>
+          <a:bodyPr rtlCol="0" anchor="ctr"/>
+          <a:lstStyle/>
+          <a:p>
+            <a:pPr algn="ctr"/>
+            <a:endParaRPr kumimoji="1" lang="ja-JP" altLang="en-US"/>
+          </a:p>
+        </p:txBody>
+      </p:sp>
+      <p:sp>
+        <p:nvSpPr>
           <p:cNvPr id="2" name="フッター プレースホルダー 1">
             <a:extLst>
               <a:ext uri="{FF2B5EF4-FFF2-40B4-BE49-F238E27FC236}">
-                <a16:creationId xmlns:a16="http://schemas.microsoft.com/office/drawing/2014/main" id="{95C872CB-5799-28ED-4479-AAA9792CECE7}"/>
+                <a16:creationId xmlns:a16="http://schemas.microsoft.com/office/drawing/2014/main" id="{4050ACDA-3253-58E3-AAFF-66351C23D91F}"/>
               </a:ext>
             </a:extLst>
           </p:cNvPr>
@@ -8304,7 +10895,7 @@
           <p:cNvPr id="3" name="タイトル 2">
             <a:extLst>
               <a:ext uri="{FF2B5EF4-FFF2-40B4-BE49-F238E27FC236}">
-                <a16:creationId xmlns:a16="http://schemas.microsoft.com/office/drawing/2014/main" id="{2132B40C-9159-C623-F1C1-505FB39691A2}"/>
+                <a16:creationId xmlns:a16="http://schemas.microsoft.com/office/drawing/2014/main" id="{EAAEE446-A55E-0A41-EB5C-AA57CD60CAA0}"/>
               </a:ext>
             </a:extLst>
           </p:cNvPr>
@@ -8321,12 +10912,8 @@
           <a:lstStyle/>
           <a:p>
             <a:r>
-              <a:rPr kumimoji="1" lang="en-US" altLang="ja-JP" dirty="0"/>
-              <a:t>Day03</a:t>
-            </a:r>
-            <a:r>
               <a:rPr kumimoji="1" lang="ja-JP" altLang="en-US" dirty="0"/>
-              <a:t>の宿題</a:t>
+              <a:t>差分プログラミングとは</a:t>
             </a:r>
           </a:p>
         </p:txBody>
@@ -8336,7 +10923,7 @@
           <p:cNvPr id="4" name="コンテンツ プレースホルダー 3">
             <a:extLst>
               <a:ext uri="{FF2B5EF4-FFF2-40B4-BE49-F238E27FC236}">
-                <a16:creationId xmlns:a16="http://schemas.microsoft.com/office/drawing/2014/main" id="{CA2824EF-C7BB-4EF4-A76E-6702C6F97D5F}"/>
+                <a16:creationId xmlns:a16="http://schemas.microsoft.com/office/drawing/2014/main" id="{9F6348CF-82AA-ADDF-5D47-A0952CC6921F}"/>
               </a:ext>
             </a:extLst>
           </p:cNvPr>
@@ -8349,8 +10936,1271 @@
         </p:nvSpPr>
         <p:spPr>
           <a:xfrm>
-            <a:off x="1355269" y="1825625"/>
-            <a:ext cx="9998530" cy="4351338"/>
+            <a:off x="1355270" y="1825625"/>
+            <a:ext cx="9998529" cy="4351338"/>
+          </a:xfrm>
+        </p:spPr>
+        <p:txBody>
+          <a:bodyPr/>
+          <a:lstStyle/>
+          <a:p>
+            <a:r>
+              <a:rPr kumimoji="1" lang="ja-JP" altLang="en-US" dirty="0"/>
+              <a:t>既存のプログラムやクラスを継承する</a:t>
+            </a:r>
+          </a:p>
+          <a:p>
+            <a:r>
+              <a:rPr kumimoji="1" lang="ja-JP" altLang="en-US" u="sng" dirty="0"/>
+              <a:t>必要な部分だけ</a:t>
+            </a:r>
+            <a:r>
+              <a:rPr kumimoji="1" lang="ja-JP" altLang="en-US" dirty="0"/>
+              <a:t>追加で実装する</a:t>
+            </a:r>
+          </a:p>
+          <a:p>
+            <a:r>
+              <a:rPr lang="ja-JP" altLang="en-US" dirty="0"/>
+              <a:t>これによりプログラムの生産性が飛躍的に向上する</a:t>
+            </a:r>
+            <a:endParaRPr kumimoji="1" lang="ja-JP" altLang="en-US" dirty="0"/>
+          </a:p>
+        </p:txBody>
+      </p:sp>
+      <p:sp>
+        <p:nvSpPr>
+          <p:cNvPr id="5" name="日付プレースホルダー 4">
+            <a:extLst>
+              <a:ext uri="{FF2B5EF4-FFF2-40B4-BE49-F238E27FC236}">
+                <a16:creationId xmlns:a16="http://schemas.microsoft.com/office/drawing/2014/main" id="{62E50BE5-E751-F012-EE37-F03830DE710B}"/>
+              </a:ext>
+            </a:extLst>
+          </p:cNvPr>
+          <p:cNvSpPr>
+            <a:spLocks noGrp="1"/>
+          </p:cNvSpPr>
+          <p:nvPr>
+            <p:ph type="dt" sz="half" idx="10"/>
+          </p:nvPr>
+        </p:nvSpPr>
+        <p:spPr/>
+        <p:txBody>
+          <a:bodyPr/>
+          <a:lstStyle/>
+          <a:p>
+            <a:r>
+              <a:rPr kumimoji="1" lang="en-US" altLang="ja-JP"/>
+              <a:t>Day4</a:t>
+            </a:r>
+            <a:endParaRPr kumimoji="1" lang="ja-JP" altLang="en-US"/>
+          </a:p>
+        </p:txBody>
+      </p:sp>
+      <p:sp>
+        <p:nvSpPr>
+          <p:cNvPr id="6" name="スライド番号プレースホルダー 5">
+            <a:extLst>
+              <a:ext uri="{FF2B5EF4-FFF2-40B4-BE49-F238E27FC236}">
+                <a16:creationId xmlns:a16="http://schemas.microsoft.com/office/drawing/2014/main" id="{CE1BCDFF-8018-D8AF-EDB2-B2343E896F82}"/>
+              </a:ext>
+            </a:extLst>
+          </p:cNvPr>
+          <p:cNvSpPr>
+            <a:spLocks noGrp="1"/>
+          </p:cNvSpPr>
+          <p:nvPr>
+            <p:ph type="sldNum" sz="quarter" idx="12"/>
+          </p:nvPr>
+        </p:nvSpPr>
+        <p:spPr/>
+        <p:txBody>
+          <a:bodyPr/>
+          <a:lstStyle/>
+          <a:p>
+            <a:fld id="{B4DA0251-0B3B-4C1C-96DC-5D2833458AB2}" type="slidenum">
+              <a:rPr kumimoji="1" lang="ja-JP" altLang="en-US" smtClean="0"/>
+              <a:t>8</a:t>
+            </a:fld>
+            <a:endParaRPr kumimoji="1" lang="ja-JP" altLang="en-US"/>
+          </a:p>
+        </p:txBody>
+      </p:sp>
+      <p:sp>
+        <p:nvSpPr>
+          <p:cNvPr id="7" name="四角形: 角を丸くする 6">
+            <a:extLst>
+              <a:ext uri="{FF2B5EF4-FFF2-40B4-BE49-F238E27FC236}">
+                <a16:creationId xmlns:a16="http://schemas.microsoft.com/office/drawing/2014/main" id="{76814DC1-A437-4FCF-4E18-507D1BF60BF3}"/>
+              </a:ext>
+            </a:extLst>
+          </p:cNvPr>
+          <p:cNvSpPr/>
+          <p:nvPr/>
+        </p:nvSpPr>
+        <p:spPr>
+          <a:xfrm>
+            <a:off x="1838130" y="3554963"/>
+            <a:ext cx="2043405" cy="2519266"/>
+          </a:xfrm>
+          <a:prstGeom prst="roundRect">
+            <a:avLst/>
+          </a:prstGeom>
+        </p:spPr>
+        <p:style>
+          <a:lnRef idx="2">
+            <a:schemeClr val="accent1">
+              <a:shade val="15000"/>
+            </a:schemeClr>
+          </a:lnRef>
+          <a:fillRef idx="1">
+            <a:schemeClr val="accent1"/>
+          </a:fillRef>
+          <a:effectRef idx="0">
+            <a:schemeClr val="accent1"/>
+          </a:effectRef>
+          <a:fontRef idx="minor">
+            <a:schemeClr val="lt1"/>
+          </a:fontRef>
+        </p:style>
+        <p:txBody>
+          <a:bodyPr rtlCol="0" anchor="ctr"/>
+          <a:lstStyle/>
+          <a:p>
+            <a:pPr algn="ctr"/>
+            <a:endParaRPr kumimoji="1" lang="ja-JP" altLang="en-US"/>
+          </a:p>
+        </p:txBody>
+      </p:sp>
+      <p:sp>
+        <p:nvSpPr>
+          <p:cNvPr id="8" name="テキスト ボックス 7">
+            <a:extLst>
+              <a:ext uri="{FF2B5EF4-FFF2-40B4-BE49-F238E27FC236}">
+                <a16:creationId xmlns:a16="http://schemas.microsoft.com/office/drawing/2014/main" id="{A4428B67-EF1F-AD0F-A747-AB38DBE145BA}"/>
+              </a:ext>
+            </a:extLst>
+          </p:cNvPr>
+          <p:cNvSpPr txBox="1"/>
+          <p:nvPr/>
+        </p:nvSpPr>
+        <p:spPr>
+          <a:xfrm>
+            <a:off x="2108718" y="3652474"/>
+            <a:ext cx="1408922" cy="369332"/>
+          </a:xfrm>
+          <a:prstGeom prst="rect">
+            <a:avLst/>
+          </a:prstGeom>
+          <a:noFill/>
+        </p:spPr>
+        <p:txBody>
+          <a:bodyPr wrap="square" rtlCol="0">
+            <a:spAutoFit/>
+          </a:bodyPr>
+          <a:lstStyle/>
+          <a:p>
+            <a:r>
+              <a:rPr kumimoji="1" lang="ja-JP" altLang="en-US" dirty="0">
+                <a:solidFill>
+                  <a:schemeClr val="bg1"/>
+                </a:solidFill>
+                <a:latin typeface="+mj-ea"/>
+                <a:ea typeface="+mj-ea"/>
+              </a:rPr>
+              <a:t>クラス</a:t>
+            </a:r>
+          </a:p>
+        </p:txBody>
+      </p:sp>
+      <p:sp>
+        <p:nvSpPr>
+          <p:cNvPr id="9" name="正方形/長方形 8">
+            <a:extLst>
+              <a:ext uri="{FF2B5EF4-FFF2-40B4-BE49-F238E27FC236}">
+                <a16:creationId xmlns:a16="http://schemas.microsoft.com/office/drawing/2014/main" id="{745BF9B4-4F6B-582C-7A52-921E774B27C2}"/>
+              </a:ext>
+            </a:extLst>
+          </p:cNvPr>
+          <p:cNvSpPr/>
+          <p:nvPr/>
+        </p:nvSpPr>
+        <p:spPr>
+          <a:xfrm>
+            <a:off x="2108718" y="5016065"/>
+            <a:ext cx="2239347" cy="369332"/>
+          </a:xfrm>
+          <a:prstGeom prst="rect">
+            <a:avLst/>
+          </a:prstGeom>
+        </p:spPr>
+        <p:style>
+          <a:lnRef idx="1">
+            <a:schemeClr val="accent1"/>
+          </a:lnRef>
+          <a:fillRef idx="2">
+            <a:schemeClr val="accent1"/>
+          </a:fillRef>
+          <a:effectRef idx="1">
+            <a:schemeClr val="accent1"/>
+          </a:effectRef>
+          <a:fontRef idx="minor">
+            <a:schemeClr val="dk1"/>
+          </a:fontRef>
+        </p:style>
+        <p:txBody>
+          <a:bodyPr rtlCol="0" anchor="ctr"/>
+          <a:lstStyle/>
+          <a:p>
+            <a:pPr algn="ctr"/>
+            <a:r>
+              <a:rPr kumimoji="1" lang="ja-JP" altLang="en-US" sz="1600" dirty="0">
+                <a:solidFill>
+                  <a:schemeClr val="tx1"/>
+                </a:solidFill>
+                <a:latin typeface="+mj-ea"/>
+                <a:ea typeface="+mj-ea"/>
+              </a:rPr>
+              <a:t>メソッド</a:t>
+            </a:r>
+            <a:r>
+              <a:rPr kumimoji="1" lang="en-US" altLang="ja-JP" sz="1600" dirty="0">
+                <a:solidFill>
+                  <a:schemeClr val="tx1"/>
+                </a:solidFill>
+                <a:latin typeface="+mj-ea"/>
+                <a:ea typeface="+mj-ea"/>
+              </a:rPr>
+              <a:t>A</a:t>
+            </a:r>
+            <a:endParaRPr kumimoji="1" lang="ja-JP" altLang="en-US" sz="1600" dirty="0">
+              <a:solidFill>
+                <a:schemeClr val="tx1"/>
+              </a:solidFill>
+              <a:latin typeface="+mj-ea"/>
+              <a:ea typeface="+mj-ea"/>
+            </a:endParaRPr>
+          </a:p>
+        </p:txBody>
+      </p:sp>
+      <p:sp>
+        <p:nvSpPr>
+          <p:cNvPr id="11" name="正方形/長方形 10">
+            <a:extLst>
+              <a:ext uri="{FF2B5EF4-FFF2-40B4-BE49-F238E27FC236}">
+                <a16:creationId xmlns:a16="http://schemas.microsoft.com/office/drawing/2014/main" id="{3F2C39AD-52F4-517F-7C5C-21E35729697A}"/>
+              </a:ext>
+            </a:extLst>
+          </p:cNvPr>
+          <p:cNvSpPr/>
+          <p:nvPr/>
+        </p:nvSpPr>
+        <p:spPr>
+          <a:xfrm>
+            <a:off x="2108718" y="4034717"/>
+            <a:ext cx="2239347" cy="369332"/>
+          </a:xfrm>
+          <a:prstGeom prst="rect">
+            <a:avLst/>
+          </a:prstGeom>
+        </p:spPr>
+        <p:style>
+          <a:lnRef idx="1">
+            <a:schemeClr val="accent1"/>
+          </a:lnRef>
+          <a:fillRef idx="2">
+            <a:schemeClr val="accent1"/>
+          </a:fillRef>
+          <a:effectRef idx="1">
+            <a:schemeClr val="accent1"/>
+          </a:effectRef>
+          <a:fontRef idx="minor">
+            <a:schemeClr val="dk1"/>
+          </a:fontRef>
+        </p:style>
+        <p:txBody>
+          <a:bodyPr rtlCol="0" anchor="ctr"/>
+          <a:lstStyle/>
+          <a:p>
+            <a:pPr algn="ctr"/>
+            <a:r>
+              <a:rPr kumimoji="1" lang="ja-JP" altLang="en-US" sz="1600" dirty="0">
+                <a:solidFill>
+                  <a:schemeClr val="tx1"/>
+                </a:solidFill>
+                <a:latin typeface="+mj-ea"/>
+                <a:ea typeface="+mj-ea"/>
+              </a:rPr>
+              <a:t>メンバ </a:t>
+            </a:r>
+            <a:r>
+              <a:rPr lang="en-US" altLang="ja-JP" sz="1600" dirty="0">
+                <a:solidFill>
+                  <a:schemeClr val="tx1"/>
+                </a:solidFill>
+                <a:latin typeface="+mj-ea"/>
+                <a:ea typeface="+mj-ea"/>
+              </a:rPr>
+              <a:t>a</a:t>
+            </a:r>
+            <a:endParaRPr kumimoji="1" lang="ja-JP" altLang="en-US" sz="1600" dirty="0">
+              <a:solidFill>
+                <a:schemeClr val="tx1"/>
+              </a:solidFill>
+              <a:latin typeface="+mj-ea"/>
+              <a:ea typeface="+mj-ea"/>
+            </a:endParaRPr>
+          </a:p>
+        </p:txBody>
+      </p:sp>
+      <p:sp>
+        <p:nvSpPr>
+          <p:cNvPr id="12" name="正方形/長方形 11">
+            <a:extLst>
+              <a:ext uri="{FF2B5EF4-FFF2-40B4-BE49-F238E27FC236}">
+                <a16:creationId xmlns:a16="http://schemas.microsoft.com/office/drawing/2014/main" id="{0C2E3741-79E3-7181-2E05-64A59E66F085}"/>
+              </a:ext>
+            </a:extLst>
+          </p:cNvPr>
+          <p:cNvSpPr/>
+          <p:nvPr/>
+        </p:nvSpPr>
+        <p:spPr>
+          <a:xfrm>
+            <a:off x="2108718" y="4525391"/>
+            <a:ext cx="2239347" cy="369332"/>
+          </a:xfrm>
+          <a:prstGeom prst="rect">
+            <a:avLst/>
+          </a:prstGeom>
+        </p:spPr>
+        <p:style>
+          <a:lnRef idx="1">
+            <a:schemeClr val="accent1"/>
+          </a:lnRef>
+          <a:fillRef idx="2">
+            <a:schemeClr val="accent1"/>
+          </a:fillRef>
+          <a:effectRef idx="1">
+            <a:schemeClr val="accent1"/>
+          </a:effectRef>
+          <a:fontRef idx="minor">
+            <a:schemeClr val="dk1"/>
+          </a:fontRef>
+        </p:style>
+        <p:txBody>
+          <a:bodyPr rtlCol="0" anchor="ctr"/>
+          <a:lstStyle/>
+          <a:p>
+            <a:pPr algn="ctr"/>
+            <a:r>
+              <a:rPr kumimoji="1" lang="ja-JP" altLang="en-US" sz="1600" dirty="0">
+                <a:solidFill>
+                  <a:schemeClr val="tx1"/>
+                </a:solidFill>
+                <a:latin typeface="+mj-ea"/>
+                <a:ea typeface="+mj-ea"/>
+              </a:rPr>
+              <a:t>メンバ </a:t>
+            </a:r>
+            <a:r>
+              <a:rPr kumimoji="1" lang="en-US" altLang="ja-JP" sz="1600" dirty="0">
+                <a:solidFill>
+                  <a:schemeClr val="tx1"/>
+                </a:solidFill>
+                <a:latin typeface="+mj-ea"/>
+                <a:ea typeface="+mj-ea"/>
+              </a:rPr>
+              <a:t>b</a:t>
+            </a:r>
+            <a:endParaRPr kumimoji="1" lang="ja-JP" altLang="en-US" sz="1600" dirty="0">
+              <a:solidFill>
+                <a:schemeClr val="tx1"/>
+              </a:solidFill>
+              <a:latin typeface="+mj-ea"/>
+              <a:ea typeface="+mj-ea"/>
+            </a:endParaRPr>
+          </a:p>
+        </p:txBody>
+      </p:sp>
+      <p:sp>
+        <p:nvSpPr>
+          <p:cNvPr id="13" name="正方形/長方形 12">
+            <a:extLst>
+              <a:ext uri="{FF2B5EF4-FFF2-40B4-BE49-F238E27FC236}">
+                <a16:creationId xmlns:a16="http://schemas.microsoft.com/office/drawing/2014/main" id="{B8B5270D-26EF-862B-C31D-6C829D3D17EB}"/>
+              </a:ext>
+            </a:extLst>
+          </p:cNvPr>
+          <p:cNvSpPr/>
+          <p:nvPr/>
+        </p:nvSpPr>
+        <p:spPr>
+          <a:xfrm>
+            <a:off x="2108718" y="5506739"/>
+            <a:ext cx="2239347" cy="369332"/>
+          </a:xfrm>
+          <a:prstGeom prst="rect">
+            <a:avLst/>
+          </a:prstGeom>
+        </p:spPr>
+        <p:style>
+          <a:lnRef idx="1">
+            <a:schemeClr val="accent1"/>
+          </a:lnRef>
+          <a:fillRef idx="2">
+            <a:schemeClr val="accent1"/>
+          </a:fillRef>
+          <a:effectRef idx="1">
+            <a:schemeClr val="accent1"/>
+          </a:effectRef>
+          <a:fontRef idx="minor">
+            <a:schemeClr val="dk1"/>
+          </a:fontRef>
+        </p:style>
+        <p:txBody>
+          <a:bodyPr rtlCol="0" anchor="ctr"/>
+          <a:lstStyle/>
+          <a:p>
+            <a:pPr algn="ctr"/>
+            <a:r>
+              <a:rPr kumimoji="1" lang="ja-JP" altLang="en-US" sz="1600" dirty="0">
+                <a:solidFill>
+                  <a:schemeClr val="tx1"/>
+                </a:solidFill>
+                <a:latin typeface="+mj-ea"/>
+                <a:ea typeface="+mj-ea"/>
+              </a:rPr>
+              <a:t>メソッド</a:t>
+            </a:r>
+            <a:r>
+              <a:rPr lang="en-US" altLang="ja-JP" sz="1600" dirty="0">
+                <a:solidFill>
+                  <a:schemeClr val="tx1"/>
+                </a:solidFill>
+                <a:latin typeface="+mj-ea"/>
+                <a:ea typeface="+mj-ea"/>
+              </a:rPr>
+              <a:t>B</a:t>
+            </a:r>
+            <a:endParaRPr kumimoji="1" lang="ja-JP" altLang="en-US" sz="1600" dirty="0">
+              <a:solidFill>
+                <a:schemeClr val="tx1"/>
+              </a:solidFill>
+              <a:latin typeface="+mj-ea"/>
+              <a:ea typeface="+mj-ea"/>
+            </a:endParaRPr>
+          </a:p>
+        </p:txBody>
+      </p:sp>
+      <p:sp>
+        <p:nvSpPr>
+          <p:cNvPr id="14" name="四角形: 角を丸くする 13">
+            <a:extLst>
+              <a:ext uri="{FF2B5EF4-FFF2-40B4-BE49-F238E27FC236}">
+                <a16:creationId xmlns:a16="http://schemas.microsoft.com/office/drawing/2014/main" id="{EEAC83C8-5B74-8016-7910-9CE9C0EBF37E}"/>
+              </a:ext>
+            </a:extLst>
+          </p:cNvPr>
+          <p:cNvSpPr/>
+          <p:nvPr/>
+        </p:nvSpPr>
+        <p:spPr>
+          <a:xfrm>
+            <a:off x="8276253" y="3554963"/>
+            <a:ext cx="2043405" cy="2519266"/>
+          </a:xfrm>
+          <a:prstGeom prst="roundRect">
+            <a:avLst/>
+          </a:prstGeom>
+        </p:spPr>
+        <p:style>
+          <a:lnRef idx="2">
+            <a:schemeClr val="accent2">
+              <a:shade val="15000"/>
+            </a:schemeClr>
+          </a:lnRef>
+          <a:fillRef idx="1">
+            <a:schemeClr val="accent2"/>
+          </a:fillRef>
+          <a:effectRef idx="0">
+            <a:schemeClr val="accent2"/>
+          </a:effectRef>
+          <a:fontRef idx="minor">
+            <a:schemeClr val="lt1"/>
+          </a:fontRef>
+        </p:style>
+        <p:txBody>
+          <a:bodyPr rtlCol="0" anchor="ctr"/>
+          <a:lstStyle/>
+          <a:p>
+            <a:pPr algn="ctr"/>
+            <a:endParaRPr kumimoji="1" lang="ja-JP" altLang="en-US"/>
+          </a:p>
+        </p:txBody>
+      </p:sp>
+      <p:sp>
+        <p:nvSpPr>
+          <p:cNvPr id="15" name="テキスト ボックス 14">
+            <a:extLst>
+              <a:ext uri="{FF2B5EF4-FFF2-40B4-BE49-F238E27FC236}">
+                <a16:creationId xmlns:a16="http://schemas.microsoft.com/office/drawing/2014/main" id="{21A8980B-CF63-FED5-D670-E55E1063EF39}"/>
+              </a:ext>
+            </a:extLst>
+          </p:cNvPr>
+          <p:cNvSpPr txBox="1"/>
+          <p:nvPr/>
+        </p:nvSpPr>
+        <p:spPr>
+          <a:xfrm>
+            <a:off x="8546841" y="3652474"/>
+            <a:ext cx="1408922" cy="369332"/>
+          </a:xfrm>
+          <a:prstGeom prst="rect">
+            <a:avLst/>
+          </a:prstGeom>
+          <a:noFill/>
+        </p:spPr>
+        <p:txBody>
+          <a:bodyPr wrap="square" rtlCol="0">
+            <a:spAutoFit/>
+          </a:bodyPr>
+          <a:lstStyle/>
+          <a:p>
+            <a:r>
+              <a:rPr lang="ja-JP" altLang="en-US" dirty="0">
+                <a:solidFill>
+                  <a:schemeClr val="bg1"/>
+                </a:solidFill>
+                <a:latin typeface="+mj-ea"/>
+                <a:ea typeface="+mj-ea"/>
+              </a:rPr>
+              <a:t>子</a:t>
+            </a:r>
+            <a:r>
+              <a:rPr kumimoji="1" lang="ja-JP" altLang="en-US" dirty="0">
+                <a:solidFill>
+                  <a:schemeClr val="bg1"/>
+                </a:solidFill>
+                <a:latin typeface="+mj-ea"/>
+                <a:ea typeface="+mj-ea"/>
+              </a:rPr>
+              <a:t>クラス</a:t>
+            </a:r>
+          </a:p>
+        </p:txBody>
+      </p:sp>
+      <p:sp>
+        <p:nvSpPr>
+          <p:cNvPr id="16" name="正方形/長方形 15">
+            <a:extLst>
+              <a:ext uri="{FF2B5EF4-FFF2-40B4-BE49-F238E27FC236}">
+                <a16:creationId xmlns:a16="http://schemas.microsoft.com/office/drawing/2014/main" id="{19212ED2-4FBD-5CD0-D6CC-A343600CC085}"/>
+              </a:ext>
+            </a:extLst>
+          </p:cNvPr>
+          <p:cNvSpPr/>
+          <p:nvPr/>
+        </p:nvSpPr>
+        <p:spPr>
+          <a:xfrm>
+            <a:off x="8546841" y="5016065"/>
+            <a:ext cx="2239347" cy="369332"/>
+          </a:xfrm>
+          <a:prstGeom prst="rect">
+            <a:avLst/>
+          </a:prstGeom>
+        </p:spPr>
+        <p:style>
+          <a:lnRef idx="1">
+            <a:schemeClr val="accent1"/>
+          </a:lnRef>
+          <a:fillRef idx="2">
+            <a:schemeClr val="accent1"/>
+          </a:fillRef>
+          <a:effectRef idx="1">
+            <a:schemeClr val="accent1"/>
+          </a:effectRef>
+          <a:fontRef idx="minor">
+            <a:schemeClr val="dk1"/>
+          </a:fontRef>
+        </p:style>
+        <p:txBody>
+          <a:bodyPr rtlCol="0" anchor="ctr"/>
+          <a:lstStyle/>
+          <a:p>
+            <a:pPr algn="ctr"/>
+            <a:r>
+              <a:rPr kumimoji="1" lang="ja-JP" altLang="en-US" sz="1600" dirty="0">
+                <a:solidFill>
+                  <a:schemeClr val="tx1"/>
+                </a:solidFill>
+                <a:latin typeface="+mj-ea"/>
+                <a:ea typeface="+mj-ea"/>
+              </a:rPr>
+              <a:t>メソッド </a:t>
+            </a:r>
+            <a:r>
+              <a:rPr kumimoji="1" lang="en-US" altLang="ja-JP" sz="1600" dirty="0">
+                <a:solidFill>
+                  <a:schemeClr val="tx1"/>
+                </a:solidFill>
+                <a:latin typeface="+mj-ea"/>
+                <a:ea typeface="+mj-ea"/>
+              </a:rPr>
+              <a:t>A</a:t>
+            </a:r>
+            <a:endParaRPr kumimoji="1" lang="ja-JP" altLang="en-US" sz="1600" dirty="0">
+              <a:solidFill>
+                <a:schemeClr val="tx1"/>
+              </a:solidFill>
+              <a:latin typeface="+mj-ea"/>
+              <a:ea typeface="+mj-ea"/>
+            </a:endParaRPr>
+          </a:p>
+        </p:txBody>
+      </p:sp>
+      <p:sp>
+        <p:nvSpPr>
+          <p:cNvPr id="17" name="正方形/長方形 16">
+            <a:extLst>
+              <a:ext uri="{FF2B5EF4-FFF2-40B4-BE49-F238E27FC236}">
+                <a16:creationId xmlns:a16="http://schemas.microsoft.com/office/drawing/2014/main" id="{350E2B48-2CD9-0BB9-7903-6DE25FF5BAF2}"/>
+              </a:ext>
+            </a:extLst>
+          </p:cNvPr>
+          <p:cNvSpPr/>
+          <p:nvPr/>
+        </p:nvSpPr>
+        <p:spPr>
+          <a:xfrm>
+            <a:off x="8546841" y="4034717"/>
+            <a:ext cx="2239347" cy="369332"/>
+          </a:xfrm>
+          <a:prstGeom prst="rect">
+            <a:avLst/>
+          </a:prstGeom>
+        </p:spPr>
+        <p:style>
+          <a:lnRef idx="1">
+            <a:schemeClr val="accent1"/>
+          </a:lnRef>
+          <a:fillRef idx="2">
+            <a:schemeClr val="accent1"/>
+          </a:fillRef>
+          <a:effectRef idx="1">
+            <a:schemeClr val="accent1"/>
+          </a:effectRef>
+          <a:fontRef idx="minor">
+            <a:schemeClr val="dk1"/>
+          </a:fontRef>
+        </p:style>
+        <p:txBody>
+          <a:bodyPr rtlCol="0" anchor="ctr"/>
+          <a:lstStyle/>
+          <a:p>
+            <a:pPr algn="ctr"/>
+            <a:r>
+              <a:rPr kumimoji="1" lang="ja-JP" altLang="en-US" sz="1600" dirty="0">
+                <a:solidFill>
+                  <a:schemeClr val="tx1"/>
+                </a:solidFill>
+                <a:latin typeface="+mj-ea"/>
+                <a:ea typeface="+mj-ea"/>
+              </a:rPr>
+              <a:t>メンバ </a:t>
+            </a:r>
+            <a:r>
+              <a:rPr lang="en-US" altLang="ja-JP" sz="1600" dirty="0">
+                <a:solidFill>
+                  <a:schemeClr val="tx1"/>
+                </a:solidFill>
+                <a:latin typeface="+mj-ea"/>
+                <a:ea typeface="+mj-ea"/>
+              </a:rPr>
+              <a:t>a</a:t>
+            </a:r>
+            <a:endParaRPr kumimoji="1" lang="ja-JP" altLang="en-US" sz="1600" dirty="0">
+              <a:solidFill>
+                <a:schemeClr val="tx1"/>
+              </a:solidFill>
+              <a:latin typeface="+mj-ea"/>
+              <a:ea typeface="+mj-ea"/>
+            </a:endParaRPr>
+          </a:p>
+        </p:txBody>
+      </p:sp>
+      <p:sp>
+        <p:nvSpPr>
+          <p:cNvPr id="18" name="正方形/長方形 17">
+            <a:extLst>
+              <a:ext uri="{FF2B5EF4-FFF2-40B4-BE49-F238E27FC236}">
+                <a16:creationId xmlns:a16="http://schemas.microsoft.com/office/drawing/2014/main" id="{06A3CE89-8ABC-67DD-04F7-CC0F82F829C9}"/>
+              </a:ext>
+            </a:extLst>
+          </p:cNvPr>
+          <p:cNvSpPr/>
+          <p:nvPr/>
+        </p:nvSpPr>
+        <p:spPr>
+          <a:xfrm>
+            <a:off x="8546841" y="4525391"/>
+            <a:ext cx="2239347" cy="369332"/>
+          </a:xfrm>
+          <a:prstGeom prst="rect">
+            <a:avLst/>
+          </a:prstGeom>
+          <a:ln/>
+        </p:spPr>
+        <p:style>
+          <a:lnRef idx="1">
+            <a:schemeClr val="accent2"/>
+          </a:lnRef>
+          <a:fillRef idx="2">
+            <a:schemeClr val="accent2"/>
+          </a:fillRef>
+          <a:effectRef idx="1">
+            <a:schemeClr val="accent2"/>
+          </a:effectRef>
+          <a:fontRef idx="minor">
+            <a:schemeClr val="dk1"/>
+          </a:fontRef>
+        </p:style>
+        <p:txBody>
+          <a:bodyPr rtlCol="0" anchor="ctr"/>
+          <a:lstStyle/>
+          <a:p>
+            <a:pPr algn="ctr"/>
+            <a:r>
+              <a:rPr kumimoji="1" lang="ja-JP" altLang="en-US" sz="1600" dirty="0">
+                <a:solidFill>
+                  <a:schemeClr val="tx1"/>
+                </a:solidFill>
+                <a:latin typeface="+mj-ea"/>
+                <a:ea typeface="+mj-ea"/>
+              </a:rPr>
+              <a:t>メンバ </a:t>
+            </a:r>
+            <a:r>
+              <a:rPr kumimoji="1" lang="en-US" altLang="ja-JP" sz="1600" dirty="0">
+                <a:solidFill>
+                  <a:schemeClr val="tx1"/>
+                </a:solidFill>
+                <a:latin typeface="+mj-ea"/>
+                <a:ea typeface="+mj-ea"/>
+              </a:rPr>
+              <a:t>b</a:t>
+            </a:r>
+            <a:endParaRPr kumimoji="1" lang="ja-JP" altLang="en-US" sz="1600" dirty="0">
+              <a:solidFill>
+                <a:schemeClr val="tx1"/>
+              </a:solidFill>
+              <a:latin typeface="+mj-ea"/>
+              <a:ea typeface="+mj-ea"/>
+            </a:endParaRPr>
+          </a:p>
+        </p:txBody>
+      </p:sp>
+      <p:sp>
+        <p:nvSpPr>
+          <p:cNvPr id="19" name="正方形/長方形 18">
+            <a:extLst>
+              <a:ext uri="{FF2B5EF4-FFF2-40B4-BE49-F238E27FC236}">
+                <a16:creationId xmlns:a16="http://schemas.microsoft.com/office/drawing/2014/main" id="{46C164AA-CBD8-C068-A9A2-5BEFD64D4272}"/>
+              </a:ext>
+            </a:extLst>
+          </p:cNvPr>
+          <p:cNvSpPr/>
+          <p:nvPr/>
+        </p:nvSpPr>
+        <p:spPr>
+          <a:xfrm>
+            <a:off x="8546841" y="5506739"/>
+            <a:ext cx="2239347" cy="369332"/>
+          </a:xfrm>
+          <a:prstGeom prst="rect">
+            <a:avLst/>
+          </a:prstGeom>
+          <a:ln/>
+        </p:spPr>
+        <p:style>
+          <a:lnRef idx="1">
+            <a:schemeClr val="accent2"/>
+          </a:lnRef>
+          <a:fillRef idx="2">
+            <a:schemeClr val="accent2"/>
+          </a:fillRef>
+          <a:effectRef idx="1">
+            <a:schemeClr val="accent2"/>
+          </a:effectRef>
+          <a:fontRef idx="minor">
+            <a:schemeClr val="dk1"/>
+          </a:fontRef>
+        </p:style>
+        <p:txBody>
+          <a:bodyPr rtlCol="0" anchor="ctr"/>
+          <a:lstStyle/>
+          <a:p>
+            <a:pPr algn="ctr"/>
+            <a:r>
+              <a:rPr kumimoji="1" lang="ja-JP" altLang="en-US" sz="1600" dirty="0">
+                <a:solidFill>
+                  <a:schemeClr val="tx1"/>
+                </a:solidFill>
+                <a:latin typeface="+mj-ea"/>
+                <a:ea typeface="+mj-ea"/>
+              </a:rPr>
+              <a:t>メソッド </a:t>
+            </a:r>
+            <a:r>
+              <a:rPr lang="en-US" altLang="ja-JP" sz="1600" dirty="0">
+                <a:solidFill>
+                  <a:schemeClr val="tx1"/>
+                </a:solidFill>
+                <a:latin typeface="+mj-ea"/>
+                <a:ea typeface="+mj-ea"/>
+              </a:rPr>
+              <a:t>B</a:t>
+            </a:r>
+            <a:endParaRPr kumimoji="1" lang="ja-JP" altLang="en-US" sz="1600" dirty="0">
+              <a:solidFill>
+                <a:schemeClr val="tx1"/>
+              </a:solidFill>
+              <a:latin typeface="+mj-ea"/>
+              <a:ea typeface="+mj-ea"/>
+            </a:endParaRPr>
+          </a:p>
+        </p:txBody>
+      </p:sp>
+      <p:cxnSp>
+        <p:nvCxnSpPr>
+          <p:cNvPr id="21" name="直線矢印コネクタ 20">
+            <a:extLst>
+              <a:ext uri="{FF2B5EF4-FFF2-40B4-BE49-F238E27FC236}">
+                <a16:creationId xmlns:a16="http://schemas.microsoft.com/office/drawing/2014/main" id="{C5A3910C-A7E8-9150-878A-7BD2326150DF}"/>
+              </a:ext>
+            </a:extLst>
+          </p:cNvPr>
+          <p:cNvCxnSpPr>
+            <a:cxnSpLocks/>
+          </p:cNvCxnSpPr>
+          <p:nvPr/>
+        </p:nvCxnSpPr>
+        <p:spPr>
+          <a:xfrm>
+            <a:off x="4114800" y="3816220"/>
+            <a:ext cx="4077478" cy="0"/>
+          </a:xfrm>
+          <a:prstGeom prst="straightConnector1">
+            <a:avLst/>
+          </a:prstGeom>
+          <a:ln w="57150" cap="flat" cmpd="sng" algn="ctr">
+            <a:solidFill>
+              <a:schemeClr val="accent1"/>
+            </a:solidFill>
+            <a:prstDash val="solid"/>
+            <a:round/>
+            <a:headEnd type="none" w="med" len="med"/>
+            <a:tailEnd type="arrow" w="med" len="med"/>
+          </a:ln>
+        </p:spPr>
+        <p:style>
+          <a:lnRef idx="0">
+            <a:scrgbClr r="0" g="0" b="0"/>
+          </a:lnRef>
+          <a:fillRef idx="0">
+            <a:scrgbClr r="0" g="0" b="0"/>
+          </a:fillRef>
+          <a:effectRef idx="0">
+            <a:scrgbClr r="0" g="0" b="0"/>
+          </a:effectRef>
+          <a:fontRef idx="minor">
+            <a:schemeClr val="tx1"/>
+          </a:fontRef>
+        </p:style>
+      </p:cxnSp>
+      <p:sp>
+        <p:nvSpPr>
+          <p:cNvPr id="22" name="テキスト ボックス 21">
+            <a:extLst>
+              <a:ext uri="{FF2B5EF4-FFF2-40B4-BE49-F238E27FC236}">
+                <a16:creationId xmlns:a16="http://schemas.microsoft.com/office/drawing/2014/main" id="{6CD9988A-BCB9-425A-20E4-E907CEB0ABDE}"/>
+              </a:ext>
+            </a:extLst>
+          </p:cNvPr>
+          <p:cNvSpPr txBox="1"/>
+          <p:nvPr/>
+        </p:nvSpPr>
+        <p:spPr>
+          <a:xfrm>
+            <a:off x="5080519" y="3314626"/>
+            <a:ext cx="2146041" cy="523220"/>
+          </a:xfrm>
+          <a:prstGeom prst="rect">
+            <a:avLst/>
+          </a:prstGeom>
+          <a:noFill/>
+        </p:spPr>
+        <p:txBody>
+          <a:bodyPr wrap="square" rtlCol="0">
+            <a:spAutoFit/>
+          </a:bodyPr>
+          <a:lstStyle/>
+          <a:p>
+            <a:pPr algn="ctr"/>
+            <a:r>
+              <a:rPr lang="ja-JP" altLang="en-US" sz="2800" dirty="0">
+                <a:solidFill>
+                  <a:schemeClr val="accent1"/>
+                </a:solidFill>
+              </a:rPr>
+              <a:t>継承</a:t>
+            </a:r>
+            <a:endParaRPr kumimoji="1" lang="ja-JP" altLang="en-US" sz="2800" dirty="0">
+              <a:solidFill>
+                <a:schemeClr val="accent1"/>
+              </a:solidFill>
+            </a:endParaRPr>
+          </a:p>
+        </p:txBody>
+      </p:sp>
+      <p:sp>
+        <p:nvSpPr>
+          <p:cNvPr id="23" name="正方形/長方形 22">
+            <a:extLst>
+              <a:ext uri="{FF2B5EF4-FFF2-40B4-BE49-F238E27FC236}">
+                <a16:creationId xmlns:a16="http://schemas.microsoft.com/office/drawing/2014/main" id="{FDF49C73-1AB4-B5BD-E076-3BEAE1AA85A7}"/>
+              </a:ext>
+            </a:extLst>
+          </p:cNvPr>
+          <p:cNvSpPr/>
+          <p:nvPr/>
+        </p:nvSpPr>
+        <p:spPr>
+          <a:xfrm>
+            <a:off x="5033866" y="4525391"/>
+            <a:ext cx="2239347" cy="369332"/>
+          </a:xfrm>
+          <a:prstGeom prst="rect">
+            <a:avLst/>
+          </a:prstGeom>
+          <a:ln/>
+        </p:spPr>
+        <p:style>
+          <a:lnRef idx="1">
+            <a:schemeClr val="accent2"/>
+          </a:lnRef>
+          <a:fillRef idx="2">
+            <a:schemeClr val="accent2"/>
+          </a:fillRef>
+          <a:effectRef idx="1">
+            <a:schemeClr val="accent2"/>
+          </a:effectRef>
+          <a:fontRef idx="minor">
+            <a:schemeClr val="dk1"/>
+          </a:fontRef>
+        </p:style>
+        <p:txBody>
+          <a:bodyPr rtlCol="0" anchor="ctr"/>
+          <a:lstStyle/>
+          <a:p>
+            <a:pPr algn="ctr"/>
+            <a:r>
+              <a:rPr kumimoji="1" lang="ja-JP" altLang="en-US" sz="1600" dirty="0">
+                <a:solidFill>
+                  <a:schemeClr val="tx1"/>
+                </a:solidFill>
+                <a:latin typeface="+mj-ea"/>
+                <a:ea typeface="+mj-ea"/>
+              </a:rPr>
+              <a:t>メンバ </a:t>
+            </a:r>
+            <a:r>
+              <a:rPr kumimoji="1" lang="en-US" altLang="ja-JP" sz="1600" dirty="0">
+                <a:solidFill>
+                  <a:schemeClr val="tx1"/>
+                </a:solidFill>
+                <a:latin typeface="+mj-ea"/>
+                <a:ea typeface="+mj-ea"/>
+              </a:rPr>
+              <a:t>b</a:t>
+            </a:r>
+            <a:endParaRPr kumimoji="1" lang="ja-JP" altLang="en-US" sz="1600" dirty="0">
+              <a:solidFill>
+                <a:schemeClr val="tx1"/>
+              </a:solidFill>
+              <a:latin typeface="+mj-ea"/>
+              <a:ea typeface="+mj-ea"/>
+            </a:endParaRPr>
+          </a:p>
+        </p:txBody>
+      </p:sp>
+      <p:sp>
+        <p:nvSpPr>
+          <p:cNvPr id="24" name="正方形/長方形 23">
+            <a:extLst>
+              <a:ext uri="{FF2B5EF4-FFF2-40B4-BE49-F238E27FC236}">
+                <a16:creationId xmlns:a16="http://schemas.microsoft.com/office/drawing/2014/main" id="{046E0702-1521-8C48-FD54-E79BDBA52B37}"/>
+              </a:ext>
+            </a:extLst>
+          </p:cNvPr>
+          <p:cNvSpPr/>
+          <p:nvPr/>
+        </p:nvSpPr>
+        <p:spPr>
+          <a:xfrm>
+            <a:off x="5033866" y="5506739"/>
+            <a:ext cx="2239347" cy="369332"/>
+          </a:xfrm>
+          <a:prstGeom prst="rect">
+            <a:avLst/>
+          </a:prstGeom>
+          <a:ln/>
+        </p:spPr>
+        <p:style>
+          <a:lnRef idx="1">
+            <a:schemeClr val="accent2"/>
+          </a:lnRef>
+          <a:fillRef idx="2">
+            <a:schemeClr val="accent2"/>
+          </a:fillRef>
+          <a:effectRef idx="1">
+            <a:schemeClr val="accent2"/>
+          </a:effectRef>
+          <a:fontRef idx="minor">
+            <a:schemeClr val="dk1"/>
+          </a:fontRef>
+        </p:style>
+        <p:txBody>
+          <a:bodyPr rtlCol="0" anchor="ctr"/>
+          <a:lstStyle/>
+          <a:p>
+            <a:pPr algn="ctr"/>
+            <a:r>
+              <a:rPr kumimoji="1" lang="ja-JP" altLang="en-US" sz="1600" dirty="0">
+                <a:solidFill>
+                  <a:schemeClr val="tx1"/>
+                </a:solidFill>
+                <a:latin typeface="+mj-ea"/>
+                <a:ea typeface="+mj-ea"/>
+              </a:rPr>
+              <a:t>メソッド </a:t>
+            </a:r>
+            <a:r>
+              <a:rPr lang="en-US" altLang="ja-JP" sz="1600" dirty="0">
+                <a:solidFill>
+                  <a:schemeClr val="tx1"/>
+                </a:solidFill>
+                <a:latin typeface="+mj-ea"/>
+                <a:ea typeface="+mj-ea"/>
+              </a:rPr>
+              <a:t>B</a:t>
+            </a:r>
+            <a:endParaRPr kumimoji="1" lang="ja-JP" altLang="en-US" sz="1600" dirty="0">
+              <a:solidFill>
+                <a:schemeClr val="tx1"/>
+              </a:solidFill>
+              <a:latin typeface="+mj-ea"/>
+              <a:ea typeface="+mj-ea"/>
+            </a:endParaRPr>
+          </a:p>
+        </p:txBody>
+      </p:sp>
+      <p:sp>
+        <p:nvSpPr>
+          <p:cNvPr id="25" name="テキスト ボックス 24">
+            <a:extLst>
+              <a:ext uri="{FF2B5EF4-FFF2-40B4-BE49-F238E27FC236}">
+                <a16:creationId xmlns:a16="http://schemas.microsoft.com/office/drawing/2014/main" id="{D10C3ADA-72AE-B901-23B7-666D2FC00BEB}"/>
+              </a:ext>
+            </a:extLst>
+          </p:cNvPr>
+          <p:cNvSpPr txBox="1"/>
+          <p:nvPr/>
+        </p:nvSpPr>
+        <p:spPr>
+          <a:xfrm>
+            <a:off x="5080519" y="4146906"/>
+            <a:ext cx="2146041" cy="400110"/>
+          </a:xfrm>
+          <a:prstGeom prst="rect">
+            <a:avLst/>
+          </a:prstGeom>
+          <a:noFill/>
+        </p:spPr>
+        <p:txBody>
+          <a:bodyPr wrap="square" rtlCol="0">
+            <a:spAutoFit/>
+          </a:bodyPr>
+          <a:lstStyle/>
+          <a:p>
+            <a:pPr algn="ctr"/>
+            <a:r>
+              <a:rPr kumimoji="1" lang="ja-JP" altLang="en-US" sz="2000" dirty="0">
+                <a:solidFill>
+                  <a:schemeClr val="accent2"/>
+                </a:solidFill>
+              </a:rPr>
+              <a:t>オーバーライド</a:t>
+            </a:r>
+          </a:p>
+        </p:txBody>
+      </p:sp>
+      <p:sp>
+        <p:nvSpPr>
+          <p:cNvPr id="27" name="テキスト ボックス 26">
+            <a:extLst>
+              <a:ext uri="{FF2B5EF4-FFF2-40B4-BE49-F238E27FC236}">
+                <a16:creationId xmlns:a16="http://schemas.microsoft.com/office/drawing/2014/main" id="{C26E2CE5-36A0-7169-AFD7-735FAE7AF3BD}"/>
+              </a:ext>
+            </a:extLst>
+          </p:cNvPr>
+          <p:cNvSpPr txBox="1"/>
+          <p:nvPr/>
+        </p:nvSpPr>
+        <p:spPr>
+          <a:xfrm>
+            <a:off x="5033866" y="5029348"/>
+            <a:ext cx="2429848" cy="369332"/>
+          </a:xfrm>
+          <a:prstGeom prst="rect">
+            <a:avLst/>
+          </a:prstGeom>
+          <a:noFill/>
+        </p:spPr>
+        <p:txBody>
+          <a:bodyPr wrap="square" rtlCol="0">
+            <a:spAutoFit/>
+          </a:bodyPr>
+          <a:lstStyle/>
+          <a:p>
+            <a:pPr algn="ctr"/>
+            <a:r>
+              <a:rPr kumimoji="1" lang="ja-JP" altLang="en-US" dirty="0"/>
+              <a:t>差分だけ実装</a:t>
+            </a:r>
+          </a:p>
+        </p:txBody>
+      </p:sp>
+    </p:spTree>
+    <p:extLst>
+      <p:ext uri="{BB962C8B-B14F-4D97-AF65-F5344CB8AC3E}">
+        <p14:creationId xmlns:p14="http://schemas.microsoft.com/office/powerpoint/2010/main" val="1317166672"/>
+      </p:ext>
+    </p:extLst>
+  </p:cSld>
+  <p:clrMapOvr>
+    <a:masterClrMapping/>
+  </p:clrMapOvr>
+  <mc:AlternateContent xmlns:mc="http://schemas.openxmlformats.org/markup-compatibility/2006" xmlns:p14="http://schemas.microsoft.com/office/powerpoint/2010/main">
+    <mc:Choice Requires="p14">
+      <p:transition spd="med" p14:dur="700">
+        <p:fade/>
+      </p:transition>
+    </mc:Choice>
+    <mc:Fallback xmlns="">
+      <p:transition spd="med">
+        <p:fade/>
+      </p:transition>
+    </mc:Fallback>
+  </mc:AlternateContent>
+</p:sld>
+</file>
+
+<file path=ppt/slides/slide9.xml><?xml version="1.0" encoding="utf-8"?>
+<p:sld xmlns:a="http://schemas.openxmlformats.org/drawingml/2006/main" xmlns:r="http://schemas.openxmlformats.org/officeDocument/2006/relationships" xmlns:p="http://schemas.openxmlformats.org/presentationml/2006/main">
+  <p:cSld>
+    <p:spTree>
+      <p:nvGrpSpPr>
+        <p:cNvPr id="1" name=""/>
+        <p:cNvGrpSpPr/>
+        <p:nvPr/>
+      </p:nvGrpSpPr>
+      <p:grpSpPr>
+        <a:xfrm>
+          <a:off x="0" y="0"/>
+          <a:ext cx="0" cy="0"/>
+          <a:chOff x="0" y="0"/>
+          <a:chExt cx="0" cy="0"/>
+        </a:xfrm>
+      </p:grpSpPr>
+      <p:sp>
+        <p:nvSpPr>
+          <p:cNvPr id="2" name="フッター プレースホルダー 1">
+            <a:extLst>
+              <a:ext uri="{FF2B5EF4-FFF2-40B4-BE49-F238E27FC236}">
+                <a16:creationId xmlns:a16="http://schemas.microsoft.com/office/drawing/2014/main" id="{7FC4F550-F4FB-84B5-4053-FF0E87EE0B8A}"/>
+              </a:ext>
+            </a:extLst>
+          </p:cNvPr>
+          <p:cNvSpPr>
+            <a:spLocks noGrp="1"/>
+          </p:cNvSpPr>
+          <p:nvPr>
+            <p:ph type="ftr" sz="quarter" idx="11"/>
+          </p:nvPr>
+        </p:nvSpPr>
+        <p:spPr/>
+        <p:txBody>
+          <a:bodyPr/>
+          <a:lstStyle/>
+          <a:p>
+            <a:r>
+              <a:rPr kumimoji="1" lang="ja-JP" altLang="en-US"/>
+              <a:t>情報科学ｃ</a:t>
+            </a:r>
+            <a:endParaRPr kumimoji="1" lang="ja-JP" altLang="en-US" dirty="0"/>
+          </a:p>
+        </p:txBody>
+      </p:sp>
+      <p:sp>
+        <p:nvSpPr>
+          <p:cNvPr id="3" name="タイトル 2">
+            <a:extLst>
+              <a:ext uri="{FF2B5EF4-FFF2-40B4-BE49-F238E27FC236}">
+                <a16:creationId xmlns:a16="http://schemas.microsoft.com/office/drawing/2014/main" id="{FACF38EA-1D1C-A17C-DB93-279A58531455}"/>
+              </a:ext>
+            </a:extLst>
+          </p:cNvPr>
+          <p:cNvSpPr>
+            <a:spLocks noGrp="1"/>
+          </p:cNvSpPr>
+          <p:nvPr>
+            <p:ph type="title"/>
+          </p:nvPr>
+        </p:nvSpPr>
+        <p:spPr/>
+        <p:txBody>
+          <a:bodyPr/>
+          <a:lstStyle/>
+          <a:p>
+            <a:r>
+              <a:rPr kumimoji="1" lang="ja-JP" altLang="en-US" dirty="0"/>
+              <a:t>似顔絵描画クラス</a:t>
+            </a:r>
+          </a:p>
+        </p:txBody>
+      </p:sp>
+      <p:sp>
+        <p:nvSpPr>
+          <p:cNvPr id="4" name="コンテンツ プレースホルダー 3">
+            <a:extLst>
+              <a:ext uri="{FF2B5EF4-FFF2-40B4-BE49-F238E27FC236}">
+                <a16:creationId xmlns:a16="http://schemas.microsoft.com/office/drawing/2014/main" id="{F19CCA7A-8EB6-AF54-0FCA-992547F2C4CD}"/>
+              </a:ext>
+            </a:extLst>
+          </p:cNvPr>
+          <p:cNvSpPr>
+            <a:spLocks noGrp="1"/>
+          </p:cNvSpPr>
+          <p:nvPr>
+            <p:ph idx="1"/>
+          </p:nvPr>
+        </p:nvSpPr>
+        <p:spPr>
+          <a:xfrm>
+            <a:off x="1355269" y="1825624"/>
+            <a:ext cx="10280003" cy="4752457"/>
           </a:xfrm>
         </p:spPr>
         <p:txBody>
@@ -8360,29 +12210,332 @@
           <a:lstStyle/>
           <a:p>
             <a:r>
-              <a:rPr kumimoji="1" lang="ja-JP" altLang="en-US" sz="2800" dirty="0"/>
-              <a:t>予習テキスト</a:t>
+              <a:rPr kumimoji="1" lang="ja-JP" altLang="en-US" dirty="0"/>
+              <a:t>この講義の為に作った似顔絵描画クラス</a:t>
+            </a:r>
+            <a:r>
+              <a:rPr kumimoji="1" lang="en-US" altLang="ja-JP" dirty="0" err="1"/>
+              <a:t>SelfPortrait</a:t>
+            </a:r>
+            <a:endParaRPr kumimoji="1" lang="en-US" altLang="ja-JP" dirty="0"/>
+          </a:p>
+          <a:p>
+            <a:pPr lvl="1"/>
+            <a:r>
+              <a:rPr lang="en-US" altLang="ja-JP" dirty="0"/>
+              <a:t>GitHub</a:t>
             </a:r>
             <a:r>
               <a:rPr lang="ja-JP" altLang="en-US" dirty="0"/>
-              <a:t>兼</a:t>
+              <a:t>上にあるので以下のコマンドで</a:t>
+            </a:r>
+            <a:r>
+              <a:rPr lang="en-US" altLang="ja-JP" dirty="0" err="1"/>
+              <a:t>Colab</a:t>
+            </a:r>
+            <a:r>
+              <a:rPr lang="ja-JP" altLang="en-US" dirty="0"/>
+              <a:t>にインストールできます</a:t>
+            </a:r>
+            <a:endParaRPr lang="en-US" altLang="ja-JP" dirty="0"/>
+          </a:p>
+          <a:p>
+            <a:pPr lvl="1"/>
+            <a:endParaRPr lang="en-US" altLang="ja-JP" dirty="0"/>
+          </a:p>
+          <a:p>
+            <a:pPr lvl="1"/>
+            <a:endParaRPr lang="en-US" altLang="ja-JP" dirty="0"/>
+          </a:p>
+          <a:p>
+            <a:pPr marL="457200" lvl="1" indent="0">
+              <a:buNone/>
+            </a:pPr>
+            <a:endParaRPr lang="en-US" altLang="ja-JP" dirty="0"/>
+          </a:p>
+          <a:p>
+            <a:r>
+              <a:rPr lang="ja-JP" altLang="en-US" dirty="0"/>
+              <a:t>インストールしたクラスは</a:t>
             </a:r>
             <a:r>
               <a:rPr lang="en-US" altLang="ja-JP" dirty="0"/>
-              <a:t>16</a:t>
+              <a:t>from</a:t>
             </a:r>
             <a:r>
               <a:rPr lang="ja-JP" altLang="en-US" dirty="0"/>
-              <a:t>本ノック</a:t>
-            </a:r>
-            <a:r>
-              <a:rPr kumimoji="1" lang="ja-JP" altLang="en-US" sz="2800" dirty="0"/>
-              <a:t>をやる</a:t>
-            </a:r>
-            <a:endParaRPr kumimoji="1" lang="en-US" altLang="ja-JP" sz="2800" dirty="0"/>
+              <a:t>～</a:t>
+            </a:r>
+            <a:r>
+              <a:rPr lang="en-US" altLang="ja-JP" dirty="0"/>
+              <a:t>import</a:t>
+            </a:r>
+            <a:r>
+              <a:rPr lang="ja-JP" altLang="en-US" dirty="0"/>
+              <a:t>文で取り込みます</a:t>
+            </a:r>
+            <a:endParaRPr lang="en-US" altLang="ja-JP" dirty="0"/>
+          </a:p>
+          <a:p>
+            <a:endParaRPr lang="en-US" altLang="ja-JP" dirty="0"/>
+          </a:p>
+          <a:p>
+            <a:endParaRPr lang="en-US" altLang="ja-JP" dirty="0"/>
+          </a:p>
+          <a:p>
+            <a:r>
+              <a:rPr lang="ja-JP" altLang="en-US" dirty="0"/>
+              <a:t>ここまですればコード内で</a:t>
+            </a:r>
+            <a:r>
+              <a:rPr lang="en-US" altLang="ja-JP" dirty="0" err="1"/>
+              <a:t>SelfPortrait</a:t>
+            </a:r>
+            <a:r>
+              <a:rPr lang="ja-JP" altLang="en-US" dirty="0"/>
+              <a:t>クラスを使えます</a:t>
+            </a:r>
+            <a:endParaRPr lang="en-US" altLang="ja-JP" dirty="0"/>
           </a:p>
           <a:p>
             <a:pPr lvl="1"/>
+            <a:endParaRPr kumimoji="1" lang="en-US" altLang="ja-JP" dirty="0"/>
+          </a:p>
+        </p:txBody>
+      </p:sp>
+      <p:sp>
+        <p:nvSpPr>
+          <p:cNvPr id="5" name="日付プレースホルダー 4">
+            <a:extLst>
+              <a:ext uri="{FF2B5EF4-FFF2-40B4-BE49-F238E27FC236}">
+                <a16:creationId xmlns:a16="http://schemas.microsoft.com/office/drawing/2014/main" id="{17F631A7-18C9-F5DB-79B3-E4F0E3F96AAF}"/>
+              </a:ext>
+            </a:extLst>
+          </p:cNvPr>
+          <p:cNvSpPr>
+            <a:spLocks noGrp="1"/>
+          </p:cNvSpPr>
+          <p:nvPr>
+            <p:ph type="dt" sz="half" idx="10"/>
+          </p:nvPr>
+        </p:nvSpPr>
+        <p:spPr/>
+        <p:txBody>
+          <a:bodyPr/>
+          <a:lstStyle/>
+          <a:p>
+            <a:r>
+              <a:rPr kumimoji="1" lang="en-US" altLang="ja-JP"/>
+              <a:t>Day4</a:t>
+            </a:r>
+            <a:endParaRPr kumimoji="1" lang="ja-JP" altLang="en-US"/>
+          </a:p>
+        </p:txBody>
+      </p:sp>
+      <p:sp>
+        <p:nvSpPr>
+          <p:cNvPr id="6" name="スライド番号プレースホルダー 5">
+            <a:extLst>
+              <a:ext uri="{FF2B5EF4-FFF2-40B4-BE49-F238E27FC236}">
+                <a16:creationId xmlns:a16="http://schemas.microsoft.com/office/drawing/2014/main" id="{6ABBF0CA-2666-0C2F-6245-AB2387D455A7}"/>
+              </a:ext>
+            </a:extLst>
+          </p:cNvPr>
+          <p:cNvSpPr>
+            <a:spLocks noGrp="1"/>
+          </p:cNvSpPr>
+          <p:nvPr>
+            <p:ph type="sldNum" sz="quarter" idx="12"/>
+          </p:nvPr>
+        </p:nvSpPr>
+        <p:spPr/>
+        <p:txBody>
+          <a:bodyPr/>
+          <a:lstStyle/>
+          <a:p>
+            <a:fld id="{B4DA0251-0B3B-4C1C-96DC-5D2833458AB2}" type="slidenum">
+              <a:rPr kumimoji="1" lang="ja-JP" altLang="en-US" smtClean="0"/>
+              <a:t>9</a:t>
+            </a:fld>
+            <a:endParaRPr kumimoji="1" lang="ja-JP" altLang="en-US"/>
+          </a:p>
+        </p:txBody>
+      </p:sp>
+      <p:sp>
+        <p:nvSpPr>
+          <p:cNvPr id="7" name="テキスト ボックス 6">
+            <a:extLst>
+              <a:ext uri="{FF2B5EF4-FFF2-40B4-BE49-F238E27FC236}">
+                <a16:creationId xmlns:a16="http://schemas.microsoft.com/office/drawing/2014/main" id="{C0A6A24A-9B0F-D09E-510B-A27B4F3A129F}"/>
+              </a:ext>
+            </a:extLst>
+          </p:cNvPr>
+          <p:cNvSpPr txBox="1"/>
+          <p:nvPr/>
+        </p:nvSpPr>
+        <p:spPr>
+          <a:xfrm>
+            <a:off x="1483567" y="2726858"/>
+            <a:ext cx="9870232" cy="369332"/>
+          </a:xfrm>
+          <a:prstGeom prst="rect">
+            <a:avLst/>
+          </a:prstGeom>
+          <a:solidFill>
+            <a:schemeClr val="tx1">
+              <a:lumMod val="20000"/>
+              <a:lumOff val="80000"/>
+            </a:schemeClr>
+          </a:solidFill>
+        </p:spPr>
+        <p:txBody>
+          <a:bodyPr wrap="square" rtlCol="0">
+            <a:spAutoFit/>
+          </a:bodyPr>
+          <a:lstStyle/>
+          <a:p>
+            <a:pPr>
+              <a:buNone/>
+            </a:pPr>
+            <a:r>
+              <a:rPr lang="en-US" altLang="ja-JP" b="0" dirty="0">
+                <a:solidFill>
+                  <a:srgbClr val="0000FF"/>
+                </a:solidFill>
+                <a:effectLst/>
+                <a:latin typeface="Courier New" panose="02070309020205020404" pitchFamily="49" charset="0"/>
+              </a:rPr>
+              <a:t>!</a:t>
+            </a:r>
+            <a:r>
+              <a:rPr lang="en-US" altLang="ja-JP" b="0" dirty="0">
+                <a:solidFill>
+                  <a:srgbClr val="000000"/>
+                </a:solidFill>
+                <a:effectLst/>
+                <a:latin typeface="Courier New" panose="02070309020205020404" pitchFamily="49" charset="0"/>
+              </a:rPr>
+              <a:t>pip install </a:t>
+            </a:r>
+            <a:r>
+              <a:rPr lang="en-US" altLang="ja-JP" b="0" dirty="0">
+                <a:solidFill>
+                  <a:srgbClr val="A31515"/>
+                </a:solidFill>
+                <a:effectLst/>
+                <a:latin typeface="Courier New" panose="02070309020205020404" pitchFamily="49" charset="0"/>
+              </a:rPr>
+              <a:t>“</a:t>
+            </a:r>
+            <a:r>
+              <a:rPr lang="en-US" altLang="ja-JP" b="0" dirty="0" err="1">
+                <a:solidFill>
+                  <a:srgbClr val="A31515"/>
+                </a:solidFill>
+                <a:effectLst/>
+                <a:latin typeface="Courier New" panose="02070309020205020404" pitchFamily="49" charset="0"/>
+              </a:rPr>
+              <a:t>git+https</a:t>
+            </a:r>
+            <a:r>
+              <a:rPr lang="en-US" altLang="ja-JP" b="0" dirty="0">
+                <a:solidFill>
+                  <a:srgbClr val="A31515"/>
+                </a:solidFill>
+                <a:effectLst/>
+                <a:latin typeface="Courier New" panose="02070309020205020404" pitchFamily="49" charset="0"/>
+              </a:rPr>
+              <a:t>://github.com/</a:t>
+            </a:r>
+            <a:r>
+              <a:rPr lang="en-US" altLang="ja-JP" b="0" dirty="0" err="1">
+                <a:solidFill>
+                  <a:srgbClr val="A31515"/>
+                </a:solidFill>
+                <a:effectLst/>
+                <a:latin typeface="Courier New" panose="02070309020205020404" pitchFamily="49" charset="0"/>
+              </a:rPr>
+              <a:t>YokoyamaLab</a:t>
+            </a:r>
+            <a:r>
+              <a:rPr lang="en-US" altLang="ja-JP" b="0" dirty="0">
+                <a:solidFill>
+                  <a:srgbClr val="A31515"/>
+                </a:solidFill>
+                <a:effectLst/>
+                <a:latin typeface="Courier New" panose="02070309020205020404" pitchFamily="49" charset="0"/>
+              </a:rPr>
+              <a:t>/</a:t>
+            </a:r>
+            <a:r>
+              <a:rPr lang="en-US" altLang="ja-JP" b="0" dirty="0" err="1">
+                <a:solidFill>
+                  <a:srgbClr val="A31515"/>
+                </a:solidFill>
+                <a:effectLst/>
+                <a:latin typeface="Courier New" panose="02070309020205020404" pitchFamily="49" charset="0"/>
+              </a:rPr>
+              <a:t>PythonBasics.git</a:t>
+            </a:r>
+            <a:r>
+              <a:rPr lang="ja-JP" altLang="en-US" b="0" dirty="0">
+                <a:solidFill>
+                  <a:srgbClr val="A31515"/>
+                </a:solidFill>
+                <a:effectLst/>
+                <a:latin typeface="Courier New" panose="02070309020205020404" pitchFamily="49" charset="0"/>
+              </a:rPr>
+              <a:t>後略</a:t>
+            </a:r>
+            <a:r>
+              <a:rPr lang="en-US" altLang="ja-JP" b="0" dirty="0">
+                <a:solidFill>
+                  <a:srgbClr val="A31515"/>
+                </a:solidFill>
+                <a:effectLst/>
+                <a:latin typeface="Courier New" panose="02070309020205020404" pitchFamily="49" charset="0"/>
+              </a:rPr>
+              <a:t>"</a:t>
+            </a:r>
+            <a:endParaRPr lang="en-US" altLang="ja-JP" b="0" dirty="0">
+              <a:solidFill>
+                <a:srgbClr val="000000"/>
+              </a:solidFill>
+              <a:effectLst/>
+              <a:latin typeface="Courier New" panose="02070309020205020404" pitchFamily="49" charset="0"/>
+            </a:endParaRPr>
+          </a:p>
+        </p:txBody>
+      </p:sp>
+      <p:sp>
+        <p:nvSpPr>
+          <p:cNvPr id="9" name="テキスト ボックス 8">
+            <a:extLst>
+              <a:ext uri="{FF2B5EF4-FFF2-40B4-BE49-F238E27FC236}">
+                <a16:creationId xmlns:a16="http://schemas.microsoft.com/office/drawing/2014/main" id="{71BD3B2D-0A99-37E3-B7A5-7318C15C1198}"/>
+              </a:ext>
+            </a:extLst>
+          </p:cNvPr>
+          <p:cNvSpPr txBox="1"/>
+          <p:nvPr/>
+        </p:nvSpPr>
+        <p:spPr>
+          <a:xfrm>
+            <a:off x="5819969" y="45522"/>
+            <a:ext cx="6246844" cy="369332"/>
+          </a:xfrm>
+          <a:prstGeom prst="rect">
+            <a:avLst/>
+          </a:prstGeom>
+          <a:noFill/>
+        </p:spPr>
+        <p:txBody>
+          <a:bodyPr wrap="square">
+            <a:spAutoFit/>
+          </a:bodyPr>
+          <a:lstStyle/>
+          <a:p>
+            <a:pPr algn="r"/>
             <a:r>
               <a:rPr kumimoji="1" lang="en-US" altLang="ja-JP" dirty="0"/>
               <a:t>[</a:t>
@@ -8394,19 +12547,13 @@
                 </a:solidFill>
                 <a:latin typeface="+mj-lt"/>
               </a:rPr>
-              <a:t>14</a:t>
+              <a:t>13</a:t>
             </a:r>
             <a:r>
               <a:rPr kumimoji="1" lang="en-US" altLang="ja-JP" dirty="0">
                 <a:latin typeface="+mj-lt"/>
               </a:rPr>
-              <a:t>-day04</a:t>
-            </a:r>
-            <a:r>
-              <a:rPr lang="en-US" altLang="ja-JP" dirty="0">
-                <a:latin typeface="+mj-lt"/>
-              </a:rPr>
-              <a:t>hw</a:t>
+              <a:t>-day04tb</a:t>
             </a:r>
             <a:r>
               <a:rPr kumimoji="1" lang="en-US" altLang="ja-JP" dirty="0"/>
@@ -8416,193 +12563,16 @@
               <a:rPr kumimoji="1" lang="ja-JP" altLang="en-US" dirty="0"/>
               <a:t>　</a:t>
             </a:r>
-            <a:r>
-              <a:rPr kumimoji="1" lang="en-US" altLang="ja-JP" dirty="0"/>
-              <a:t>NumPy</a:t>
-            </a:r>
-            <a:r>
-              <a:rPr lang="en-US" altLang="ja-JP" dirty="0"/>
-              <a:t>16</a:t>
-            </a:r>
-            <a:r>
-              <a:rPr lang="ja-JP" altLang="en-US" dirty="0"/>
-              <a:t>本ノック</a:t>
-            </a:r>
-            <a:endParaRPr kumimoji="1" lang="en-US" altLang="ja-JP" dirty="0"/>
-          </a:p>
-          <a:p>
-            <a:pPr lvl="1"/>
-            <a:r>
-              <a:rPr kumimoji="1" lang="en-US" altLang="ja-JP" dirty="0"/>
-              <a:t>[</a:t>
-            </a:r>
-            <a:r>
-              <a:rPr kumimoji="1" lang="en-US" altLang="ja-JP" dirty="0">
-                <a:solidFill>
-                  <a:schemeClr val="accent1"/>
-                </a:solidFill>
-                <a:latin typeface="+mj-lt"/>
-              </a:rPr>
-              <a:t>15</a:t>
-            </a:r>
-            <a:r>
-              <a:rPr kumimoji="1" lang="en-US" altLang="ja-JP" dirty="0">
-                <a:latin typeface="+mj-lt"/>
-              </a:rPr>
-              <a:t>-day04</a:t>
-            </a:r>
-            <a:r>
-              <a:rPr lang="en-US" altLang="ja-JP" dirty="0">
-                <a:latin typeface="+mj-lt"/>
-              </a:rPr>
-              <a:t>hw</a:t>
-            </a:r>
-            <a:r>
-              <a:rPr kumimoji="1" lang="en-US" altLang="ja-JP" dirty="0"/>
-              <a:t>]</a:t>
-            </a:r>
-            <a:r>
-              <a:rPr kumimoji="1" lang="ja-JP" altLang="en-US" dirty="0"/>
-              <a:t>　</a:t>
-            </a:r>
-            <a:r>
-              <a:rPr kumimoji="1" lang="en-US" altLang="ja-JP" dirty="0">
-                <a:latin typeface="system-ui"/>
-              </a:rPr>
-              <a:t>Pandas16</a:t>
-            </a:r>
-            <a:r>
-              <a:rPr kumimoji="1" lang="ja-JP" altLang="en-US" dirty="0">
-                <a:latin typeface="system-ui"/>
-              </a:rPr>
-              <a:t>本ノック</a:t>
-            </a:r>
-          </a:p>
-          <a:p>
-            <a:pPr lvl="1"/>
-            <a:r>
-              <a:rPr kumimoji="1" lang="ja-JP" altLang="en-US" dirty="0"/>
-              <a:t>今回は知識確認問題を兼ねています</a:t>
-            </a:r>
-          </a:p>
-          <a:p>
-            <a:pPr lvl="1"/>
-            <a:r>
-              <a:rPr lang="ja-JP" altLang="en-US" dirty="0"/>
-              <a:t>期限：火曜日</a:t>
-            </a:r>
-            <a:r>
-              <a:rPr lang="en-US" altLang="ja-JP" dirty="0"/>
-              <a:t>23:59</a:t>
-            </a:r>
             <a:endParaRPr lang="ja-JP" altLang="en-US" dirty="0"/>
           </a:p>
-          <a:p>
-            <a:pPr lvl="1"/>
-            <a:endParaRPr kumimoji="1" lang="ja-JP" altLang="en-US" dirty="0"/>
-          </a:p>
-          <a:p>
-            <a:r>
-              <a:rPr lang="en-US" altLang="ja-JP" dirty="0"/>
-              <a:t>Google</a:t>
-            </a:r>
-            <a:r>
-              <a:rPr lang="ja-JP" altLang="en-US" dirty="0"/>
-              <a:t> </a:t>
-            </a:r>
-            <a:r>
-              <a:rPr lang="en-US" altLang="ja-JP" dirty="0"/>
-              <a:t>Classroom</a:t>
-            </a:r>
-            <a:r>
-              <a:rPr lang="ja-JP" altLang="en-US" dirty="0"/>
-              <a:t>を通じて配布します。</a:t>
-            </a:r>
-          </a:p>
-          <a:p>
-            <a:r>
-              <a:rPr kumimoji="1" lang="ja-JP" altLang="en-US" dirty="0"/>
-              <a:t>宿題の提出も</a:t>
-            </a:r>
-            <a:r>
-              <a:rPr kumimoji="1" lang="en-US" altLang="ja-JP" dirty="0"/>
-              <a:t>Google Classroom</a:t>
-            </a:r>
-            <a:r>
-              <a:rPr kumimoji="1" lang="ja-JP" altLang="en-US" dirty="0"/>
-              <a:t>に行ってください。</a:t>
-            </a:r>
-          </a:p>
-          <a:p>
-            <a:pPr lvl="1"/>
-            <a:endParaRPr kumimoji="1" lang="ja-JP" altLang="en-US" dirty="0"/>
-          </a:p>
-        </p:txBody>
-      </p:sp>
-      <p:sp>
-        <p:nvSpPr>
-          <p:cNvPr id="5" name="日付プレースホルダー 4">
-            <a:extLst>
-              <a:ext uri="{FF2B5EF4-FFF2-40B4-BE49-F238E27FC236}">
-                <a16:creationId xmlns:a16="http://schemas.microsoft.com/office/drawing/2014/main" id="{EC1D3F51-F7C8-B336-586B-E580A5CE0563}"/>
-              </a:ext>
-            </a:extLst>
-          </p:cNvPr>
-          <p:cNvSpPr>
-            <a:spLocks noGrp="1"/>
-          </p:cNvSpPr>
-          <p:nvPr>
-            <p:ph type="dt" sz="half" idx="10"/>
-          </p:nvPr>
-        </p:nvSpPr>
-        <p:spPr/>
-        <p:txBody>
-          <a:bodyPr/>
-          <a:lstStyle/>
-          <a:p>
-            <a:r>
-              <a:rPr kumimoji="1" lang="en-US" altLang="ja-JP"/>
-              <a:t>Day4</a:t>
-            </a:r>
-            <a:endParaRPr kumimoji="1" lang="ja-JP" altLang="en-US"/>
-          </a:p>
-        </p:txBody>
-      </p:sp>
-      <p:sp>
-        <p:nvSpPr>
-          <p:cNvPr id="6" name="スライド番号プレースホルダー 5">
-            <a:extLst>
-              <a:ext uri="{FF2B5EF4-FFF2-40B4-BE49-F238E27FC236}">
-                <a16:creationId xmlns:a16="http://schemas.microsoft.com/office/drawing/2014/main" id="{BCC6A303-9629-7CD3-45E0-A5790AB39360}"/>
-              </a:ext>
-            </a:extLst>
-          </p:cNvPr>
-          <p:cNvSpPr>
-            <a:spLocks noGrp="1"/>
-          </p:cNvSpPr>
-          <p:nvPr>
-            <p:ph type="sldNum" sz="quarter" idx="12"/>
-          </p:nvPr>
-        </p:nvSpPr>
-        <p:spPr/>
-        <p:txBody>
-          <a:bodyPr/>
-          <a:lstStyle/>
-          <a:p>
-            <a:fld id="{B4DA0251-0B3B-4C1C-96DC-5D2833458AB2}" type="slidenum">
-              <a:rPr kumimoji="1" lang="ja-JP" altLang="en-US" smtClean="0"/>
-              <a:t>8</a:t>
-            </a:fld>
-            <a:endParaRPr kumimoji="1" lang="ja-JP" altLang="en-US"/>
-          </a:p>
-        </p:txBody>
-      </p:sp>
-      <p:sp>
-        <p:nvSpPr>
-          <p:cNvPr id="7" name="テキスト ボックス 6">
-            <a:extLst>
-              <a:ext uri="{FF2B5EF4-FFF2-40B4-BE49-F238E27FC236}">
-                <a16:creationId xmlns:a16="http://schemas.microsoft.com/office/drawing/2014/main" id="{11B94267-10FE-D83D-D798-18C1DFE479A1}"/>
+        </p:txBody>
+      </p:sp>
+      <p:sp>
+        <p:nvSpPr>
+          <p:cNvPr id="11" name="テキスト ボックス 10">
+            <a:extLst>
+              <a:ext uri="{FF2B5EF4-FFF2-40B4-BE49-F238E27FC236}">
+                <a16:creationId xmlns:a16="http://schemas.microsoft.com/office/drawing/2014/main" id="{752C8BA2-8495-5876-444C-02D102767145}"/>
               </a:ext>
             </a:extLst>
           </p:cNvPr>
@@ -8611,27 +12581,128 @@
         </p:nvSpPr>
         <p:spPr>
           <a:xfrm>
-            <a:off x="8629650" y="152400"/>
-            <a:ext cx="3429000" cy="2031325"/>
+            <a:off x="1483566" y="3059668"/>
+            <a:ext cx="10151707" cy="738664"/>
           </a:xfrm>
           <a:prstGeom prst="rect">
             <a:avLst/>
           </a:prstGeom>
+          <a:noFill/>
         </p:spPr>
-        <p:style>
-          <a:lnRef idx="2">
-            <a:schemeClr val="accent5"/>
-          </a:lnRef>
-          <a:fillRef idx="1">
-            <a:schemeClr val="lt1"/>
-          </a:fillRef>
-          <a:effectRef idx="0">
-            <a:schemeClr val="accent5"/>
-          </a:effectRef>
-          <a:fontRef idx="minor">
-            <a:schemeClr val="dk1"/>
-          </a:fontRef>
-        </p:style>
+        <p:txBody>
+          <a:bodyPr wrap="square">
+            <a:spAutoFit/>
+          </a:bodyPr>
+          <a:lstStyle/>
+          <a:p>
+            <a:r>
+              <a:rPr kumimoji="1" lang="en-US" altLang="ja-JP" sz="1400" dirty="0"/>
+              <a:t>Pip</a:t>
+            </a:r>
+            <a:r>
+              <a:rPr kumimoji="1" lang="ja-JP" altLang="en-US" sz="1400" dirty="0"/>
+              <a:t>は</a:t>
+            </a:r>
+            <a:r>
+              <a:rPr kumimoji="1" lang="en-US" altLang="ja-JP" sz="1400" dirty="0"/>
+              <a:t>Python</a:t>
+            </a:r>
+            <a:r>
+              <a:rPr kumimoji="1" lang="ja-JP" altLang="en-US" sz="1400" dirty="0"/>
+              <a:t>用のパッケージマネージャで</a:t>
+            </a:r>
+            <a:r>
+              <a:rPr lang="ja-JP" altLang="en-US" sz="1400" dirty="0"/>
+              <a:t>、作ったクラスや関数を第三者に公開し使ってもらうための仕組みです</a:t>
+            </a:r>
+            <a:endParaRPr lang="en-US" altLang="ja-JP" sz="1400" dirty="0"/>
+          </a:p>
+          <a:p>
+            <a:r>
+              <a:rPr lang="ja-JP" altLang="en-US" sz="1400" dirty="0"/>
+              <a:t>通常は</a:t>
+            </a:r>
+            <a:r>
+              <a:rPr lang="en-US" altLang="ja-JP" sz="1400" dirty="0" err="1"/>
+              <a:t>PyPI</a:t>
+            </a:r>
+            <a:r>
+              <a:rPr lang="en-US" altLang="ja-JP" sz="1400" dirty="0"/>
+              <a:t>(Python Package Index)</a:t>
+            </a:r>
+            <a:r>
+              <a:rPr lang="ja-JP" altLang="en-US" sz="1400" dirty="0"/>
+              <a:t>上にある、パッケージのインストールに使われますが、</a:t>
+            </a:r>
+            <a:r>
+              <a:rPr lang="en-US" altLang="ja-JP" sz="1400" dirty="0"/>
+              <a:t>URL</a:t>
+            </a:r>
+            <a:r>
+              <a:rPr lang="ja-JP" altLang="en-US" sz="1400" dirty="0"/>
+              <a:t>を指定してのインストールも可能</a:t>
+            </a:r>
+            <a:endParaRPr lang="en-US" altLang="ja-JP" sz="1400" dirty="0"/>
+          </a:p>
+          <a:p>
+            <a:r>
+              <a:rPr kumimoji="1" lang="ja-JP" altLang="en-US" sz="1400" dirty="0"/>
+              <a:t>先頭に</a:t>
+            </a:r>
+            <a:r>
+              <a:rPr kumimoji="1" lang="en-US" altLang="ja-JP" sz="1400" dirty="0"/>
+              <a:t>『!』</a:t>
+            </a:r>
+            <a:r>
+              <a:rPr kumimoji="1" lang="ja-JP" altLang="en-US" sz="1400" dirty="0"/>
+              <a:t>を付けることで</a:t>
+            </a:r>
+            <a:r>
+              <a:rPr kumimoji="1" lang="en-US" altLang="ja-JP" sz="1400" dirty="0" err="1"/>
+              <a:t>Colabo</a:t>
+            </a:r>
+            <a:r>
+              <a:rPr kumimoji="1" lang="ja-JP" altLang="en-US" sz="1400" dirty="0"/>
+              <a:t>は「この行は</a:t>
+            </a:r>
+            <a:r>
+              <a:rPr kumimoji="1" lang="en-US" altLang="ja-JP" sz="1400" dirty="0"/>
+              <a:t>Python</a:t>
+            </a:r>
+            <a:r>
+              <a:rPr kumimoji="1" lang="ja-JP" altLang="en-US" sz="1400" dirty="0"/>
+              <a:t>のコードではなく、シェルコマンドだ」と認識します</a:t>
+            </a:r>
+          </a:p>
+        </p:txBody>
+      </p:sp>
+      <p:sp>
+        <p:nvSpPr>
+          <p:cNvPr id="12" name="テキスト ボックス 11">
+            <a:extLst>
+              <a:ext uri="{FF2B5EF4-FFF2-40B4-BE49-F238E27FC236}">
+                <a16:creationId xmlns:a16="http://schemas.microsoft.com/office/drawing/2014/main" id="{C2AE9F03-6C34-1EA7-58B2-34A1B51BFD49}"/>
+              </a:ext>
+            </a:extLst>
+          </p:cNvPr>
+          <p:cNvSpPr txBox="1"/>
+          <p:nvPr/>
+        </p:nvSpPr>
+        <p:spPr>
+          <a:xfrm>
+            <a:off x="1483567" y="4348896"/>
+            <a:ext cx="9870232" cy="369332"/>
+          </a:xfrm>
+          <a:prstGeom prst="rect">
+            <a:avLst/>
+          </a:prstGeom>
+          <a:solidFill>
+            <a:schemeClr val="tx1">
+              <a:lumMod val="20000"/>
+              <a:lumOff val="80000"/>
+            </a:schemeClr>
+          </a:solidFill>
+        </p:spPr>
         <p:txBody>
           <a:bodyPr wrap="square" rtlCol="0">
             <a:spAutoFit/>
@@ -8639,110 +12710,136 @@
           <a:lstStyle/>
           <a:p>
             <a:r>
-              <a:rPr kumimoji="1" lang="ja-JP" altLang="en-US" dirty="0"/>
-              <a:t>課題等の命名規則</a:t>
-            </a:r>
-          </a:p>
-          <a:p>
-            <a:pPr marL="285750" indent="-285750">
-              <a:buFont typeface="Arial" panose="020B0604020202020204" pitchFamily="34" charset="0"/>
-              <a:buChar char="•"/>
-            </a:pPr>
-            <a:r>
-              <a:rPr lang="en-US" altLang="ja-JP" b="1" dirty="0"/>
-              <a:t>[</a:t>
-            </a:r>
-            <a:r>
-              <a:rPr lang="ja-JP" altLang="en-US" b="1" dirty="0"/>
-              <a:t>連番</a:t>
-            </a:r>
-            <a:r>
-              <a:rPr lang="en-US" altLang="ja-JP" b="1" dirty="0"/>
-              <a:t>-</a:t>
-            </a:r>
-            <a:r>
-              <a:rPr lang="ja-JP" altLang="en-US" b="1" dirty="0"/>
-              <a:t>講義日ノートタイプ</a:t>
-            </a:r>
-            <a:r>
-              <a:rPr lang="en-US" altLang="ja-JP" b="1" dirty="0"/>
-              <a:t>]</a:t>
-            </a:r>
-            <a:endParaRPr lang="ja-JP" altLang="en-US" b="1" dirty="0"/>
-          </a:p>
-          <a:p>
-            <a:pPr marL="285750" indent="-285750">
-              <a:buFont typeface="Arial" panose="020B0604020202020204" pitchFamily="34" charset="0"/>
-              <a:buChar char="•"/>
-            </a:pPr>
-            <a:r>
-              <a:rPr lang="ja-JP" altLang="en-US" dirty="0"/>
-              <a:t>講義日：</a:t>
-            </a:r>
-            <a:r>
-              <a:rPr lang="en-US" altLang="ja-JP" dirty="0"/>
-              <a:t>day01</a:t>
-            </a:r>
-            <a:r>
-              <a:rPr lang="ja-JP" altLang="en-US" dirty="0"/>
-              <a:t>～</a:t>
-            </a:r>
-            <a:r>
-              <a:rPr lang="en-US" altLang="ja-JP" dirty="0"/>
-              <a:t>day09</a:t>
-            </a:r>
-          </a:p>
-          <a:p>
-            <a:pPr marL="285750" indent="-285750">
-              <a:buFont typeface="Arial" panose="020B0604020202020204" pitchFamily="34" charset="0"/>
-              <a:buChar char="•"/>
-            </a:pPr>
-            <a:r>
-              <a:rPr lang="ja-JP" altLang="en-US" dirty="0"/>
-              <a:t>ノートタイプ：</a:t>
-            </a:r>
-          </a:p>
-          <a:p>
-            <a:pPr marL="742950" lvl="1" indent="-285750">
-              <a:buFont typeface="Arial" panose="020B0604020202020204" pitchFamily="34" charset="0"/>
-              <a:buChar char="•"/>
-            </a:pPr>
-            <a:r>
-              <a:rPr lang="en-US" altLang="ja-JP" dirty="0"/>
-              <a:t>Kk</a:t>
-            </a:r>
-            <a:r>
-              <a:rPr lang="ja-JP" altLang="en-US" dirty="0"/>
-              <a:t>：講義内課題</a:t>
-            </a:r>
-          </a:p>
-          <a:p>
-            <a:pPr marL="742950" lvl="1" indent="-285750">
-              <a:buFont typeface="Arial" panose="020B0604020202020204" pitchFamily="34" charset="0"/>
-              <a:buChar char="•"/>
-            </a:pPr>
-            <a:r>
-              <a:rPr lang="en-US" altLang="ja-JP" dirty="0"/>
-              <a:t>tb</a:t>
-            </a:r>
-            <a:r>
-              <a:rPr lang="ja-JP" altLang="en-US" dirty="0"/>
-              <a:t>：テキストブック</a:t>
-            </a:r>
-            <a:endParaRPr lang="en-US" altLang="ja-JP" dirty="0"/>
-          </a:p>
-          <a:p>
-            <a:pPr marL="742950" lvl="1" indent="-285750">
-              <a:buFont typeface="Arial" panose="020B0604020202020204" pitchFamily="34" charset="0"/>
-              <a:buChar char="•"/>
-            </a:pPr>
-            <a:r>
-              <a:rPr lang="en-US" altLang="ja-JP" dirty="0" err="1"/>
-              <a:t>hw</a:t>
-            </a:r>
-            <a:r>
-              <a:rPr lang="ja-JP" altLang="en-US" dirty="0"/>
-              <a:t>：宿題</a:t>
+              <a:rPr lang="en-US" altLang="ja-JP" b="0" dirty="0">
+                <a:solidFill>
+                  <a:srgbClr val="AF00DB"/>
+                </a:solidFill>
+                <a:effectLst/>
+                <a:latin typeface="Courier New" panose="02070309020205020404" pitchFamily="49" charset="0"/>
+              </a:rPr>
+              <a:t>from</a:t>
+            </a:r>
+            <a:r>
+              <a:rPr lang="en-US" altLang="ja-JP" b="0" dirty="0">
+                <a:solidFill>
+                  <a:srgbClr val="000000"/>
+                </a:solidFill>
+                <a:effectLst/>
+                <a:latin typeface="Courier New" panose="02070309020205020404" pitchFamily="49" charset="0"/>
+              </a:rPr>
+              <a:t> </a:t>
+            </a:r>
+            <a:r>
+              <a:rPr lang="en-US" altLang="ja-JP" b="0" dirty="0" err="1">
+                <a:solidFill>
+                  <a:srgbClr val="000000"/>
+                </a:solidFill>
+                <a:effectLst/>
+                <a:latin typeface="Courier New" panose="02070309020205020404" pitchFamily="49" charset="0"/>
+              </a:rPr>
+              <a:t>self_portrait</a:t>
+            </a:r>
+            <a:r>
+              <a:rPr lang="en-US" altLang="ja-JP" b="0" dirty="0">
+                <a:solidFill>
+                  <a:srgbClr val="000000"/>
+                </a:solidFill>
+                <a:effectLst/>
+                <a:latin typeface="Courier New" panose="02070309020205020404" pitchFamily="49" charset="0"/>
+              </a:rPr>
+              <a:t> </a:t>
+            </a:r>
+            <a:r>
+              <a:rPr lang="en-US" altLang="ja-JP" b="0" dirty="0">
+                <a:solidFill>
+                  <a:srgbClr val="AF00DB"/>
+                </a:solidFill>
+                <a:effectLst/>
+                <a:latin typeface="Courier New" panose="02070309020205020404" pitchFamily="49" charset="0"/>
+              </a:rPr>
+              <a:t>import</a:t>
+            </a:r>
+            <a:r>
+              <a:rPr lang="en-US" altLang="ja-JP" b="0" dirty="0">
+                <a:solidFill>
+                  <a:srgbClr val="000000"/>
+                </a:solidFill>
+                <a:effectLst/>
+                <a:latin typeface="Courier New" panose="02070309020205020404" pitchFamily="49" charset="0"/>
+              </a:rPr>
+              <a:t> </a:t>
+            </a:r>
+            <a:r>
+              <a:rPr lang="en-US" altLang="ja-JP" b="0" dirty="0" err="1">
+                <a:solidFill>
+                  <a:srgbClr val="000000"/>
+                </a:solidFill>
+                <a:effectLst/>
+                <a:latin typeface="Courier New" panose="02070309020205020404" pitchFamily="49" charset="0"/>
+              </a:rPr>
+              <a:t>SelfPortrait</a:t>
+            </a:r>
+            <a:endParaRPr lang="en-US" altLang="ja-JP" b="0" dirty="0">
+              <a:solidFill>
+                <a:srgbClr val="000000"/>
+              </a:solidFill>
+              <a:effectLst/>
+              <a:latin typeface="Courier New" panose="02070309020205020404" pitchFamily="49" charset="0"/>
+            </a:endParaRPr>
+          </a:p>
+        </p:txBody>
+      </p:sp>
+      <p:sp>
+        <p:nvSpPr>
+          <p:cNvPr id="13" name="テキスト ボックス 12">
+            <a:extLst>
+              <a:ext uri="{FF2B5EF4-FFF2-40B4-BE49-F238E27FC236}">
+                <a16:creationId xmlns:a16="http://schemas.microsoft.com/office/drawing/2014/main" id="{547A8EC4-F653-AC1C-AD82-7D6F616EB86F}"/>
+              </a:ext>
+            </a:extLst>
+          </p:cNvPr>
+          <p:cNvSpPr txBox="1"/>
+          <p:nvPr/>
+        </p:nvSpPr>
+        <p:spPr>
+          <a:xfrm>
+            <a:off x="1483566" y="4718228"/>
+            <a:ext cx="10151707" cy="307777"/>
+          </a:xfrm>
+          <a:prstGeom prst="rect">
+            <a:avLst/>
+          </a:prstGeom>
+          <a:noFill/>
+        </p:spPr>
+        <p:txBody>
+          <a:bodyPr wrap="square">
+            <a:spAutoFit/>
+          </a:bodyPr>
+          <a:lstStyle/>
+          <a:p>
+            <a:r>
+              <a:rPr kumimoji="1" lang="ja-JP" altLang="en-US" sz="1400" dirty="0"/>
+              <a:t>このコード例では</a:t>
+            </a:r>
+            <a:r>
+              <a:rPr lang="en-US" altLang="ja-JP" sz="1400" dirty="0" err="1"/>
+              <a:t>s</a:t>
+            </a:r>
+            <a:r>
+              <a:rPr kumimoji="1" lang="en-US" altLang="ja-JP" sz="1400" dirty="0" err="1"/>
+              <a:t>elf_portrait</a:t>
+            </a:r>
+            <a:r>
+              <a:rPr kumimoji="1" lang="ja-JP" altLang="en-US" sz="1400" dirty="0"/>
+              <a:t>パッケージの</a:t>
+            </a:r>
+            <a:r>
+              <a:rPr kumimoji="1" lang="en-US" altLang="ja-JP" sz="1400" dirty="0" err="1"/>
+              <a:t>SelfPortrait</a:t>
+            </a:r>
+            <a:r>
+              <a:rPr kumimoji="1" lang="ja-JP" altLang="en-US" sz="1400" dirty="0"/>
+              <a:t>クラスを取り込んでいます</a:t>
             </a:r>
           </a:p>
         </p:txBody>
@@ -8750,7 +12847,7 @@
     </p:spTree>
     <p:extLst>
       <p:ext uri="{BB962C8B-B14F-4D97-AF65-F5344CB8AC3E}">
-        <p14:creationId xmlns:p14="http://schemas.microsoft.com/office/powerpoint/2010/main" val="815270114"/>
+        <p14:creationId xmlns:p14="http://schemas.microsoft.com/office/powerpoint/2010/main" val="130950395"/>
       </p:ext>
     </p:extLst>
   </p:cSld>

--- a/slides/computerScience_day4.pptx
+++ b/slides/computerScience_day4.pptx
@@ -6477,7 +6477,7 @@
                   <a:schemeClr val="accent1"/>
                 </a:solidFill>
               </a:rPr>
-              <a:t>14</a:t>
+              <a:t>15</a:t>
             </a:r>
             <a:r>
               <a:rPr kumimoji="1" lang="en-US" altLang="ja-JP" sz="2800" dirty="0"/>
@@ -7079,55 +7079,6 @@
                 </a:solidFill>
                 <a:latin typeface="+mj-lt"/>
               </a:rPr>
-              <a:t>15</a:t>
-            </a:r>
-            <a:r>
-              <a:rPr kumimoji="1" lang="en-US" altLang="ja-JP" dirty="0">
-                <a:latin typeface="+mj-lt"/>
-              </a:rPr>
-              <a:t>-day04</a:t>
-            </a:r>
-            <a:r>
-              <a:rPr lang="en-US" altLang="ja-JP" dirty="0">
-                <a:latin typeface="+mj-lt"/>
-              </a:rPr>
-              <a:t>hw</a:t>
-            </a:r>
-            <a:r>
-              <a:rPr kumimoji="1" lang="en-US" altLang="ja-JP" dirty="0"/>
-              <a:t>]</a:t>
-            </a:r>
-            <a:r>
-              <a:rPr kumimoji="1" lang="ja-JP" altLang="en-US" dirty="0"/>
-              <a:t>　</a:t>
-            </a:r>
-            <a:r>
-              <a:rPr kumimoji="1" lang="en-US" altLang="ja-JP" dirty="0"/>
-              <a:t>NumPy</a:t>
-            </a:r>
-            <a:r>
-              <a:rPr lang="en-US" altLang="ja-JP" dirty="0"/>
-              <a:t>16</a:t>
-            </a:r>
-            <a:r>
-              <a:rPr lang="ja-JP" altLang="en-US" dirty="0"/>
-              <a:t>本ノック</a:t>
-            </a:r>
-            <a:endParaRPr kumimoji="1" lang="en-US" altLang="ja-JP" dirty="0"/>
-          </a:p>
-          <a:p>
-            <a:pPr lvl="1"/>
-            <a:r>
-              <a:rPr kumimoji="1" lang="en-US" altLang="ja-JP" dirty="0"/>
-              <a:t>[</a:t>
-            </a:r>
-            <a:r>
-              <a:rPr kumimoji="1" lang="en-US" altLang="ja-JP" dirty="0">
-                <a:solidFill>
-                  <a:schemeClr val="accent1"/>
-                </a:solidFill>
-                <a:latin typeface="+mj-lt"/>
-              </a:rPr>
               <a:t>1</a:t>
             </a:r>
             <a:r>
@@ -7138,6 +7089,55 @@
                 <a:latin typeface="+mj-lt"/>
               </a:rPr>
               <a:t>6</a:t>
+            </a:r>
+            <a:r>
+              <a:rPr kumimoji="1" lang="en-US" altLang="ja-JP" dirty="0">
+                <a:latin typeface="+mj-lt"/>
+              </a:rPr>
+              <a:t>-day04</a:t>
+            </a:r>
+            <a:r>
+              <a:rPr lang="en-US" altLang="ja-JP" dirty="0">
+                <a:latin typeface="+mj-lt"/>
+              </a:rPr>
+              <a:t>hw</a:t>
+            </a:r>
+            <a:r>
+              <a:rPr kumimoji="1" lang="en-US" altLang="ja-JP" dirty="0"/>
+              <a:t>]</a:t>
+            </a:r>
+            <a:r>
+              <a:rPr kumimoji="1" lang="ja-JP" altLang="en-US" dirty="0"/>
+              <a:t>　</a:t>
+            </a:r>
+            <a:r>
+              <a:rPr kumimoji="1" lang="en-US" altLang="ja-JP" dirty="0"/>
+              <a:t>NumPy</a:t>
+            </a:r>
+            <a:r>
+              <a:rPr lang="en-US" altLang="ja-JP" dirty="0"/>
+              <a:t>16</a:t>
+            </a:r>
+            <a:r>
+              <a:rPr lang="ja-JP" altLang="en-US" dirty="0"/>
+              <a:t>本ノック</a:t>
+            </a:r>
+            <a:endParaRPr kumimoji="1" lang="en-US" altLang="ja-JP" dirty="0"/>
+          </a:p>
+          <a:p>
+            <a:pPr lvl="1"/>
+            <a:r>
+              <a:rPr kumimoji="1" lang="en-US" altLang="ja-JP" dirty="0"/>
+              <a:t>[</a:t>
+            </a:r>
+            <a:r>
+              <a:rPr kumimoji="1" lang="en-US" altLang="ja-JP" dirty="0">
+                <a:solidFill>
+                  <a:schemeClr val="accent1"/>
+                </a:solidFill>
+                <a:latin typeface="+mj-lt"/>
+              </a:rPr>
+              <a:t>17</a:t>
             </a:r>
             <a:r>
               <a:rPr kumimoji="1" lang="en-US" altLang="ja-JP" dirty="0">

--- a/slides/computerScience_day4.pptx
+++ b/slides/computerScience_day4.pptx
@@ -211,7 +211,7 @@
           <a:p>
             <a:fld id="{29743A7E-303A-4EAA-864C-611EED392E65}" type="datetimeFigureOut">
               <a:rPr kumimoji="1" lang="ja-JP" altLang="en-US" smtClean="0"/>
-              <a:t>2025/5/5</a:t>
+              <a:t>2026/5/13</a:t>
             </a:fld>
             <a:endParaRPr kumimoji="1" lang="ja-JP" altLang="en-US"/>
           </a:p>
@@ -1047,13 +1047,13 @@
           <p:nvPr/>
         </p:nvPicPr>
         <p:blipFill>
-          <a:blip r:embed="rId2">
+          <a:blip>
             <a:extLst>
               <a:ext uri="{28A0092B-C50C-407E-A947-70E740481C1C}">
                 <a14:useLocalDpi xmlns:a14="http://schemas.microsoft.com/office/drawing/2010/main" val="0"/>
               </a:ext>
               <a:ext uri="{96DAC541-7B7A-43D3-8B79-37D633B846F1}">
-                <asvg:svgBlip xmlns:asvg="http://schemas.microsoft.com/office/drawing/2016/SVG/main" r:embed="rId3"/>
+                <asvg:svgBlip xmlns:asvg="http://schemas.microsoft.com/office/drawing/2016/SVG/main" r:embed="rId2"/>
               </a:ext>
             </a:extLst>
           </a:blip>
@@ -1086,13 +1086,13 @@
           <p:nvPr/>
         </p:nvPicPr>
         <p:blipFill>
-          <a:blip r:embed="rId4">
+          <a:blip>
             <a:extLst>
               <a:ext uri="{28A0092B-C50C-407E-A947-70E740481C1C}">
                 <a14:useLocalDpi xmlns:a14="http://schemas.microsoft.com/office/drawing/2010/main" val="0"/>
               </a:ext>
               <a:ext uri="{96DAC541-7B7A-43D3-8B79-37D633B846F1}">
-                <asvg:svgBlip xmlns:asvg="http://schemas.microsoft.com/office/drawing/2016/SVG/main" r:embed="rId5"/>
+                <asvg:svgBlip xmlns:asvg="http://schemas.microsoft.com/office/drawing/2016/SVG/main" r:embed="rId3"/>
               </a:ext>
             </a:extLst>
           </a:blip>
@@ -1225,13 +1225,13 @@
           <p:nvPr userDrawn="1"/>
         </p:nvPicPr>
         <p:blipFill>
-          <a:blip r:embed="rId6">
+          <a:blip>
             <a:extLst>
               <a:ext uri="{28A0092B-C50C-407E-A947-70E740481C1C}">
                 <a14:useLocalDpi xmlns:a14="http://schemas.microsoft.com/office/drawing/2010/main" val="0"/>
               </a:ext>
               <a:ext uri="{96DAC541-7B7A-43D3-8B79-37D633B846F1}">
-                <asvg:svgBlip xmlns:asvg="http://schemas.microsoft.com/office/drawing/2016/SVG/main" r:embed="rId7"/>
+                <asvg:svgBlip xmlns:asvg="http://schemas.microsoft.com/office/drawing/2016/SVG/main" r:embed="rId4"/>
               </a:ext>
             </a:extLst>
           </a:blip>
@@ -1264,13 +1264,13 @@
           <p:nvPr userDrawn="1"/>
         </p:nvPicPr>
         <p:blipFill>
-          <a:blip r:embed="rId8">
+          <a:blip>
             <a:extLst>
               <a:ext uri="{28A0092B-C50C-407E-A947-70E740481C1C}">
                 <a14:useLocalDpi xmlns:a14="http://schemas.microsoft.com/office/drawing/2010/main" val="0"/>
               </a:ext>
               <a:ext uri="{96DAC541-7B7A-43D3-8B79-37D633B846F1}">
-                <asvg:svgBlip xmlns:asvg="http://schemas.microsoft.com/office/drawing/2016/SVG/main" r:embed="rId9"/>
+                <asvg:svgBlip xmlns:asvg="http://schemas.microsoft.com/office/drawing/2016/SVG/main" r:embed="rId5"/>
               </a:ext>
             </a:extLst>
           </a:blip>
@@ -2148,13 +2148,13 @@
           <p:nvPr userDrawn="1"/>
         </p:nvPicPr>
         <p:blipFill>
-          <a:blip r:embed="rId2">
+          <a:blip>
             <a:extLst>
               <a:ext uri="{28A0092B-C50C-407E-A947-70E740481C1C}">
                 <a14:useLocalDpi xmlns:a14="http://schemas.microsoft.com/office/drawing/2010/main" val="0"/>
               </a:ext>
               <a:ext uri="{96DAC541-7B7A-43D3-8B79-37D633B846F1}">
-                <asvg:svgBlip xmlns:asvg="http://schemas.microsoft.com/office/drawing/2016/SVG/main" r:embed="rId3"/>
+                <asvg:svgBlip xmlns:asvg="http://schemas.microsoft.com/office/drawing/2016/SVG/main" r:embed="rId2"/>
               </a:ext>
             </a:extLst>
           </a:blip>
@@ -2187,13 +2187,13 @@
           <p:nvPr userDrawn="1"/>
         </p:nvPicPr>
         <p:blipFill>
-          <a:blip r:embed="rId4">
+          <a:blip>
             <a:extLst>
               <a:ext uri="{28A0092B-C50C-407E-A947-70E740481C1C}">
                 <a14:useLocalDpi xmlns:a14="http://schemas.microsoft.com/office/drawing/2010/main" val="0"/>
               </a:ext>
               <a:ext uri="{96DAC541-7B7A-43D3-8B79-37D633B846F1}">
-                <asvg:svgBlip xmlns:asvg="http://schemas.microsoft.com/office/drawing/2016/SVG/main" r:embed="rId5"/>
+                <asvg:svgBlip xmlns:asvg="http://schemas.microsoft.com/office/drawing/2016/SVG/main" r:embed="rId3"/>
               </a:ext>
             </a:extLst>
           </a:blip>
@@ -5524,7 +5524,7 @@
             </a:br>
             <a:r>
               <a:rPr kumimoji="1" lang="ja-JP" altLang="en-US" dirty="0"/>
-              <a:t>科学Ｃ</a:t>
+              <a:t>科学ｅ</a:t>
             </a:r>
           </a:p>
         </p:txBody>
@@ -5584,9 +5584,12 @@
           <a:p>
             <a:r>
               <a:rPr kumimoji="1" lang="en-US" altLang="ja-JP" sz="1550" dirty="0"/>
-              <a:t>Computer Science C</a:t>
-            </a:r>
-            <a:endParaRPr kumimoji="1" lang="ja-JP" altLang="en-US" sz="1550" dirty="0"/>
+              <a:t>Computer Science </a:t>
+            </a:r>
+            <a:r>
+              <a:rPr kumimoji="1" lang="ja-JP" altLang="en-US" sz="1550" dirty="0"/>
+              <a:t>ｅ</a:t>
+            </a:r>
           </a:p>
         </p:txBody>
       </p:sp>
@@ -6235,9 +6238,10 @@
           <a:lstStyle/>
           <a:p>
             <a:r>
-              <a:rPr kumimoji="1" lang="ja-JP" altLang="en-US" dirty="0"/>
-              <a:t>情報科学Ｃ</a:t>
-            </a:r>
+              <a:rPr kumimoji="1" lang="ja-JP" altLang="en-US"/>
+              <a:t>情報科学ｅ</a:t>
+            </a:r>
+            <a:endParaRPr kumimoji="1" lang="ja-JP" altLang="en-US" dirty="0"/>
           </a:p>
         </p:txBody>
       </p:sp>
@@ -6264,11 +6268,7 @@
           <a:p>
             <a:r>
               <a:rPr lang="ja-JP" altLang="en-US" dirty="0"/>
-              <a:t>第３回　</a:t>
-            </a:r>
-            <a:r>
-              <a:rPr kumimoji="1" lang="ja-JP" altLang="en-US" sz="2400" dirty="0"/>
-              <a:t>演算子／制御構文</a:t>
+              <a:t>第３回　継承と差分プログラミング</a:t>
             </a:r>
             <a:r>
               <a:rPr kumimoji="1" lang="ja-JP" altLang="en-US" sz="2400" u="sng" dirty="0"/>
@@ -8703,10 +8703,10 @@
             <a:pPr marL="285750" indent="-285750">
               <a:buSzPct val="130000"/>
               <a:buBlip>
-                <a:blip r:embed="rId2">
+                <a:blip>
                   <a:extLst>
                     <a:ext uri="{96DAC541-7B7A-43D3-8B79-37D633B846F1}">
-                      <asvg:svgBlip xmlns:asvg="http://schemas.microsoft.com/office/drawing/2016/SVG/main" r:embed="rId3"/>
+                      <asvg:svgBlip xmlns:asvg="http://schemas.microsoft.com/office/drawing/2016/SVG/main" r:embed="rId2"/>
                     </a:ext>
                   </a:extLst>
                 </a:blip>
@@ -8722,10 +8722,10 @@
             <a:pPr marL="285750" indent="-285750">
               <a:buSzPct val="130000"/>
               <a:buBlip>
-                <a:blip r:embed="rId2">
+                <a:blip>
                   <a:extLst>
                     <a:ext uri="{96DAC541-7B7A-43D3-8B79-37D633B846F1}">
-                      <asvg:svgBlip xmlns:asvg="http://schemas.microsoft.com/office/drawing/2016/SVG/main" r:embed="rId3"/>
+                      <asvg:svgBlip xmlns:asvg="http://schemas.microsoft.com/office/drawing/2016/SVG/main" r:embed="rId2"/>
                     </a:ext>
                   </a:extLst>
                 </a:blip>
@@ -8805,7 +8805,7 @@
           <a:p>
             <a:r>
               <a:rPr kumimoji="1" lang="ja-JP" altLang="en-US" dirty="0"/>
-              <a:t>情報科学Ｃ</a:t>
+              <a:t>情報科学ｅ</a:t>
             </a:r>
           </a:p>
         </p:txBody>
